--- a/Presentation/2_data-map/presentation.pptx
+++ b/Presentation/2_data-map/presentation.pptx
@@ -2,24 +2,25 @@
 <file path=ppt/presentation.xml><?xml version="1.0" encoding="utf-8"?>
 <p:presentation xmlns:p="http://schemas.openxmlformats.org/presentationml/2006/main">
   <p:sldMasterIdLst>
-    <p:sldMasterId xmlns:r="http://schemas.openxmlformats.org/officeDocument/2006/relationships" id="2147483648" r:id="R2922e4c006504368"/>
+    <p:sldMasterId xmlns:r="http://schemas.openxmlformats.org/officeDocument/2006/relationships" id="2147483648" r:id="R22b74dc2f35d490e"/>
   </p:sldMasterIdLst>
   <p:notesMasterIdLst>
-    <p:notesMasterId xmlns:r="http://schemas.openxmlformats.org/officeDocument/2006/relationships" r:id="Ree8d598bdebc436e"/>
+    <p:notesMasterId xmlns:r="http://schemas.openxmlformats.org/officeDocument/2006/relationships" r:id="R58589af006a54bdd"/>
   </p:notesMasterIdLst>
   <p:sldIdLst>
-    <p:sldId xmlns:r="http://schemas.openxmlformats.org/officeDocument/2006/relationships" id="256" r:id="Rdff74d38fccb4c29"/>
-    <p:sldId xmlns:r="http://schemas.openxmlformats.org/officeDocument/2006/relationships" id="257" r:id="Rebfbbaf057e24d9c"/>
-    <p:sldId xmlns:r="http://schemas.openxmlformats.org/officeDocument/2006/relationships" id="258" r:id="R6d36a04972084e0d"/>
-    <p:sldId xmlns:r="http://schemas.openxmlformats.org/officeDocument/2006/relationships" id="259" r:id="Rf2134bee21374c34"/>
-    <p:sldId xmlns:r="http://schemas.openxmlformats.org/officeDocument/2006/relationships" id="260" r:id="R401d9f1e8cc04f7f"/>
-    <p:sldId xmlns:r="http://schemas.openxmlformats.org/officeDocument/2006/relationships" id="261" r:id="Ra8960c6ab44f4436"/>
-    <p:sldId xmlns:r="http://schemas.openxmlformats.org/officeDocument/2006/relationships" id="262" r:id="R910566d8897d47a5"/>
-    <p:sldId xmlns:r="http://schemas.openxmlformats.org/officeDocument/2006/relationships" id="263" r:id="R198d726218b04213"/>
-    <p:sldId xmlns:r="http://schemas.openxmlformats.org/officeDocument/2006/relationships" id="264" r:id="R20f3c9c211fa48da"/>
-    <p:sldId xmlns:r="http://schemas.openxmlformats.org/officeDocument/2006/relationships" id="265" r:id="R276f601ea9ec4bd2"/>
-    <p:sldId xmlns:r="http://schemas.openxmlformats.org/officeDocument/2006/relationships" id="266" r:id="R83c9ed31edc44d70"/>
-    <p:sldId xmlns:r="http://schemas.openxmlformats.org/officeDocument/2006/relationships" id="267" r:id="Rd041580a4b2e4177"/>
+    <p:sldId xmlns:r="http://schemas.openxmlformats.org/officeDocument/2006/relationships" id="256" r:id="R86445c17b1124338"/>
+    <p:sldId xmlns:r="http://schemas.openxmlformats.org/officeDocument/2006/relationships" id="257" r:id="R6c95f1dd5e1b44e9"/>
+    <p:sldId xmlns:r="http://schemas.openxmlformats.org/officeDocument/2006/relationships" id="258" r:id="R5c1a612f6a8e4c5b"/>
+    <p:sldId xmlns:r="http://schemas.openxmlformats.org/officeDocument/2006/relationships" id="259" r:id="Rffe0a51f511e4d4c"/>
+    <p:sldId xmlns:r="http://schemas.openxmlformats.org/officeDocument/2006/relationships" id="260" r:id="R00aa5c5c1c744888"/>
+    <p:sldId xmlns:r="http://schemas.openxmlformats.org/officeDocument/2006/relationships" id="261" r:id="R63e246cdb8184abb"/>
+    <p:sldId xmlns:r="http://schemas.openxmlformats.org/officeDocument/2006/relationships" id="262" r:id="Rd4208e985a7f4c1d"/>
+    <p:sldId xmlns:r="http://schemas.openxmlformats.org/officeDocument/2006/relationships" id="263" r:id="R8ee7d6b6c1c745a5"/>
+    <p:sldId xmlns:r="http://schemas.openxmlformats.org/officeDocument/2006/relationships" id="264" r:id="R51df32d6f8c040d1"/>
+    <p:sldId xmlns:r="http://schemas.openxmlformats.org/officeDocument/2006/relationships" id="265" r:id="R44e39625840a4007"/>
+    <p:sldId xmlns:r="http://schemas.openxmlformats.org/officeDocument/2006/relationships" id="266" r:id="R9ade6eed200d45bb"/>
+    <p:sldId xmlns:r="http://schemas.openxmlformats.org/officeDocument/2006/relationships" id="267" r:id="R8fd9f519a3764067"/>
+    <p:sldId xmlns:r="http://schemas.openxmlformats.org/officeDocument/2006/relationships" id="268" r:id="R4c6224cb26974780"/>
   </p:sldIdLst>
   <p:sldSz cx="12192000" cy="6858000"/>
   <p:notesSz cx="6858000" cy="9144000"/>
@@ -543,32 +544,27 @@
           <a:lstStyle xmlns:a="http://schemas.openxmlformats.org/drawingml/2006/main"/>
           <a:p xmlns:a="http://schemas.openxmlformats.org/drawingml/2006/main">
             <a:r>
-              <a:t>The authors' kit is a valid benchmark for its own vintage, but it cannot silently stand in for the revised 2025 specification.</a:t>
-            </a:r>
-          </a:p>
-          <a:p xmlns:a="http://schemas.openxmlformats.org/drawingml/2006/main">
-            <a:r>
               <a:t>[Sources]</a:t>
             </a:r>
           </a:p>
           <a:p xmlns:a="http://schemas.openxmlformats.org/drawingml/2006/main">
             <a:r>
-              <a:t>- /Users/lorenzogorini/Library/CloudStorage/OneDrive-UniversitàCommercialeLuigiBocconi/PhD/Courses/Macro 3 - Favero/Paper Replication/MSS2021Febreplicationkit/mss_savingglut_master.do.</a:t>
-            </a:r>
-          </a:p>
-          <a:p xmlns:a="http://schemas.openxmlformats.org/drawingml/2006/main">
-            <a:r>
-              <a:t>- /Users/lorenzogorini/Library/CloudStorage/OneDrive-UniversitàCommercialeLuigiBocconi/PhD/research-wiki/papers/inequality/mian-2025-saving-glut-rich/full.md.</a:t>
-            </a:r>
-          </a:p>
-          <a:p xmlns:a="http://schemas.openxmlformats.org/drawingml/2006/main">
-            <a:r>
-              <a:t>- /Users/lorenzogorini/Library/CloudStorage/OneDrive-UniversitàCommercialeLuigiBocconi/PhD/Courses/Macro 3 - Favero/Paper Replication/docs/reference/author-kit-map.md.</a:t>
-            </a:r>
-          </a:p>
-          <a:p xmlns:a="http://schemas.openxmlformats.org/drawingml/2006/main">
-            <a:r>
-              <a:t>[/Sources]</a:t>
+              <a:t>- MSS2021Febreplicationkit/code/build_fa_unveiling_data.do</a:t>
+            </a:r>
+          </a:p>
+          <a:p xmlns:a="http://schemas.openxmlformats.org/drawingml/2006/main">
+            <a:r>
+              <a:t>- MSS2021Febreplicationkit/code/mss_analysis.do</a:t>
+            </a:r>
+          </a:p>
+          <a:p xmlns:a="http://schemas.openxmlformats.org/drawingml/2006/main">
+            <a:r>
+              <a:t>- MSS_SGR_July242025.pdf, Sections 2.3 and 4.1</a:t>
+            </a:r>
+          </a:p>
+          <a:p xmlns:a="http://schemas.openxmlformats.org/drawingml/2006/main">
+            <a:r>
+              <a:t>- docs/methods/leontief-unveiling.md, version crosswalk</a:t>
             </a:r>
           </a:p>
         </p:txBody>
@@ -638,27 +634,37 @@
           <a:lstStyle xmlns:a="http://schemas.openxmlformats.org/drawingml/2006/main"/>
           <a:p xmlns:a="http://schemas.openxmlformats.org/drawingml/2006/main">
             <a:r>
-              <a:t>Reproduce the authors' vintage first; only then interpret newer public data as robustness rather than replication.</a:t>
-            </a:r>
-          </a:p>
-          <a:p xmlns:a="http://schemas.openxmlformats.org/drawingml/2006/main">
-            <a:r>
               <a:t>[Sources]</a:t>
             </a:r>
           </a:p>
           <a:p xmlns:a="http://schemas.openxmlformats.org/drawingml/2006/main">
             <a:r>
-              <a:t>- /Users/lorenzogorini/Library/CloudStorage/OneDrive-UniversitàCommercialeLuigiBocconi/PhD/Courses/Macro 3 - Favero/Paper Replication/AGENTS.md.</a:t>
-            </a:r>
-          </a:p>
-          <a:p xmlns:a="http://schemas.openxmlformats.org/drawingml/2006/main">
-            <a:r>
-              <a:t>- /Users/lorenzogorini/Library/CloudStorage/OneDrive-UniversitàCommercialeLuigiBocconi/PhD/Courses/Macro 3 - Favero/Paper Replication/docs/data/data-guide.md.</a:t>
-            </a:r>
-          </a:p>
-          <a:p xmlns:a="http://schemas.openxmlformats.org/drawingml/2006/main">
-            <a:r>
-              <a:t>[/Sources]</a:t>
+              <a:t>- MSS_SGR_July242025.pdf, Sections 2.2 and 4.1</a:t>
+            </a:r>
+          </a:p>
+          <a:p xmlns:a="http://schemas.openxmlformats.org/drawingml/2006/main">
+            <a:r>
+              <a:t>- https://www.federalreserve.gov/releases/efa/fwtw.htm</a:t>
+            </a:r>
+          </a:p>
+          <a:p xmlns:a="http://schemas.openxmlformats.org/drawingml/2006/main">
+            <a:r>
+              <a:t>- https://www.federalreserve.gov/releases/efa/fwtw_announcements.htm</a:t>
+            </a:r>
+          </a:p>
+          <a:p xmlns:a="http://schemas.openxmlformats.org/drawingml/2006/main">
+            <a:r>
+              <a:t>- Data/raw/fwtw/fwtw_data_2026-06-18.csv</a:t>
+            </a:r>
+          </a:p>
+          <a:p xmlns:a="http://schemas.openxmlformats.org/drawingml/2006/main">
+            <a:r>
+              <a:t>- docs/data/figure1-data.md</a:t>
+            </a:r>
+          </a:p>
+          <a:p xmlns:a="http://schemas.openxmlformats.org/drawingml/2006/main">
+            <a:r>
+              <a:t>- docs/project/tasks/figure8-replication.md</a:t>
             </a:r>
           </a:p>
         </p:txBody>
@@ -728,6 +734,96 @@
           <a:lstStyle xmlns:a="http://schemas.openxmlformats.org/drawingml/2006/main"/>
           <a:p xmlns:a="http://schemas.openxmlformats.org/drawingml/2006/main">
             <a:r>
+              <a:t>[Sources]</a:t>
+            </a:r>
+          </a:p>
+          <a:p xmlns:a="http://schemas.openxmlformats.org/drawingml/2006/main">
+            <a:r>
+              <a:t>- AGENTS.md, independent-replication layers</a:t>
+            </a:r>
+          </a:p>
+          <a:p xmlns:a="http://schemas.openxmlformats.org/drawingml/2006/main">
+            <a:r>
+              <a:t>- docs/data/data-guide.md</a:t>
+            </a:r>
+          </a:p>
+          <a:p xmlns:a="http://schemas.openxmlformats.org/drawingml/2006/main">
+            <a:r>
+              <a:t>- docs/data/figure1-data.md</a:t>
+            </a:r>
+          </a:p>
+          <a:p xmlns:a="http://schemas.openxmlformats.org/drawingml/2006/main">
+            <a:r>
+              <a:t>- docs/data/figure8-data.md</a:t>
+            </a:r>
+          </a:p>
+        </p:txBody>
+      </p:sp>
+      <p:sp>
+        <p:nvSpPr>
+          <p:cNvPr id="4" name="Slide Number Placeholder 3"/>
+          <p:cNvSpPr>
+            <a:spLocks xmlns:a="http://schemas.openxmlformats.org/drawingml/2006/main" noGrp="1"/>
+          </p:cNvSpPr>
+          <p:nvPr>
+            <p:ph type="sldNum" idx="5"/>
+          </p:nvPr>
+        </p:nvSpPr>
+        <p:spPr/>
+        <p:txBody>
+          <a:bodyPr xmlns:a="http://schemas.openxmlformats.org/drawingml/2006/main"/>
+          <a:lstStyle xmlns:a="http://schemas.openxmlformats.org/drawingml/2006/main"/>
+          <a:p xmlns:a="http://schemas.openxmlformats.org/drawingml/2006/main"/>
+        </p:txBody>
+      </p:sp>
+    </p:spTree>
+  </p:cSld>
+  <p:clrMapOvr>
+    <a:masterClrMapping xmlns:a="http://schemas.openxmlformats.org/drawingml/2006/main"/>
+  </p:clrMapOvr>
+</p:notes>
+</file>
+
+<file path=ppt/notesSlides/notesSlide13.xml><?xml version="1.0" encoding="utf-8"?>
+<p:notes xmlns:p="http://schemas.openxmlformats.org/presentationml/2006/main">
+  <p:cSld>
+    <p:spTree>
+      <p:nvGrpSpPr>
+        <p:cNvPr id="1" name=""/>
+        <p:cNvGrpSpPr/>
+        <p:nvPr/>
+      </p:nvGrpSpPr>
+      <p:grpSpPr>
+        <a:xfrm xmlns:a="http://schemas.openxmlformats.org/drawingml/2006/main"/>
+      </p:grpSpPr>
+      <p:sp>
+        <p:nvSpPr>
+          <p:cNvPr id="2" name="Slide Image Placeholder 1"/>
+          <p:cNvSpPr>
+            <a:spLocks xmlns:a="http://schemas.openxmlformats.org/drawingml/2006/main" noGrp="1"/>
+          </p:cNvSpPr>
+          <p:nvPr>
+            <p:ph type="sldImg" idx="0"/>
+          </p:nvPr>
+        </p:nvSpPr>
+        <p:spPr/>
+      </p:sp>
+      <p:sp>
+        <p:nvSpPr>
+          <p:cNvPr id="3" name="Notes Placeholder 2"/>
+          <p:cNvSpPr>
+            <a:spLocks xmlns:a="http://schemas.openxmlformats.org/drawingml/2006/main" noGrp="1"/>
+          </p:cNvSpPr>
+          <p:nvPr>
+            <p:ph type="body" idx="1"/>
+          </p:nvPr>
+        </p:nvSpPr>
+        <p:spPr/>
+        <p:txBody>
+          <a:bodyPr xmlns:a="http://schemas.openxmlformats.org/drawingml/2006/main"/>
+          <a:lstStyle xmlns:a="http://schemas.openxmlformats.org/drawingml/2006/main"/>
+          <a:p xmlns:a="http://schemas.openxmlformats.org/drawingml/2006/main">
+            <a:r>
               <a:t>Every final number should retain its source, unit, aggregation rule, and accounting invariant.</a:t>
             </a:r>
           </a:p>
@@ -913,27 +1009,22 @@
           <a:lstStyle xmlns:a="http://schemas.openxmlformats.org/drawingml/2006/main"/>
           <a:p xmlns:a="http://schemas.openxmlformats.org/drawingml/2006/main">
             <a:r>
-              <a:t>The ownership network begins with instrument-specific dollar matrices—not with DINA household microdata.</a:t>
-            </a:r>
-          </a:p>
-          <a:p xmlns:a="http://schemas.openxmlformats.org/drawingml/2006/main">
-            <a:r>
               <a:t>[Sources]</a:t>
             </a:r>
           </a:p>
           <a:p xmlns:a="http://schemas.openxmlformats.org/drawingml/2006/main">
             <a:r>
-              <a:t>- /Users/lorenzogorini/Library/CloudStorage/OneDrive-UniversitàCommercialeLuigiBocconi/PhD/research-wiki/papers/inequality/mian-2025-saving-glut-rich/full.md, Equation (4) and data appendix.</a:t>
-            </a:r>
-          </a:p>
-          <a:p xmlns:a="http://schemas.openxmlformats.org/drawingml/2006/main">
-            <a:r>
-              <a:t>- /Users/lorenzogorini/Library/CloudStorage/OneDrive-UniversitàCommercialeLuigiBocconi/PhD/Courses/Macro 3 - Favero/Paper Replication/docs/data/author-kit-data-map.md.</a:t>
-            </a:r>
-          </a:p>
-          <a:p xmlns:a="http://schemas.openxmlformats.org/drawingml/2006/main">
-            <a:r>
-              <a:t>[/Sources]</a:t>
+              <a:t>- MSS_SGR_July242025.pdf, Section 2.2 and Equation (4), physical PDF pages 8–10</a:t>
+            </a:r>
+          </a:p>
+          <a:p xmlns:a="http://schemas.openxmlformats.org/drawingml/2006/main">
+            <a:r>
+              <a:t>- https://www.federalreserve.gov/releases/efa/fwtw.htm</a:t>
+            </a:r>
+          </a:p>
+          <a:p xmlns:a="http://schemas.openxmlformats.org/drawingml/2006/main">
+            <a:r>
+              <a:t>- docs/reference/author-kit-map.md, Financial Accounts and FWTW</a:t>
             </a:r>
           </a:p>
         </p:txBody>
@@ -1003,27 +1094,27 @@
           <a:lstStyle xmlns:a="http://schemas.openxmlformats.org/drawingml/2006/main"/>
           <a:p xmlns:a="http://schemas.openxmlformats.org/drawingml/2006/main">
             <a:r>
-              <a:t>DINA allocates household totals across groups; it does not reveal an unobserved sector-to-sector counterparty cell.</a:t>
-            </a:r>
-          </a:p>
-          <a:p xmlns:a="http://schemas.openxmlformats.org/drawingml/2006/main">
-            <a:r>
               <a:t>[Sources]</a:t>
             </a:r>
           </a:p>
           <a:p xmlns:a="http://schemas.openxmlformats.org/drawingml/2006/main">
             <a:r>
-              <a:t>- /Users/lorenzogorini/Library/CloudStorage/OneDrive-UniversitàCommercialeLuigiBocconi/PhD/research-wiki/papers/inequality/mian-2025-saving-glut-rich/full.md, data appendix.</a:t>
-            </a:r>
-          </a:p>
-          <a:p xmlns:a="http://schemas.openxmlformats.org/drawingml/2006/main">
-            <a:r>
-              <a:t>- /Users/lorenzogorini/Library/CloudStorage/OneDrive-UniversitàCommercialeLuigiBocconi/PhD/Courses/Macro 3 - Favero/Paper Replication/docs/data/author-kit-data-map.md.</a:t>
-            </a:r>
-          </a:p>
-          <a:p xmlns:a="http://schemas.openxmlformats.org/drawingml/2006/main">
-            <a:r>
-              <a:t>[/Sources]</a:t>
+              <a:t>- MSS_SGR_July242025.pdf, Section 2.2, physical PDF page 9</a:t>
+            </a:r>
+          </a:p>
+          <a:p xmlns:a="http://schemas.openxmlformats.org/drawingml/2006/main">
+            <a:r>
+              <a:t>- https://www.federalreserve.gov/econres/notes/feds-notes/from-whom-to-whom-relationships-in-the-financial-accounts-of-the-united-states-20230324.html</a:t>
+            </a:r>
+          </a:p>
+          <a:p xmlns:a="http://schemas.openxmlformats.org/drawingml/2006/main">
+            <a:r>
+              <a:t>- https://www.federalreserve.gov/releases/efa/fwtw.htm</a:t>
+            </a:r>
+          </a:p>
+          <a:p xmlns:a="http://schemas.openxmlformats.org/drawingml/2006/main">
+            <a:r>
+              <a:t>- docs/reference/author-kit-map.md, Financial Accounts and FWTW</a:t>
             </a:r>
           </a:p>
         </p:txBody>
@@ -1531,7 +1622,7 @@
   </p:cSld>
   <p:clrMap bg1="lt1" tx1="dk1" bg2="lt2" tx2="dk2" accent1="accent1" accent2="accent2" accent3="accent3" accent4="accent4" accent5="accent5" accent6="accent6" hlink="hlink" folHlink="folHlink"/>
   <p:sldLayoutIdLst>
-    <p:sldLayoutId xmlns:r="http://schemas.openxmlformats.org/officeDocument/2006/relationships" id="2147483649" r:id="R1486f2ece7214f41"/>
+    <p:sldLayoutId xmlns:r="http://schemas.openxmlformats.org/officeDocument/2006/relationships" id="2147483649" r:id="R1538770ea5c04c52"/>
   </p:sldLayoutIdLst>
   <p:txStyles>
     <p:titleStyle>
@@ -2107,6 +2198,13 @@
             <a:prstDash val="solid"/>
           </a:ln>
         </p:spPr>
+        <p:txBody>
+          <a:bodyPr xmlns:a="http://schemas.openxmlformats.org/drawingml/2006/main"/>
+          <a:lstStyle xmlns:a="http://schemas.openxmlformats.org/drawingml/2006/main"/>
+          <a:p xmlns:a="http://schemas.openxmlformats.org/drawingml/2006/main">
+            <a:endParaRPr/>
+          </a:p>
+        </p:txBody>
       </p:sp>
       <p:sp>
         <p:nvSpPr>
@@ -2197,7 +2295,7 @@
         </p:spPr>
         <p:txBody>
           <a:bodyPr xmlns:a="http://schemas.openxmlformats.org/drawingml/2006/main" wrap="none" lIns="0" tIns="0" rIns="0" bIns="0" anchor="ctr">
-            <a:normAutofit fontScale="100000"/>
+            <a:normAutofit/>
           </a:bodyPr>
           <a:lstStyle xmlns:a="http://schemas.openxmlformats.org/drawingml/2006/main"/>
           <a:p xmlns:a="http://schemas.openxmlformats.org/drawingml/2006/main">
@@ -2256,7 +2354,7 @@
         </p:spPr>
         <p:txBody>
           <a:bodyPr xmlns:a="http://schemas.openxmlformats.org/drawingml/2006/main" wrap="square" lIns="38100" tIns="19050" rIns="38100" bIns="19050" anchor="t">
-            <a:normAutofit fontScale="100000"/>
+            <a:normAutofit/>
           </a:bodyPr>
           <a:lstStyle xmlns:a="http://schemas.openxmlformats.org/drawingml/2006/main"/>
           <a:p xmlns:a="http://schemas.openxmlformats.org/drawingml/2006/main">
@@ -2313,6 +2411,13 @@
             <a:prstDash val="solid"/>
           </a:ln>
         </p:spPr>
+        <p:txBody>
+          <a:bodyPr xmlns:a="http://schemas.openxmlformats.org/drawingml/2006/main"/>
+          <a:lstStyle xmlns:a="http://schemas.openxmlformats.org/drawingml/2006/main"/>
+          <a:p xmlns:a="http://schemas.openxmlformats.org/drawingml/2006/main">
+            <a:endParaRPr/>
+          </a:p>
+        </p:txBody>
       </p:sp>
       <p:sp>
         <p:nvSpPr>
@@ -2344,7 +2449,7 @@
         </p:spPr>
         <p:txBody>
           <a:bodyPr xmlns:a="http://schemas.openxmlformats.org/drawingml/2006/main" wrap="square" lIns="38100" tIns="19050" rIns="38100" bIns="19050" anchor="t">
-            <a:normAutofit/>
+            <a:normAutofit fontScale="25000" lnSpcReduction="20000"/>
           </a:bodyPr>
           <a:lstStyle xmlns:a="http://schemas.openxmlformats.org/drawingml/2006/main"/>
           <a:p xmlns:a="http://schemas.openxmlformats.org/drawingml/2006/main">
@@ -2356,14 +2461,7 @@
                 </a:solidFill>
               </a:defRPr>
             </a:pPr>
-            <a:r>
-              <a:rPr sz="1350" b="0">
-                <a:solidFill>
-                  <a:srgbClr val="243B53"/>
-                </a:solidFill>
-              </a:rPr>
-              <a:t/>
-            </a:r>
+            <a:endParaRPr/>
           </a:p>
         </p:txBody>
       </p:sp>
@@ -2395,6 +2493,13 @@
             <a:prstDash val="solid"/>
           </a:ln>
         </p:spPr>
+        <p:txBody>
+          <a:bodyPr xmlns:a="http://schemas.openxmlformats.org/drawingml/2006/main"/>
+          <a:lstStyle xmlns:a="http://schemas.openxmlformats.org/drawingml/2006/main"/>
+          <a:p xmlns:a="http://schemas.openxmlformats.org/drawingml/2006/main">
+            <a:endParaRPr/>
+          </a:p>
+        </p:txBody>
       </p:sp>
       <p:sp>
         <p:nvSpPr>
@@ -2426,7 +2531,7 @@
         </p:spPr>
         <p:txBody>
           <a:bodyPr xmlns:a="http://schemas.openxmlformats.org/drawingml/2006/main" wrap="square" lIns="38100" tIns="19050" rIns="38100" bIns="19050" anchor="t">
-            <a:normAutofit/>
+            <a:normAutofit fontScale="25000" lnSpcReduction="20000"/>
           </a:bodyPr>
           <a:lstStyle xmlns:a="http://schemas.openxmlformats.org/drawingml/2006/main"/>
           <a:p xmlns:a="http://schemas.openxmlformats.org/drawingml/2006/main">
@@ -2438,14 +2543,7 @@
                 </a:solidFill>
               </a:defRPr>
             </a:pPr>
-            <a:r>
-              <a:rPr sz="1350" b="0">
-                <a:solidFill>
-                  <a:srgbClr val="243B53"/>
-                </a:solidFill>
-              </a:rPr>
-              <a:t/>
-            </a:r>
+            <a:endParaRPr/>
           </a:p>
         </p:txBody>
       </p:sp>
@@ -2538,6 +2636,13 @@
             <a:prstDash val="solid"/>
           </a:ln>
         </p:spPr>
+        <p:txBody>
+          <a:bodyPr xmlns:a="http://schemas.openxmlformats.org/drawingml/2006/main"/>
+          <a:lstStyle xmlns:a="http://schemas.openxmlformats.org/drawingml/2006/main"/>
+          <a:p xmlns:a="http://schemas.openxmlformats.org/drawingml/2006/main">
+            <a:endParaRPr/>
+          </a:p>
+        </p:txBody>
       </p:sp>
       <p:sp>
         <p:nvSpPr>
@@ -2569,11 +2674,12 @@
         </p:spPr>
         <p:txBody>
           <a:bodyPr xmlns:a="http://schemas.openxmlformats.org/drawingml/2006/main" wrap="square" lIns="38100" tIns="19050" rIns="38100" bIns="19050" anchor="t">
-            <a:normAutofit fontScale="100000"/>
+            <a:normAutofit/>
           </a:bodyPr>
           <a:lstStyle xmlns:a="http://schemas.openxmlformats.org/drawingml/2006/main"/>
           <a:p xmlns:a="http://schemas.openxmlformats.org/drawingml/2006/main">
             <a:pPr>
+              <a:buNone/>
               <a:defRPr sz="1050" b="1">
                 <a:solidFill>
                   <a:srgbClr val="C65D16"/>
@@ -2627,11 +2733,12 @@
         </p:spPr>
         <p:txBody>
           <a:bodyPr xmlns:a="http://schemas.openxmlformats.org/drawingml/2006/main" wrap="square" lIns="38100" tIns="19050" rIns="38100" bIns="19050" anchor="t">
-            <a:normAutofit fontScale="100000"/>
+            <a:normAutofit/>
           </a:bodyPr>
           <a:lstStyle xmlns:a="http://schemas.openxmlformats.org/drawingml/2006/main"/>
           <a:p xmlns:a="http://schemas.openxmlformats.org/drawingml/2006/main">
             <a:pPr>
+              <a:buNone/>
               <a:defRPr sz="2025">
                 <a:solidFill>
                   <a:srgbClr val="1F2933"/>
@@ -2686,334 +2793,6 @@
       </p:grpSpPr>
       <p:sp>
         <p:nvSpPr>
-          <p:cNvPr id="16" name="kicker">
-            <a:extLst xmlns:a="http://schemas.openxmlformats.org/drawingml/2006/main">
-              <a:ext uri="{FF2B5EF4-FFF2-40B4-BE49-F238E27FC236}">
-                <a16:creationId xmlns:a16="http://schemas.microsoft.com/office/drawing/2014/main" id="{A21B0EF0-DF12-49E0-8282-A5EB5B11AC45}"/>
-              </a:ext>
-            </a:extLst>
-          </p:cNvPr>
-          <p:cNvSpPr>
-            <a:spLocks xmlns:a="http://schemas.openxmlformats.org/drawingml/2006/main" noGrp="1"/>
-          </p:cNvSpPr>
-          <p:nvPr/>
-        </p:nvSpPr>
-        <p:spPr>
-          <a:xfrm xmlns:a="http://schemas.openxmlformats.org/drawingml/2006/main">
-            <a:off x="457200" y="228600"/>
-            <a:ext cx="8572500" cy="209550"/>
-          </a:xfrm>
-          <a:prstGeom xmlns:a="http://schemas.openxmlformats.org/drawingml/2006/main" prst="rect">
-            <a:avLst/>
-          </a:prstGeom>
-          <a:noFill xmlns:a="http://schemas.openxmlformats.org/drawingml/2006/main"/>
-          <a:ln xmlns:a="http://schemas.openxmlformats.org/drawingml/2006/main" w="0">
-            <a:noFill/>
-            <a:prstDash val="solid"/>
-          </a:ln>
-        </p:spPr>
-        <p:txBody>
-          <a:bodyPr xmlns:a="http://schemas.openxmlformats.org/drawingml/2006/main" wrap="square" lIns="38100" tIns="19050" rIns="38100" bIns="19050" anchor="t">
-            <a:noAutofit/>
-          </a:bodyPr>
-          <a:lstStyle xmlns:a="http://schemas.openxmlformats.org/drawingml/2006/main"/>
-          <a:p xmlns:a="http://schemas.openxmlformats.org/drawingml/2006/main">
-            <a:pPr algn="l">
-              <a:buNone/>
-              <a:defRPr sz="1050" b="1">
-                <a:solidFill>
-                  <a:srgbClr val="C65D16"/>
-                </a:solidFill>
-                <a:latin typeface="Calibri"/>
-                <a:ea typeface="Calibri"/>
-                <a:cs typeface="Calibri"/>
-              </a:defRPr>
-            </a:pPr>
-            <a:r>
-              <a:rPr sz="1050" b="1">
-                <a:solidFill>
-                  <a:srgbClr val="C65D16"/>
-                </a:solidFill>
-                <a:latin typeface="Calibri"/>
-                <a:ea typeface="Calibri"/>
-                <a:cs typeface="Calibri"/>
-              </a:rPr>
-              <a:t>VERSION BOUNDARY</a:t>
-            </a:r>
-          </a:p>
-        </p:txBody>
-      </p:sp>
-      <p:sp>
-        <p:nvSpPr>
-          <p:cNvPr id="2" name="title">
-            <a:extLst xmlns:a="http://schemas.openxmlformats.org/drawingml/2006/main">
-              <a:ext uri="{FF2B5EF4-FFF2-40B4-BE49-F238E27FC236}">
-                <a16:creationId xmlns:a16="http://schemas.microsoft.com/office/drawing/2014/main" id="{980D81F7-DD28-469F-9690-DA4664C92695}"/>
-              </a:ext>
-            </a:extLst>
-          </p:cNvPr>
-          <p:cNvSpPr>
-            <a:spLocks xmlns:a="http://schemas.openxmlformats.org/drawingml/2006/main" noGrp="1"/>
-          </p:cNvSpPr>
-          <p:nvPr/>
-        </p:nvSpPr>
-        <p:spPr>
-          <a:xfrm xmlns:a="http://schemas.openxmlformats.org/drawingml/2006/main">
-            <a:off x="457200" y="457200"/>
-            <a:ext cx="10763250" cy="495300"/>
-          </a:xfrm>
-          <a:prstGeom xmlns:a="http://schemas.openxmlformats.org/drawingml/2006/main" prst="rect">
-            <a:avLst/>
-          </a:prstGeom>
-          <a:noFill xmlns:a="http://schemas.openxmlformats.org/drawingml/2006/main"/>
-          <a:ln xmlns:a="http://schemas.openxmlformats.org/drawingml/2006/main" w="0">
-            <a:noFill/>
-            <a:prstDash val="solid"/>
-          </a:ln>
-        </p:spPr>
-        <p:txBody>
-          <a:bodyPr xmlns:a="http://schemas.openxmlformats.org/drawingml/2006/main" wrap="none" lIns="0" tIns="0" rIns="0" bIns="0" anchor="ctr">
-            <a:normAutofit fontScale="100000"/>
-          </a:bodyPr>
-          <a:lstStyle xmlns:a="http://schemas.openxmlformats.org/drawingml/2006/main"/>
-          <a:p xmlns:a="http://schemas.openxmlformats.org/drawingml/2006/main">
-            <a:pPr algn="l">
-              <a:buNone/>
-              <a:defRPr sz="2700" b="1">
-                <a:solidFill>
-                  <a:srgbClr val="102A43"/>
-                </a:solidFill>
-                <a:latin typeface="Calibri Light"/>
-                <a:ea typeface="Calibri Light"/>
-                <a:cs typeface="Calibri Light"/>
-              </a:defRPr>
-            </a:pPr>
-            <a:r>
-              <a:rPr sz="2700" b="1">
-                <a:solidFill>
-                  <a:srgbClr val="102A43"/>
-                </a:solidFill>
-                <a:latin typeface="Calibri Light"/>
-                <a:ea typeface="Calibri Light"/>
-                <a:cs typeface="Calibri Light"/>
-              </a:rPr>
-              <a:t>The 2021 builders do not implement the full 2025 method</a:t>
-            </a:r>
-          </a:p>
-        </p:txBody>
-      </p:sp>
-      <p:sp>
-        <p:nvSpPr>
-          <p:cNvPr id="3" name="header-rule">
-            <a:extLst xmlns:a="http://schemas.openxmlformats.org/drawingml/2006/main">
-              <a:ext uri="{FF2B5EF4-FFF2-40B4-BE49-F238E27FC236}">
-                <a16:creationId xmlns:a16="http://schemas.microsoft.com/office/drawing/2014/main" id="{4CDCC845-0954-47BE-99D9-ACC92C7E0BDF}"/>
-              </a:ext>
-            </a:extLst>
-          </p:cNvPr>
-          <p:cNvSpPr>
-            <a:spLocks xmlns:a="http://schemas.openxmlformats.org/drawingml/2006/main" noGrp="1"/>
-          </p:cNvSpPr>
-          <p:nvPr/>
-        </p:nvSpPr>
-        <p:spPr>
-          <a:xfrm xmlns:a="http://schemas.openxmlformats.org/drawingml/2006/main">
-            <a:off x="457200" y="981075"/>
-            <a:ext cx="11277600" cy="19050"/>
-          </a:xfrm>
-          <a:prstGeom xmlns:a="http://schemas.openxmlformats.org/drawingml/2006/main" prst="rect">
-            <a:avLst/>
-          </a:prstGeom>
-          <a:solidFill xmlns:a="http://schemas.openxmlformats.org/drawingml/2006/main">
-            <a:srgbClr val="102A43"/>
-          </a:solidFill>
-          <a:ln xmlns:a="http://schemas.openxmlformats.org/drawingml/2006/main" w="0">
-            <a:solidFill>
-              <a:srgbClr val="102A43"/>
-            </a:solidFill>
-            <a:prstDash val="solid"/>
-          </a:ln>
-        </p:spPr>
-      </p:sp>
-      <p:sp>
-        <p:nvSpPr>
-          <p:cNvPr id="4" name="slide-number">
-            <a:extLst xmlns:a="http://schemas.openxmlformats.org/drawingml/2006/main">
-              <a:ext uri="{FF2B5EF4-FFF2-40B4-BE49-F238E27FC236}">
-                <a16:creationId xmlns:a16="http://schemas.microsoft.com/office/drawing/2014/main" id="{D40E37CD-502F-44AD-863C-998C0D343148}"/>
-              </a:ext>
-            </a:extLst>
-          </p:cNvPr>
-          <p:cNvSpPr>
-            <a:spLocks xmlns:a="http://schemas.openxmlformats.org/drawingml/2006/main" noGrp="1"/>
-          </p:cNvSpPr>
-          <p:nvPr/>
-        </p:nvSpPr>
-        <p:spPr>
-          <a:xfrm xmlns:a="http://schemas.openxmlformats.org/drawingml/2006/main">
-            <a:off x="11334750" y="257175"/>
-            <a:ext cx="400050" cy="228600"/>
-          </a:xfrm>
-          <a:prstGeom xmlns:a="http://schemas.openxmlformats.org/drawingml/2006/main" prst="rect">
-            <a:avLst/>
-          </a:prstGeom>
-          <a:noFill xmlns:a="http://schemas.openxmlformats.org/drawingml/2006/main"/>
-          <a:ln xmlns:a="http://schemas.openxmlformats.org/drawingml/2006/main" w="0">
-            <a:noFill/>
-            <a:prstDash val="solid"/>
-          </a:ln>
-        </p:spPr>
-        <p:txBody>
-          <a:bodyPr xmlns:a="http://schemas.openxmlformats.org/drawingml/2006/main" wrap="square" lIns="38100" tIns="19050" rIns="38100" bIns="19050" anchor="t">
-            <a:normAutofit fontScale="100000"/>
-          </a:bodyPr>
-          <a:lstStyle xmlns:a="http://schemas.openxmlformats.org/drawingml/2006/main"/>
-          <a:p xmlns:a="http://schemas.openxmlformats.org/drawingml/2006/main">
-            <a:pPr algn="r">
-              <a:buNone/>
-              <a:defRPr sz="1050" b="1">
-                <a:solidFill>
-                  <a:srgbClr val="627D98"/>
-                </a:solidFill>
-                <a:latin typeface="Calibri"/>
-                <a:ea typeface="Calibri"/>
-                <a:cs typeface="Calibri"/>
-              </a:defRPr>
-            </a:pPr>
-            <a:r>
-              <a:rPr sz="1050" b="1">
-                <a:solidFill>
-                  <a:srgbClr val="627D98"/>
-                </a:solidFill>
-                <a:latin typeface="Calibri"/>
-                <a:ea typeface="Calibri"/>
-                <a:cs typeface="Calibri"/>
-              </a:rPr>
-              <a:t>10</a:t>
-            </a:r>
-          </a:p>
-        </p:txBody>
-      </p:sp>
-      <p:sp>
-        <p:nvSpPr>
-          <p:cNvPr id="5" name="left-label">
-            <a:extLst xmlns:a="http://schemas.openxmlformats.org/drawingml/2006/main">
-              <a:ext uri="{FF2B5EF4-FFF2-40B4-BE49-F238E27FC236}">
-                <a16:creationId xmlns:a16="http://schemas.microsoft.com/office/drawing/2014/main" id="{7D68AFC4-C9F0-4906-8B90-9F78159CD369}"/>
-              </a:ext>
-            </a:extLst>
-          </p:cNvPr>
-          <p:cNvSpPr>
-            <a:spLocks xmlns:a="http://schemas.openxmlformats.org/drawingml/2006/main" noGrp="1"/>
-          </p:cNvSpPr>
-          <p:nvPr/>
-        </p:nvSpPr>
-        <p:spPr>
-          <a:xfrm xmlns:a="http://schemas.openxmlformats.org/drawingml/2006/main">
-            <a:off x="457200" y="1104900"/>
-            <a:ext cx="5410200" cy="257175"/>
-          </a:xfrm>
-          <a:prstGeom xmlns:a="http://schemas.openxmlformats.org/drawingml/2006/main" prst="rect">
-            <a:avLst/>
-          </a:prstGeom>
-          <a:noFill xmlns:a="http://schemas.openxmlformats.org/drawingml/2006/main"/>
-          <a:ln xmlns:a="http://schemas.openxmlformats.org/drawingml/2006/main" w="0">
-            <a:noFill/>
-            <a:prstDash val="solid"/>
-          </a:ln>
-        </p:spPr>
-        <p:txBody>
-          <a:bodyPr xmlns:a="http://schemas.openxmlformats.org/drawingml/2006/main" wrap="square" lIns="38100" tIns="19050" rIns="38100" bIns="19050" anchor="t">
-            <a:normAutofit fontScale="100000"/>
-          </a:bodyPr>
-          <a:lstStyle xmlns:a="http://schemas.openxmlformats.org/drawingml/2006/main"/>
-          <a:p xmlns:a="http://schemas.openxmlformats.org/drawingml/2006/main">
-            <a:pPr algn="l">
-              <a:buNone/>
-              <a:defRPr sz="1050" b="1">
-                <a:solidFill>
-                  <a:srgbClr val="2E5B88"/>
-                </a:solidFill>
-                <a:latin typeface="Calibri"/>
-                <a:ea typeface="Calibri"/>
-                <a:cs typeface="Calibri"/>
-              </a:defRPr>
-            </a:pPr>
-            <a:r>
-              <a:rPr sz="1050" b="1">
-                <a:solidFill>
-                  <a:srgbClr val="2E5B88"/>
-                </a:solidFill>
-                <a:latin typeface="Calibri"/>
-                <a:ea typeface="Calibri"/>
-                <a:cs typeface="Calibri"/>
-              </a:rPr>
-              <a:t>FEBRUARY 2021 PACKAGE</a:t>
-            </a:r>
-          </a:p>
-        </p:txBody>
-      </p:sp>
-      <p:sp>
-        <p:nvSpPr>
-          <p:cNvPr id="6" name="right-label">
-            <a:extLst xmlns:a="http://schemas.openxmlformats.org/drawingml/2006/main">
-              <a:ext uri="{FF2B5EF4-FFF2-40B4-BE49-F238E27FC236}">
-                <a16:creationId xmlns:a16="http://schemas.microsoft.com/office/drawing/2014/main" id="{169CDC6F-7B71-4F41-AC26-C991BF45F73E}"/>
-              </a:ext>
-            </a:extLst>
-          </p:cNvPr>
-          <p:cNvSpPr>
-            <a:spLocks xmlns:a="http://schemas.openxmlformats.org/drawingml/2006/main" noGrp="1"/>
-          </p:cNvSpPr>
-          <p:nvPr/>
-        </p:nvSpPr>
-        <p:spPr>
-          <a:xfrm xmlns:a="http://schemas.openxmlformats.org/drawingml/2006/main">
-            <a:off x="6324600" y="1104900"/>
-            <a:ext cx="5410200" cy="257175"/>
-          </a:xfrm>
-          <a:prstGeom xmlns:a="http://schemas.openxmlformats.org/drawingml/2006/main" prst="rect">
-            <a:avLst/>
-          </a:prstGeom>
-          <a:noFill xmlns:a="http://schemas.openxmlformats.org/drawingml/2006/main"/>
-          <a:ln xmlns:a="http://schemas.openxmlformats.org/drawingml/2006/main" w="0">
-            <a:noFill/>
-            <a:prstDash val="solid"/>
-          </a:ln>
-        </p:spPr>
-        <p:txBody>
-          <a:bodyPr xmlns:a="http://schemas.openxmlformats.org/drawingml/2006/main" wrap="square" lIns="38100" tIns="19050" rIns="38100" bIns="19050" anchor="t">
-            <a:normAutofit fontScale="100000"/>
-          </a:bodyPr>
-          <a:lstStyle xmlns:a="http://schemas.openxmlformats.org/drawingml/2006/main"/>
-          <a:p xmlns:a="http://schemas.openxmlformats.org/drawingml/2006/main">
-            <a:pPr algn="l">
-              <a:buNone/>
-              <a:defRPr sz="1050" b="1">
-                <a:solidFill>
-                  <a:srgbClr val="2E5B88"/>
-                </a:solidFill>
-                <a:latin typeface="Calibri"/>
-                <a:ea typeface="Calibri"/>
-                <a:cs typeface="Calibri"/>
-              </a:defRPr>
-            </a:pPr>
-            <a:r>
-              <a:rPr sz="1050" b="1">
-                <a:solidFill>
-                  <a:srgbClr val="2E5B88"/>
-                </a:solidFill>
-                <a:latin typeface="Calibri"/>
-                <a:ea typeface="Calibri"/>
-                <a:cs typeface="Calibri"/>
-              </a:rPr>
-              <a:t>JULY 2025 TARGET PAPER</a:t>
-            </a:r>
-          </a:p>
-        </p:txBody>
-      </p:sp>
-      <p:sp>
-        <p:nvSpPr>
           <p:cNvPr id="7" name="Regenerated 2021 saving-glut figure-frame">
             <a:extLst xmlns:a="http://schemas.openxmlformats.org/drawingml/2006/main">
               <a:ext uri="{FF2B5EF4-FFF2-40B4-BE49-F238E27FC236}">
@@ -3046,51 +2825,36 @@
             <a:prstDash val="solid"/>
           </a:ln>
         </p:spPr>
-      </p:sp>
-      <p:pic>
-        <p:nvPicPr>
-          <p:cNvPr id="34" name=""/>
-          <p:cNvPicPr>
-            <a:picLocks xmlns:a="http://schemas.openxmlformats.org/drawingml/2006/main" noChangeAspect="1"/>
-          </p:cNvPicPr>
-          <p:nvPr/>
-        </p:nvPicPr>
-        <p:blipFill>
-          <a:blip xmlns:r="http://schemas.openxmlformats.org/officeDocument/2006/relationships" xmlns:a="http://schemas.openxmlformats.org/drawingml/2006/main" r:embed="Rf2f5ead92382455a"/>
-          <a:stretch xmlns:a="http://schemas.openxmlformats.org/drawingml/2006/main"/>
-        </p:blipFill>
-        <p:spPr>
-          <a:xfrm xmlns:a="http://schemas.openxmlformats.org/drawingml/2006/main">
-            <a:off x="11715750" y="6762750"/>
-            <a:ext cx="9525" cy="9525"/>
-          </a:xfrm>
-          <a:prstGeom xmlns:a="http://schemas.openxmlformats.org/drawingml/2006/main" prst="rect">
-            <a:avLst/>
-          </a:prstGeom>
-        </p:spPr>
-      </p:pic>
-      <p:sp>
-        <p:nvSpPr>
-          <p:cNvPr id="9" name="2025 Figure 5 saving by wealth group-frame">
-            <a:extLst xmlns:a="http://schemas.openxmlformats.org/drawingml/2006/main">
-              <a:ext uri="{FF2B5EF4-FFF2-40B4-BE49-F238E27FC236}">
-                <a16:creationId xmlns:a16="http://schemas.microsoft.com/office/drawing/2014/main" id="{CECC33D5-8AA8-489D-A8CE-CF41FD19251A}"/>
-              </a:ext>
-            </a:extLst>
-          </p:cNvPr>
-          <p:cNvSpPr>
-            <a:spLocks xmlns:a="http://schemas.openxmlformats.org/drawingml/2006/main" noGrp="1"/>
-          </p:cNvSpPr>
-          <p:nvPr/>
-        </p:nvSpPr>
-        <p:spPr>
-          <a:xfrm xmlns:a="http://schemas.openxmlformats.org/drawingml/2006/main">
-            <a:off x="6324600" y="1428750"/>
-            <a:ext cx="5410200" cy="3476625"/>
+        <p:txBody>
+          <a:bodyPr xmlns:a="http://schemas.openxmlformats.org/drawingml/2006/main"/>
+          <a:lstStyle xmlns:a="http://schemas.openxmlformats.org/drawingml/2006/main"/>
+          <a:p xmlns:a="http://schemas.openxmlformats.org/drawingml/2006/main">
+            <a:endParaRPr/>
+          </a:p>
+        </p:txBody>
+      </p:sp>
+      <p:sp>
+        <p:nvSpPr>
+          <p:cNvPr id="21" name="kit-round-surface">
+            <a:extLst xmlns:a="http://schemas.openxmlformats.org/drawingml/2006/main">
+              <a:ext uri="{FF2B5EF4-FFF2-40B4-BE49-F238E27FC236}">
+                <a16:creationId xmlns:a16="http://schemas.microsoft.com/office/drawing/2014/main" id="{4294AB3C-9BDB-42D5-9F33-6041D7AA069A}"/>
+              </a:ext>
+            </a:extLst>
+          </p:cNvPr>
+          <p:cNvSpPr>
+            <a:spLocks xmlns:a="http://schemas.openxmlformats.org/drawingml/2006/main" noGrp="1"/>
+          </p:cNvSpPr>
+          <p:nvPr/>
+        </p:nvSpPr>
+        <p:spPr>
+          <a:xfrm xmlns:a="http://schemas.openxmlformats.org/drawingml/2006/main">
+            <a:off x="1810857" y="3742660"/>
+            <a:ext cx="2664785" cy="1000790"/>
           </a:xfrm>
           <a:prstGeom xmlns:a="http://schemas.openxmlformats.org/drawingml/2006/main" prst="roundRect">
             <a:avLst>
-              <a:gd name="adj" fmla="val 2192"/>
+              <a:gd name="adj" fmla="val 32718"/>
             </a:avLst>
           </a:prstGeom>
           <a:solidFill xmlns:a="http://schemas.openxmlformats.org/drawingml/2006/main">
@@ -3103,17 +2867,456 @@
             <a:prstDash val="solid"/>
           </a:ln>
         </p:spPr>
+        <p:txBody>
+          <a:bodyPr xmlns:a="http://schemas.openxmlformats.org/drawingml/2006/main" anchor="ctr"/>
+          <a:lstStyle xmlns:a="http://schemas.openxmlformats.org/drawingml/2006/main"/>
+          <a:p xmlns:a="http://schemas.openxmlformats.org/drawingml/2006/main">
+            <a:pPr algn="ctr">
+              <a:defRPr sz="1500" b="1">
+                <a:solidFill>
+                  <a:srgbClr val="17324D"/>
+                </a:solidFill>
+              </a:defRPr>
+            </a:pPr>
+            <a:r>
+              <a:rPr sz="1500" b="1">
+                <a:solidFill>
+                  <a:srgbClr val="17324D"/>
+                </a:solidFill>
+              </a:rPr>
+              <a:t>SEVEN STAGE-SPECIFIC ROUTING STEPS</a:t>
+            </a:r>
+            <a:endParaRPr/>
+          </a:p>
+          <a:p xmlns:a="http://schemas.openxmlformats.org/drawingml/2006/main">
+            <a:pPr algn="ctr">
+              <a:defRPr sz="1500" b="1">
+                <a:solidFill>
+                  <a:srgbClr val="17324D"/>
+                </a:solidFill>
+              </a:defRPr>
+            </a:pPr>
+            <a:r>
+              <a:rPr sz="1500" b="1">
+                <a:solidFill>
+                  <a:srgbClr val="17324D"/>
+                </a:solidFill>
+              </a:rPr>
+              <a:t>not a fixed-Q truncation</a:t>
+            </a:r>
+            <a:endParaRPr/>
+          </a:p>
+        </p:txBody>
+      </p:sp>
+      <p:sp>
+        <p:nvSpPr>
+          <p:cNvPr id="16" name="kicker">
+            <a:extLst xmlns:a="http://schemas.openxmlformats.org/drawingml/2006/main">
+              <a:ext uri="{FF2B5EF4-FFF2-40B4-BE49-F238E27FC236}">
+                <a16:creationId xmlns:a16="http://schemas.microsoft.com/office/drawing/2014/main" id="{A21B0EF0-DF12-49E0-8282-A5EB5B11AC45}"/>
+              </a:ext>
+            </a:extLst>
+          </p:cNvPr>
+          <p:cNvSpPr>
+            <a:spLocks xmlns:a="http://schemas.openxmlformats.org/drawingml/2006/main" noGrp="1"/>
+          </p:cNvSpPr>
+          <p:nvPr/>
+        </p:nvSpPr>
+        <p:spPr>
+          <a:xfrm xmlns:a="http://schemas.openxmlformats.org/drawingml/2006/main">
+            <a:off x="457200" y="228600"/>
+            <a:ext cx="8572500" cy="209550"/>
+          </a:xfrm>
+          <a:prstGeom xmlns:a="http://schemas.openxmlformats.org/drawingml/2006/main" prst="rect">
+            <a:avLst/>
+          </a:prstGeom>
+          <a:noFill xmlns:a="http://schemas.openxmlformats.org/drawingml/2006/main"/>
+          <a:ln xmlns:a="http://schemas.openxmlformats.org/drawingml/2006/main" w="0">
+            <a:noFill/>
+            <a:prstDash val="solid"/>
+          </a:ln>
+        </p:spPr>
+        <p:txBody>
+          <a:bodyPr xmlns:a="http://schemas.openxmlformats.org/drawingml/2006/main" wrap="square" lIns="38100" tIns="19050" rIns="38100" bIns="19050" anchor="t">
+            <a:noAutofit/>
+          </a:bodyPr>
+          <a:lstStyle xmlns:a="http://schemas.openxmlformats.org/drawingml/2006/main"/>
+          <a:p xmlns:a="http://schemas.openxmlformats.org/drawingml/2006/main">
+            <a:pPr algn="l">
+              <a:buNone/>
+              <a:defRPr sz="1050" b="1">
+                <a:solidFill>
+                  <a:srgbClr val="C65D16"/>
+                </a:solidFill>
+                <a:latin typeface="Calibri"/>
+                <a:ea typeface="Calibri"/>
+                <a:cs typeface="Calibri"/>
+              </a:defRPr>
+            </a:pPr>
+            <a:r>
+              <a:rPr sz="1050" b="1">
+                <a:solidFill>
+                  <a:srgbClr val="C65D16"/>
+                </a:solidFill>
+                <a:latin typeface="Calibri"/>
+                <a:ea typeface="Calibri"/>
+                <a:cs typeface="Calibri"/>
+              </a:rPr>
+              <a:t>VERSION BOUNDARY</a:t>
+            </a:r>
+          </a:p>
+        </p:txBody>
+      </p:sp>
+      <p:sp>
+        <p:nvSpPr>
+          <p:cNvPr id="2" name="title">
+            <a:extLst xmlns:a="http://schemas.openxmlformats.org/drawingml/2006/main">
+              <a:ext uri="{FF2B5EF4-FFF2-40B4-BE49-F238E27FC236}">
+                <a16:creationId xmlns:a16="http://schemas.microsoft.com/office/drawing/2014/main" id="{980D81F7-DD28-469F-9690-DA4664C92695}"/>
+              </a:ext>
+            </a:extLst>
+          </p:cNvPr>
+          <p:cNvSpPr>
+            <a:spLocks xmlns:a="http://schemas.openxmlformats.org/drawingml/2006/main" noGrp="1"/>
+          </p:cNvSpPr>
+          <p:nvPr/>
+        </p:nvSpPr>
+        <p:spPr>
+          <a:xfrm xmlns:a="http://schemas.openxmlformats.org/drawingml/2006/main">
+            <a:off x="457200" y="457200"/>
+            <a:ext cx="10763250" cy="495300"/>
+          </a:xfrm>
+          <a:prstGeom xmlns:a="http://schemas.openxmlformats.org/drawingml/2006/main" prst="rect">
+            <a:avLst/>
+          </a:prstGeom>
+          <a:noFill xmlns:a="http://schemas.openxmlformats.org/drawingml/2006/main"/>
+          <a:ln xmlns:a="http://schemas.openxmlformats.org/drawingml/2006/main" w="0">
+            <a:noFill/>
+            <a:prstDash val="solid"/>
+          </a:ln>
+        </p:spPr>
+        <p:txBody>
+          <a:bodyPr xmlns:a="http://schemas.openxmlformats.org/drawingml/2006/main" wrap="none" lIns="0" tIns="0" rIns="0" bIns="0" anchor="ctr">
+            <a:normAutofit fontScale="100000"/>
+          </a:bodyPr>
+          <a:lstStyle xmlns:a="http://schemas.openxmlformats.org/drawingml/2006/main"/>
+          <a:p xmlns:a="http://schemas.openxmlformats.org/drawingml/2006/main">
+            <a:pPr algn="l">
+              <a:buNone/>
+              <a:defRPr sz="2700" b="1">
+                <a:solidFill>
+                  <a:srgbClr val="102A43"/>
+                </a:solidFill>
+                <a:latin typeface="Calibri Light"/>
+                <a:ea typeface="Calibri Light"/>
+                <a:cs typeface="Calibri Light"/>
+              </a:defRPr>
+            </a:pPr>
+            <a:r>
+              <a:rPr sz="2700" b="1">
+                <a:solidFill>
+                  <a:srgbClr val="102A43"/>
+                </a:solidFill>
+                <a:latin typeface="Calibri Light"/>
+                <a:ea typeface="Calibri Light"/>
+                <a:cs typeface="Calibri Light"/>
+              </a:rPr>
+              <a:t>The 2021 code and 2025 paper use different unveiling operators</a:t>
+            </a:r>
+          </a:p>
+        </p:txBody>
+      </p:sp>
+      <p:sp>
+        <p:nvSpPr>
+          <p:cNvPr id="3" name="header-rule">
+            <a:extLst xmlns:a="http://schemas.openxmlformats.org/drawingml/2006/main">
+              <a:ext uri="{FF2B5EF4-FFF2-40B4-BE49-F238E27FC236}">
+                <a16:creationId xmlns:a16="http://schemas.microsoft.com/office/drawing/2014/main" id="{4CDCC845-0954-47BE-99D9-ACC92C7E0BDF}"/>
+              </a:ext>
+            </a:extLst>
+          </p:cNvPr>
+          <p:cNvSpPr>
+            <a:spLocks xmlns:a="http://schemas.openxmlformats.org/drawingml/2006/main" noGrp="1"/>
+          </p:cNvSpPr>
+          <p:nvPr/>
+        </p:nvSpPr>
+        <p:spPr>
+          <a:xfrm xmlns:a="http://schemas.openxmlformats.org/drawingml/2006/main">
+            <a:off x="457200" y="981075"/>
+            <a:ext cx="11277600" cy="19050"/>
+          </a:xfrm>
+          <a:prstGeom xmlns:a="http://schemas.openxmlformats.org/drawingml/2006/main" prst="rect">
+            <a:avLst/>
+          </a:prstGeom>
+          <a:solidFill xmlns:a="http://schemas.openxmlformats.org/drawingml/2006/main">
+            <a:srgbClr val="102A43"/>
+          </a:solidFill>
+          <a:ln xmlns:a="http://schemas.openxmlformats.org/drawingml/2006/main" w="0">
+            <a:solidFill>
+              <a:srgbClr val="102A43"/>
+            </a:solidFill>
+            <a:prstDash val="solid"/>
+          </a:ln>
+        </p:spPr>
+        <p:txBody>
+          <a:bodyPr xmlns:a="http://schemas.openxmlformats.org/drawingml/2006/main"/>
+          <a:lstStyle xmlns:a="http://schemas.openxmlformats.org/drawingml/2006/main"/>
+          <a:p xmlns:a="http://schemas.openxmlformats.org/drawingml/2006/main">
+            <a:endParaRPr/>
+          </a:p>
+        </p:txBody>
+      </p:sp>
+      <p:sp>
+        <p:nvSpPr>
+          <p:cNvPr id="4" name="slide-number">
+            <a:extLst xmlns:a="http://schemas.openxmlformats.org/drawingml/2006/main">
+              <a:ext uri="{FF2B5EF4-FFF2-40B4-BE49-F238E27FC236}">
+                <a16:creationId xmlns:a16="http://schemas.microsoft.com/office/drawing/2014/main" id="{D40E37CD-502F-44AD-863C-998C0D343148}"/>
+              </a:ext>
+            </a:extLst>
+          </p:cNvPr>
+          <p:cNvSpPr>
+            <a:spLocks xmlns:a="http://schemas.openxmlformats.org/drawingml/2006/main" noGrp="1"/>
+          </p:cNvSpPr>
+          <p:nvPr/>
+        </p:nvSpPr>
+        <p:spPr>
+          <a:xfrm xmlns:a="http://schemas.openxmlformats.org/drawingml/2006/main">
+            <a:off x="11334750" y="257175"/>
+            <a:ext cx="400050" cy="228600"/>
+          </a:xfrm>
+          <a:prstGeom xmlns:a="http://schemas.openxmlformats.org/drawingml/2006/main" prst="rect">
+            <a:avLst/>
+          </a:prstGeom>
+          <a:noFill xmlns:a="http://schemas.openxmlformats.org/drawingml/2006/main"/>
+          <a:ln xmlns:a="http://schemas.openxmlformats.org/drawingml/2006/main" w="0">
+            <a:noFill/>
+            <a:prstDash val="solid"/>
+          </a:ln>
+        </p:spPr>
+        <p:txBody>
+          <a:bodyPr xmlns:a="http://schemas.openxmlformats.org/drawingml/2006/main" wrap="square" lIns="38100" tIns="19050" rIns="38100" bIns="19050" anchor="t">
+            <a:normAutofit/>
+          </a:bodyPr>
+          <a:lstStyle xmlns:a="http://schemas.openxmlformats.org/drawingml/2006/main"/>
+          <a:p xmlns:a="http://schemas.openxmlformats.org/drawingml/2006/main">
+            <a:pPr algn="r">
+              <a:buNone/>
+              <a:defRPr sz="1050" b="1">
+                <a:solidFill>
+                  <a:srgbClr val="627D98"/>
+                </a:solidFill>
+                <a:latin typeface="Calibri"/>
+                <a:ea typeface="Calibri"/>
+                <a:cs typeface="Calibri"/>
+              </a:defRPr>
+            </a:pPr>
+            <a:r>
+              <a:rPr sz="1050" b="1">
+                <a:solidFill>
+                  <a:srgbClr val="627D98"/>
+                </a:solidFill>
+                <a:latin typeface="Calibri"/>
+                <a:ea typeface="Calibri"/>
+                <a:cs typeface="Calibri"/>
+              </a:rPr>
+              <a:t>10</a:t>
+            </a:r>
+          </a:p>
+        </p:txBody>
+      </p:sp>
+      <p:sp>
+        <p:nvSpPr>
+          <p:cNvPr id="5" name="left-label">
+            <a:extLst xmlns:a="http://schemas.openxmlformats.org/drawingml/2006/main">
+              <a:ext uri="{FF2B5EF4-FFF2-40B4-BE49-F238E27FC236}">
+                <a16:creationId xmlns:a16="http://schemas.microsoft.com/office/drawing/2014/main" id="{7D68AFC4-C9F0-4906-8B90-9F78159CD369}"/>
+              </a:ext>
+            </a:extLst>
+          </p:cNvPr>
+          <p:cNvSpPr>
+            <a:spLocks xmlns:a="http://schemas.openxmlformats.org/drawingml/2006/main" noGrp="1"/>
+          </p:cNvSpPr>
+          <p:nvPr/>
+        </p:nvSpPr>
+        <p:spPr>
+          <a:xfrm xmlns:a="http://schemas.openxmlformats.org/drawingml/2006/main">
+            <a:off x="457200" y="1104900"/>
+            <a:ext cx="5410200" cy="257175"/>
+          </a:xfrm>
+          <a:prstGeom xmlns:a="http://schemas.openxmlformats.org/drawingml/2006/main" prst="rect">
+            <a:avLst/>
+          </a:prstGeom>
+          <a:noFill xmlns:a="http://schemas.openxmlformats.org/drawingml/2006/main"/>
+          <a:ln xmlns:a="http://schemas.openxmlformats.org/drawingml/2006/main" w="0">
+            <a:noFill/>
+            <a:prstDash val="solid"/>
+          </a:ln>
+        </p:spPr>
+        <p:txBody>
+          <a:bodyPr xmlns:a="http://schemas.openxmlformats.org/drawingml/2006/main" wrap="square" lIns="38100" tIns="19050" rIns="38100" bIns="19050" anchor="t">
+            <a:normAutofit/>
+          </a:bodyPr>
+          <a:lstStyle xmlns:a="http://schemas.openxmlformats.org/drawingml/2006/main"/>
+          <a:p xmlns:a="http://schemas.openxmlformats.org/drawingml/2006/main">
+            <a:pPr algn="l">
+              <a:buNone/>
+              <a:defRPr sz="1050" b="1">
+                <a:solidFill>
+                  <a:srgbClr val="2E5B88"/>
+                </a:solidFill>
+                <a:latin typeface="Calibri"/>
+                <a:ea typeface="Calibri"/>
+                <a:cs typeface="Calibri"/>
+              </a:defRPr>
+            </a:pPr>
+            <a:r>
+              <a:rPr sz="1050" b="1">
+                <a:solidFill>
+                  <a:srgbClr val="2E5B88"/>
+                </a:solidFill>
+                <a:latin typeface="Calibri"/>
+                <a:ea typeface="Calibri"/>
+                <a:cs typeface="Calibri"/>
+              </a:rPr>
+              <a:t>FEBRUARY 2021 PACKAGE</a:t>
+            </a:r>
+          </a:p>
+        </p:txBody>
+      </p:sp>
+      <p:sp>
+        <p:nvSpPr>
+          <p:cNvPr id="6" name="right-label">
+            <a:extLst xmlns:a="http://schemas.openxmlformats.org/drawingml/2006/main">
+              <a:ext uri="{FF2B5EF4-FFF2-40B4-BE49-F238E27FC236}">
+                <a16:creationId xmlns:a16="http://schemas.microsoft.com/office/drawing/2014/main" id="{169CDC6F-7B71-4F41-AC26-C991BF45F73E}"/>
+              </a:ext>
+            </a:extLst>
+          </p:cNvPr>
+          <p:cNvSpPr>
+            <a:spLocks xmlns:a="http://schemas.openxmlformats.org/drawingml/2006/main" noGrp="1"/>
+          </p:cNvSpPr>
+          <p:nvPr/>
+        </p:nvSpPr>
+        <p:spPr>
+          <a:xfrm xmlns:a="http://schemas.openxmlformats.org/drawingml/2006/main">
+            <a:off x="6324600" y="1104900"/>
+            <a:ext cx="5410200" cy="257175"/>
+          </a:xfrm>
+          <a:prstGeom xmlns:a="http://schemas.openxmlformats.org/drawingml/2006/main" prst="rect">
+            <a:avLst/>
+          </a:prstGeom>
+          <a:noFill xmlns:a="http://schemas.openxmlformats.org/drawingml/2006/main"/>
+          <a:ln xmlns:a="http://schemas.openxmlformats.org/drawingml/2006/main" w="0">
+            <a:noFill/>
+            <a:prstDash val="solid"/>
+          </a:ln>
+        </p:spPr>
+        <p:txBody>
+          <a:bodyPr xmlns:a="http://schemas.openxmlformats.org/drawingml/2006/main" wrap="square" lIns="38100" tIns="19050" rIns="38100" bIns="19050" anchor="t">
+            <a:normAutofit/>
+          </a:bodyPr>
+          <a:lstStyle xmlns:a="http://schemas.openxmlformats.org/drawingml/2006/main"/>
+          <a:p xmlns:a="http://schemas.openxmlformats.org/drawingml/2006/main">
+            <a:pPr algn="l">
+              <a:buNone/>
+              <a:defRPr sz="1050" b="1">
+                <a:solidFill>
+                  <a:srgbClr val="2E5B88"/>
+                </a:solidFill>
+                <a:latin typeface="Calibri"/>
+                <a:ea typeface="Calibri"/>
+                <a:cs typeface="Calibri"/>
+              </a:defRPr>
+            </a:pPr>
+            <a:r>
+              <a:rPr sz="1050" b="1">
+                <a:solidFill>
+                  <a:srgbClr val="2E5B88"/>
+                </a:solidFill>
+                <a:latin typeface="Calibri"/>
+                <a:ea typeface="Calibri"/>
+                <a:cs typeface="Calibri"/>
+              </a:rPr>
+              <a:t>JULY 2025 TARGET PAPER</a:t>
+            </a:r>
+          </a:p>
+        </p:txBody>
       </p:sp>
       <p:pic>
         <p:nvPicPr>
-          <p:cNvPr id="36" name=""/>
+          <p:cNvPr id="38" name="Picture 33"/>
           <p:cNvPicPr>
             <a:picLocks xmlns:a="http://schemas.openxmlformats.org/drawingml/2006/main" noChangeAspect="1"/>
           </p:cNvPicPr>
           <p:nvPr/>
         </p:nvPicPr>
         <p:blipFill>
-          <a:blip xmlns:r="http://schemas.openxmlformats.org/officeDocument/2006/relationships" xmlns:a="http://schemas.openxmlformats.org/drawingml/2006/main" r:embed="Rcda26e98a43240fe"/>
+          <a:blip xmlns:r="http://schemas.openxmlformats.org/officeDocument/2006/relationships" xmlns:a="http://schemas.openxmlformats.org/drawingml/2006/main" r:embed="Rd85cace3a76c443b"/>
+          <a:stretch xmlns:a="http://schemas.openxmlformats.org/drawingml/2006/main"/>
+        </p:blipFill>
+        <p:spPr>
+          <a:xfrm xmlns:a="http://schemas.openxmlformats.org/drawingml/2006/main">
+            <a:off x="11715750" y="6762750"/>
+            <a:ext cx="9525" cy="9525"/>
+          </a:xfrm>
+          <a:prstGeom xmlns:a="http://schemas.openxmlformats.org/drawingml/2006/main" prst="rect">
+            <a:avLst/>
+          </a:prstGeom>
+        </p:spPr>
+      </p:pic>
+      <p:sp>
+        <p:nvSpPr>
+          <p:cNvPr id="9" name="2025 Figure 5 saving by wealth group-frame">
+            <a:extLst xmlns:a="http://schemas.openxmlformats.org/drawingml/2006/main">
+              <a:ext uri="{FF2B5EF4-FFF2-40B4-BE49-F238E27FC236}">
+                <a16:creationId xmlns:a16="http://schemas.microsoft.com/office/drawing/2014/main" id="{CECC33D5-8AA8-489D-A8CE-CF41FD19251A}"/>
+              </a:ext>
+            </a:extLst>
+          </p:cNvPr>
+          <p:cNvSpPr>
+            <a:spLocks xmlns:a="http://schemas.openxmlformats.org/drawingml/2006/main" noGrp="1"/>
+          </p:cNvSpPr>
+          <p:nvPr/>
+        </p:nvSpPr>
+        <p:spPr>
+          <a:xfrm xmlns:a="http://schemas.openxmlformats.org/drawingml/2006/main">
+            <a:off x="6324600" y="1428750"/>
+            <a:ext cx="5410200" cy="3476625"/>
+          </a:xfrm>
+          <a:prstGeom xmlns:a="http://schemas.openxmlformats.org/drawingml/2006/main" prst="roundRect">
+            <a:avLst>
+              <a:gd name="adj" fmla="val 2192"/>
+            </a:avLst>
+          </a:prstGeom>
+          <a:solidFill xmlns:a="http://schemas.openxmlformats.org/drawingml/2006/main">
+            <a:srgbClr val="F7FAFC"/>
+          </a:solidFill>
+          <a:ln xmlns:a="http://schemas.openxmlformats.org/drawingml/2006/main" w="9525">
+            <a:solidFill>
+              <a:srgbClr val="D8E1E8"/>
+            </a:solidFill>
+            <a:prstDash val="solid"/>
+          </a:ln>
+        </p:spPr>
+        <p:txBody>
+          <a:bodyPr xmlns:a="http://schemas.openxmlformats.org/drawingml/2006/main"/>
+          <a:lstStyle xmlns:a="http://schemas.openxmlformats.org/drawingml/2006/main"/>
+          <a:p xmlns:a="http://schemas.openxmlformats.org/drawingml/2006/main">
+            <a:endParaRPr/>
+          </a:p>
+        </p:txBody>
+      </p:sp>
+      <p:pic>
+        <p:nvPicPr>
+          <p:cNvPr id="40" name="Picture 35"/>
+          <p:cNvPicPr>
+            <a:picLocks xmlns:a="http://schemas.openxmlformats.org/drawingml/2006/main" noChangeAspect="1"/>
+          </p:cNvPicPr>
+          <p:nvPr/>
+        </p:nvPicPr>
+        <p:blipFill>
+          <a:blip xmlns:r="http://schemas.openxmlformats.org/officeDocument/2006/relationships" xmlns:a="http://schemas.openxmlformats.org/drawingml/2006/main" r:embed="Rd85cace3a76c443b"/>
           <a:stretch xmlns:a="http://schemas.openxmlformats.org/drawingml/2006/main"/>
         </p:blipFill>
         <p:spPr>
@@ -3160,6 +3363,13 @@
             <a:prstDash val="solid"/>
           </a:ln>
         </p:spPr>
+        <p:txBody>
+          <a:bodyPr xmlns:a="http://schemas.openxmlformats.org/drawingml/2006/main"/>
+          <a:lstStyle xmlns:a="http://schemas.openxmlformats.org/drawingml/2006/main"/>
+          <a:p xmlns:a="http://schemas.openxmlformats.org/drawingml/2006/main">
+            <a:endParaRPr/>
+          </a:p>
+        </p:txBody>
       </p:sp>
       <p:sp>
         <p:nvSpPr>
@@ -3193,6 +3403,13 @@
             <a:prstDash val="solid"/>
           </a:ln>
         </p:spPr>
+        <p:txBody>
+          <a:bodyPr xmlns:a="http://schemas.openxmlformats.org/drawingml/2006/main"/>
+          <a:lstStyle xmlns:a="http://schemas.openxmlformats.org/drawingml/2006/main"/>
+          <a:p xmlns:a="http://schemas.openxmlformats.org/drawingml/2006/main">
+            <a:endParaRPr/>
+          </a:p>
+        </p:txBody>
       </p:sp>
       <p:sp>
         <p:nvSpPr>
@@ -3307,7 +3524,7 @@
                 <a:ea typeface="Calibri"/>
                 <a:cs typeface="Calibri"/>
               </a:rPr>
-              <a:t>The authors' kit is a valid benchmark for its own vintage, but it cannot silently stand in for the revised 2025 specification.</a:t>
+              <a:t>The old-stage output is a valid vintage benchmark or proxy—not an algebraic truncation of the 2025 Leontief inverse.</a:t>
             </a:r>
           </a:p>
         </p:txBody>
@@ -3366,7 +3583,7 @@
                 <a:ea typeface="Calibri"/>
                 <a:cs typeface="Calibri"/>
               </a:rPr>
-              <a:t>Source: replication-kit master/code audit and July 2025 paper.</a:t>
+              <a:t>Source: February 2021 Stata builders; July 2025 paper, Sections 2.3 and 4.1.</a:t>
             </a:r>
           </a:p>
         </p:txBody>
@@ -3407,11 +3624,12 @@
         </p:spPr>
         <p:txBody>
           <a:bodyPr xmlns:a="http://schemas.openxmlformats.org/drawingml/2006/main" wrap="square" lIns="38100" tIns="9525" rIns="38100" bIns="9525" anchor="ctr">
-            <a:normAutofit fontScale="100000"/>
+            <a:normAutofit/>
           </a:bodyPr>
           <a:lstStyle xmlns:a="http://schemas.openxmlformats.org/drawingml/2006/main"/>
           <a:p xmlns:a="http://schemas.openxmlformats.org/drawingml/2006/main">
             <a:pPr algn="ctr">
+              <a:buNone/>
               <a:defRPr sz="975" b="1">
                 <a:solidFill>
                   <a:srgbClr val="FFFFFF"/>
@@ -3519,7 +3737,7 @@
                 <a:ea typeface="Calibri"/>
                 <a:cs typeface="Calibri"/>
               </a:rPr>
-              <a:t>Round-by-round unveiling for seven rounds.</a:t>
+              <a:t>Seven hand-coded debt-routing stages.</a:t>
             </a:r>
           </a:p>
           <a:p xmlns:a="http://schemas.openxmlformats.org/drawingml/2006/main">
@@ -3546,74 +3764,11 @@
                 <a:ea typeface="Calibri"/>
                 <a:cs typeface="Calibri"/>
               </a:rPr>
-              <a:t>Prepared intermediate files and older graph code.</a:t>
-            </a:r>
-          </a:p>
-        </p:txBody>
-      </p:sp>
-      <p:sp>
-        <p:nvSpPr>
-          <p:cNvPr id="21" name="kit-round-surface">
-            <a:extLst xmlns:a="http://schemas.openxmlformats.org/drawingml/2006/main">
-              <a:ext uri="{FF2B5EF4-FFF2-40B4-BE49-F238E27FC236}">
-                <a16:creationId xmlns:a16="http://schemas.microsoft.com/office/drawing/2014/main" id="{4294AB3C-9BDB-42D5-9F33-6041D7AA069A}"/>
-              </a:ext>
-            </a:extLst>
-          </p:cNvPr>
-          <p:cNvSpPr>
-            <a:spLocks xmlns:a="http://schemas.openxmlformats.org/drawingml/2006/main" noGrp="1"/>
-          </p:cNvSpPr>
-          <p:nvPr/>
-        </p:nvSpPr>
-        <p:spPr>
-          <a:xfrm xmlns:a="http://schemas.openxmlformats.org/drawingml/2006/main">
-            <a:off x="1428750" y="4191000"/>
-            <a:ext cx="3333750" cy="552450"/>
-          </a:xfrm>
-          <a:prstGeom xmlns:a="http://schemas.openxmlformats.org/drawingml/2006/main" prst="roundRect">
-            <a:avLst>
-              <a:gd name="adj" fmla="val 13793"/>
-            </a:avLst>
-          </a:prstGeom>
-          <a:solidFill xmlns:a="http://schemas.openxmlformats.org/drawingml/2006/main">
-            <a:srgbClr val="F7FAFC"/>
-          </a:solidFill>
-          <a:ln xmlns:a="http://schemas.openxmlformats.org/drawingml/2006/main" w="9525">
-            <a:solidFill>
-              <a:srgbClr val="D8E1E8"/>
-            </a:solidFill>
-            <a:prstDash val="solid"/>
-          </a:ln>
-        </p:spPr>
-      </p:sp>
-      <p:pic>
-        <p:nvPicPr>
-          <p:cNvPr id="45" name=""/>
-          <p:cNvPicPr>
-            <a:picLocks xmlns:a="http://schemas.openxmlformats.org/drawingml/2006/main" noChangeAspect="1"/>
-          </p:cNvPicPr>
-          <p:nvPr/>
-        </p:nvPicPr>
-        <p:blipFill>
-          <a:blip xmlns:r="http://schemas.openxmlformats.org/officeDocument/2006/relationships" xmlns:a="http://schemas.openxmlformats.org/drawingml/2006/main" r:embed="R7ebbf9dc7ce44407">
-            <a:extLst>
-              <a:ext uri="{96DAC541-7B7A-43D3-8B79-37D633B846F1}">
-                <asvg:svgBlip xmlns:asvg="http://schemas.microsoft.com/office/drawing/2016/SVG/main" r:embed="R7e267b62b305468c"/>
-              </a:ext>
-            </a:extLst>
-          </a:blip>
-          <a:stretch xmlns:a="http://schemas.openxmlformats.org/drawingml/2006/main"/>
-        </p:blipFill>
-        <p:spPr>
-          <a:xfrm xmlns:a="http://schemas.openxmlformats.org/drawingml/2006/main">
-            <a:off x="2696830" y="4305300"/>
-            <a:ext cx="797590" cy="323850"/>
-          </a:xfrm>
-          <a:prstGeom xmlns:a="http://schemas.openxmlformats.org/drawingml/2006/main" prst="rect">
-            <a:avLst/>
-          </a:prstGeom>
-        </p:spPr>
-      </p:pic>
+              <a:t>Stage-specific instruments and residual rules.</a:t>
+            </a:r>
+          </a:p>
+        </p:txBody>
+      </p:sp>
       <p:sp>
         <p:nvSpPr>
           <p:cNvPr id="23" name="paper-year">
@@ -3650,11 +3805,12 @@
         </p:spPr>
         <p:txBody>
           <a:bodyPr xmlns:a="http://schemas.openxmlformats.org/drawingml/2006/main" wrap="square" lIns="38100" tIns="9525" rIns="38100" bIns="9525" anchor="ctr">
-            <a:normAutofit fontScale="100000"/>
+            <a:normAutofit/>
           </a:bodyPr>
           <a:lstStyle xmlns:a="http://schemas.openxmlformats.org/drawingml/2006/main"/>
           <a:p xmlns:a="http://schemas.openxmlformats.org/drawingml/2006/main">
             <a:pPr algn="ctr">
+              <a:buNone/>
               <a:defRPr sz="975" b="1">
                 <a:solidFill>
                   <a:srgbClr val="FFFFFF"/>
@@ -3708,7 +3864,7 @@
         </p:spPr>
         <p:txBody>
           <a:bodyPr xmlns:a="http://schemas.openxmlformats.org/drawingml/2006/main" wrap="square" lIns="38100" tIns="38100" rIns="76200" bIns="38100" anchor="t">
-            <a:normAutofit fontScale="100000"/>
+            <a:normAutofit/>
           </a:bodyPr>
           <a:lstStyle xmlns:a="http://schemas.openxmlformats.org/drawingml/2006/main"/>
           <a:p xmlns:a="http://schemas.openxmlformats.org/drawingml/2006/main">
@@ -3828,20 +3984,27 @@
             <a:prstDash val="solid"/>
           </a:ln>
         </p:spPr>
+        <p:txBody>
+          <a:bodyPr xmlns:a="http://schemas.openxmlformats.org/drawingml/2006/main"/>
+          <a:lstStyle xmlns:a="http://schemas.openxmlformats.org/drawingml/2006/main"/>
+          <a:p xmlns:a="http://schemas.openxmlformats.org/drawingml/2006/main">
+            <a:endParaRPr/>
+          </a:p>
+        </p:txBody>
       </p:sp>
       <p:pic>
         <p:nvPicPr>
-          <p:cNvPr id="49" name=""/>
+          <p:cNvPr id="51" name="Graphic 48"/>
           <p:cNvPicPr>
             <a:picLocks xmlns:a="http://schemas.openxmlformats.org/drawingml/2006/main" noChangeAspect="1"/>
           </p:cNvPicPr>
           <p:nvPr/>
         </p:nvPicPr>
         <p:blipFill>
-          <a:blip xmlns:r="http://schemas.openxmlformats.org/officeDocument/2006/relationships" xmlns:a="http://schemas.openxmlformats.org/drawingml/2006/main" r:embed="Rbe0632021df54586">
+          <a:blip xmlns:r="http://schemas.openxmlformats.org/officeDocument/2006/relationships" xmlns:a="http://schemas.openxmlformats.org/drawingml/2006/main" r:embed="R28d6733d8518459a">
             <a:extLst>
               <a:ext uri="{96DAC541-7B7A-43D3-8B79-37D633B846F1}">
-                <asvg:svgBlip xmlns:asvg="http://schemas.microsoft.com/office/drawing/2016/SVG/main" r:embed="R8373ad46f51e41c9"/>
+                <asvg:svgBlip xmlns:asvg="http://schemas.microsoft.com/office/drawing/2016/SVG/main" r:embed="Rafff02578c864ed5"/>
               </a:ext>
             </a:extLst>
           </a:blip>
@@ -3940,7 +4103,7 @@
                 <a:ea typeface="Calibri"/>
                 <a:cs typeface="Calibri"/>
               </a:rPr>
-              <a:t>REPLICATION STRATEGY</a:t>
+              <a:t>DATA-VINTAGE BOUNDARY</a:t>
             </a:r>
           </a:p>
         </p:txBody>
@@ -3999,7 +4162,7 @@
                 <a:ea typeface="Calibri Light"/>
                 <a:cs typeface="Calibri Light"/>
               </a:rPr>
-              <a:t>Old-input replication must precede new-data robustness</a:t>
+              <a:t>Three vintages expose different network objects</a:t>
             </a:r>
           </a:p>
         </p:txBody>
@@ -4036,6 +4199,13 @@
             <a:prstDash val="solid"/>
           </a:ln>
         </p:spPr>
+        <p:txBody>
+          <a:bodyPr xmlns:a="http://schemas.openxmlformats.org/drawingml/2006/main"/>
+          <a:lstStyle xmlns:a="http://schemas.openxmlformats.org/drawingml/2006/main"/>
+          <a:p xmlns:a="http://schemas.openxmlformats.org/drawingml/2006/main">
+            <a:endParaRPr/>
+          </a:p>
+        </p:txBody>
       </p:sp>
       <p:sp>
         <p:nvSpPr>
@@ -4150,7 +4320,7 @@
                 <a:ea typeface="Calibri"/>
                 <a:cs typeface="Calibri"/>
               </a:rPr>
-              <a:t>THREE EVIDENCE LAYERS</a:t>
+              <a:t>INPUT INVENTORY</a:t>
             </a:r>
           </a:p>
         </p:txBody>
@@ -4209,7 +4379,7 @@
                 <a:ea typeface="Calibri"/>
                 <a:cs typeface="Calibri"/>
               </a:rPr>
-              <a:t>STORAGE POLICY</a:t>
+              <a:t>WHAT WE CAN CLAIM</a:t>
             </a:r>
           </a:p>
         </p:txBody>
@@ -4248,17 +4418,24 @@
             <a:prstDash val="solid"/>
           </a:ln>
         </p:spPr>
+        <p:txBody>
+          <a:bodyPr xmlns:a="http://schemas.openxmlformats.org/drawingml/2006/main"/>
+          <a:lstStyle xmlns:a="http://schemas.openxmlformats.org/drawingml/2006/main"/>
+          <a:p xmlns:a="http://schemas.openxmlformats.org/drawingml/2006/main">
+            <a:endParaRPr/>
+          </a:p>
+        </p:txBody>
       </p:sp>
       <p:pic>
         <p:nvPicPr>
-          <p:cNvPr id="40" name=""/>
+          <p:cNvPr id="42" name="Picture 39"/>
           <p:cNvPicPr>
             <a:picLocks xmlns:a="http://schemas.openxmlformats.org/drawingml/2006/main" noChangeAspect="1"/>
           </p:cNvPicPr>
           <p:nvPr/>
         </p:nvPicPr>
         <p:blipFill>
-          <a:blip xmlns:r="http://schemas.openxmlformats.org/officeDocument/2006/relationships" xmlns:a="http://schemas.openxmlformats.org/drawingml/2006/main" r:embed="Rf2f703b331cb471b"/>
+          <a:blip xmlns:r="http://schemas.openxmlformats.org/officeDocument/2006/relationships" xmlns:a="http://schemas.openxmlformats.org/drawingml/2006/main" r:embed="Rdcf8999f0b614976"/>
           <a:stretch xmlns:a="http://schemas.openxmlformats.org/drawingml/2006/main"/>
         </p:blipFill>
         <p:spPr>
@@ -4305,17 +4482,24 @@
             <a:prstDash val="solid"/>
           </a:ln>
         </p:spPr>
+        <p:txBody>
+          <a:bodyPr xmlns:a="http://schemas.openxmlformats.org/drawingml/2006/main"/>
+          <a:lstStyle xmlns:a="http://schemas.openxmlformats.org/drawingml/2006/main"/>
+          <a:p xmlns:a="http://schemas.openxmlformats.org/drawingml/2006/main">
+            <a:endParaRPr/>
+          </a:p>
+        </p:txBody>
       </p:sp>
       <p:pic>
         <p:nvPicPr>
-          <p:cNvPr id="42" name=""/>
+          <p:cNvPr id="44" name="Picture 41"/>
           <p:cNvPicPr>
             <a:picLocks xmlns:a="http://schemas.openxmlformats.org/drawingml/2006/main" noChangeAspect="1"/>
           </p:cNvPicPr>
           <p:nvPr/>
         </p:nvPicPr>
         <p:blipFill>
-          <a:blip xmlns:r="http://schemas.openxmlformats.org/officeDocument/2006/relationships" xmlns:a="http://schemas.openxmlformats.org/drawingml/2006/main" r:embed="R665a648b207443d0"/>
+          <a:blip xmlns:r="http://schemas.openxmlformats.org/officeDocument/2006/relationships" xmlns:a="http://schemas.openxmlformats.org/drawingml/2006/main" r:embed="Rdcf8999f0b614976"/>
           <a:stretch xmlns:a="http://schemas.openxmlformats.org/drawingml/2006/main"/>
         </p:blipFill>
         <p:spPr>
@@ -4362,6 +4546,13 @@
             <a:prstDash val="solid"/>
           </a:ln>
         </p:spPr>
+        <p:txBody>
+          <a:bodyPr xmlns:a="http://schemas.openxmlformats.org/drawingml/2006/main"/>
+          <a:lstStyle xmlns:a="http://schemas.openxmlformats.org/drawingml/2006/main"/>
+          <a:p xmlns:a="http://schemas.openxmlformats.org/drawingml/2006/main">
+            <a:endParaRPr/>
+          </a:p>
+        </p:txBody>
       </p:sp>
       <p:sp>
         <p:nvSpPr>
@@ -4395,6 +4586,13 @@
             <a:prstDash val="solid"/>
           </a:ln>
         </p:spPr>
+        <p:txBody>
+          <a:bodyPr xmlns:a="http://schemas.openxmlformats.org/drawingml/2006/main"/>
+          <a:lstStyle xmlns:a="http://schemas.openxmlformats.org/drawingml/2006/main"/>
+          <a:p xmlns:a="http://schemas.openxmlformats.org/drawingml/2006/main">
+            <a:endParaRPr/>
+          </a:p>
+        </p:txBody>
       </p:sp>
       <p:sp>
         <p:nvSpPr>
@@ -4509,7 +4707,7 @@
                 <a:ea typeface="Calibri"/>
                 <a:cs typeface="Calibri"/>
               </a:rPr>
-              <a:t>Reproduce the authors' vintage first; only then interpret newer public data as robustness rather than replication.</a:t>
+              <a:t>The feasible rerun is mixed-source: current public network plus 2021 distributional inputs. It tests the 2025 method, not the authors’ exact values.</a:t>
             </a:r>
           </a:p>
         </p:txBody>
@@ -4568,7 +4766,7 @@
                 <a:ea typeface="Calibri"/>
                 <a:cs typeface="Calibri"/>
               </a:rPr>
-              <a:t>Source: project replication protocol and data guide.</a:t>
+              <a:t>Source: 2025 paper; Federal Reserve FWTW release and announcements; 2021-kit audit.</a:t>
             </a:r>
           </a:p>
         </p:txBody>
@@ -4607,6 +4805,13 @@
             <a:prstDash val="solid"/>
           </a:ln>
         </p:spPr>
+        <p:txBody>
+          <a:bodyPr xmlns:a="http://schemas.openxmlformats.org/drawingml/2006/main"/>
+          <a:lstStyle xmlns:a="http://schemas.openxmlformats.org/drawingml/2006/main"/>
+          <a:p xmlns:a="http://schemas.openxmlformats.org/drawingml/2006/main">
+            <a:endParaRPr/>
+          </a:p>
+        </p:txBody>
       </p:sp>
       <p:sp>
         <p:nvSpPr>
@@ -4647,6 +4852,7 @@
           <a:lstStyle xmlns:a="http://schemas.openxmlformats.org/drawingml/2006/main"/>
           <a:p xmlns:a="http://schemas.openxmlformats.org/drawingml/2006/main">
             <a:pPr algn="ctr">
+              <a:buNone/>
               <a:defRPr sz="1350" b="1">
                 <a:solidFill>
                   <a:srgbClr val="FFFFFF"/>
@@ -4705,6 +4911,7 @@
           <a:lstStyle xmlns:a="http://schemas.openxmlformats.org/drawingml/2006/main"/>
           <a:p xmlns:a="http://schemas.openxmlformats.org/drawingml/2006/main">
             <a:pPr>
+              <a:buNone/>
               <a:defRPr sz="1500" b="1">
                 <a:solidFill>
                   <a:srgbClr val="102A43"/>
@@ -4723,7 +4930,7 @@
                 <a:ea typeface="Calibri"/>
                 <a:cs typeface="Calibri"/>
               </a:rPr>
-              <a:t>Benchmark</a:t>
+              <a:t>2021 package</a:t>
             </a:r>
           </a:p>
         </p:txBody>
@@ -4758,11 +4965,12 @@
         </p:spPr>
         <p:txBody>
           <a:bodyPr xmlns:a="http://schemas.openxmlformats.org/drawingml/2006/main" wrap="square" lIns="38100" tIns="19050" rIns="38100" bIns="19050" anchor="t">
-            <a:normAutofit fontScale="100000"/>
+            <a:normAutofit fontScale="85938"/>
           </a:bodyPr>
           <a:lstStyle xmlns:a="http://schemas.openxmlformats.org/drawingml/2006/main"/>
           <a:p xmlns:a="http://schemas.openxmlformats.org/drawingml/2006/main">
             <a:pPr>
+              <a:buNone/>
               <a:defRPr sz="1200">
                 <a:solidFill>
                   <a:srgbClr val="627D98"/>
@@ -4781,7 +4989,7 @@
                 <a:ea typeface="Calibri"/>
                 <a:cs typeface="Calibri"/>
               </a:rPr>
-              <a:t>Regenerate authors' supplied final files.</a:t>
+              <a:t>DINA/NIPA and old FA preparation to 2016; seven-stage routing; no Batty completion.</a:t>
             </a:r>
           </a:p>
         </p:txBody>
@@ -4820,6 +5028,13 @@
             <a:prstDash val="solid"/>
           </a:ln>
         </p:spPr>
+        <p:txBody>
+          <a:bodyPr xmlns:a="http://schemas.openxmlformats.org/drawingml/2006/main"/>
+          <a:lstStyle xmlns:a="http://schemas.openxmlformats.org/drawingml/2006/main"/>
+          <a:p xmlns:a="http://schemas.openxmlformats.org/drawingml/2006/main">
+            <a:endParaRPr/>
+          </a:p>
+        </p:txBody>
       </p:sp>
       <p:sp>
         <p:nvSpPr>
@@ -4860,6 +5075,7 @@
           <a:lstStyle xmlns:a="http://schemas.openxmlformats.org/drawingml/2006/main"/>
           <a:p xmlns:a="http://schemas.openxmlformats.org/drawingml/2006/main">
             <a:pPr algn="ctr">
+              <a:buNone/>
               <a:defRPr sz="1350" b="1">
                 <a:solidFill>
                   <a:srgbClr val="FFFFFF"/>
@@ -4918,6 +5134,7 @@
           <a:lstStyle xmlns:a="http://schemas.openxmlformats.org/drawingml/2006/main"/>
           <a:p xmlns:a="http://schemas.openxmlformats.org/drawingml/2006/main">
             <a:pPr>
+              <a:buNone/>
               <a:defRPr sz="1500" b="1">
                 <a:solidFill>
                   <a:srgbClr val="102A43"/>
@@ -4936,7 +5153,7 @@
                 <a:ea typeface="Calibri"/>
                 <a:cs typeface="Calibri"/>
               </a:rPr>
-              <a:t>Reconstruction</a:t>
+              <a:t>2025 target</a:t>
             </a:r>
           </a:p>
         </p:txBody>
@@ -4971,11 +5188,12 @@
         </p:spPr>
         <p:txBody>
           <a:bodyPr xmlns:a="http://schemas.openxmlformats.org/drawingml/2006/main" wrap="square" lIns="38100" tIns="19050" rIns="38100" bIns="19050" anchor="t">
-            <a:normAutofit fontScale="100000"/>
+            <a:normAutofit fontScale="85938"/>
           </a:bodyPr>
           <a:lstStyle xmlns:a="http://schemas.openxmlformats.org/drawingml/2006/main"/>
           <a:p xmlns:a="http://schemas.openxmlformats.org/drawingml/2006/main">
             <a:pPr>
+              <a:buNone/>
               <a:defRPr sz="1200">
                 <a:solidFill>
                   <a:srgbClr val="627D98"/>
@@ -4994,7 +5212,7 @@
                 <a:ea typeface="Calibri"/>
                 <a:cs typeface="Calibri"/>
               </a:rPr>
-              <a:t>Rebuild from the earliest feasible supplied inputs.</a:t>
+              <a:t>34 instruments; 23 intermediaries + 4 owners; authors’ Batty-based equity extension; to 2019.</a:t>
             </a:r>
           </a:p>
         </p:txBody>
@@ -5033,6 +5251,13 @@
             <a:prstDash val="solid"/>
           </a:ln>
         </p:spPr>
+        <p:txBody>
+          <a:bodyPr xmlns:a="http://schemas.openxmlformats.org/drawingml/2006/main"/>
+          <a:lstStyle xmlns:a="http://schemas.openxmlformats.org/drawingml/2006/main"/>
+          <a:p xmlns:a="http://schemas.openxmlformats.org/drawingml/2006/main">
+            <a:endParaRPr/>
+          </a:p>
+        </p:txBody>
       </p:sp>
       <p:sp>
         <p:nvSpPr>
@@ -5073,6 +5298,7 @@
           <a:lstStyle xmlns:a="http://schemas.openxmlformats.org/drawingml/2006/main"/>
           <a:p xmlns:a="http://schemas.openxmlformats.org/drawingml/2006/main">
             <a:pPr algn="ctr">
+              <a:buNone/>
               <a:defRPr sz="1350" b="1">
                 <a:solidFill>
                   <a:srgbClr val="FFFFFF"/>
@@ -5131,6 +5357,7 @@
           <a:lstStyle xmlns:a="http://schemas.openxmlformats.org/drawingml/2006/main"/>
           <a:p xmlns:a="http://schemas.openxmlformats.org/drawingml/2006/main">
             <a:pPr>
+              <a:buNone/>
               <a:defRPr sz="1500" b="1">
                 <a:solidFill>
                   <a:srgbClr val="102A43"/>
@@ -5149,7 +5376,7 @@
                 <a:ea typeface="Calibri"/>
                 <a:cs typeface="Calibri"/>
               </a:rPr>
-              <a:t>Robustness</a:t>
+              <a:t>Feasible public rerun</a:t>
             </a:r>
           </a:p>
         </p:txBody>
@@ -5184,11 +5411,12 @@
         </p:spPr>
         <p:txBody>
           <a:bodyPr xmlns:a="http://schemas.openxmlformats.org/drawingml/2006/main" wrap="square" lIns="38100" tIns="19050" rIns="38100" bIns="19050" anchor="t">
-            <a:normAutofit fontScale="100000"/>
+            <a:normAutofit fontScale="85938"/>
           </a:bodyPr>
           <a:lstStyle xmlns:a="http://schemas.openxmlformats.org/drawingml/2006/main"/>
           <a:p xmlns:a="http://schemas.openxmlformats.org/drawingml/2006/main">
             <a:pPr>
+              <a:buNone/>
               <a:defRPr sz="1200">
                 <a:solidFill>
                   <a:srgbClr val="627D98"/>
@@ -5207,7 +5435,7 @@
                 <a:ea typeface="Calibri"/>
                 <a:cs typeface="Calibri"/>
               </a:rPr>
-              <a:t>Repeat with newer public vintages and label it clearly.</a:t>
+              <a:t>Current completed FWTW: 31 instruments and 25 substantive sectors; pair with 2021 DINA/NIPA.</a:t>
             </a:r>
           </a:p>
         </p:txBody>
@@ -5253,6 +5481,7 @@
           <a:lstStyle xmlns:a="http://schemas.openxmlformats.org/drawingml/2006/main"/>
           <a:p xmlns:a="http://schemas.openxmlformats.org/drawingml/2006/main">
             <a:pPr algn="ctr">
+              <a:buNone/>
               <a:defRPr sz="975" b="1">
                 <a:solidFill>
                   <a:srgbClr val="FFFFFF"/>
@@ -5271,7 +5500,7 @@
                 <a:ea typeface="Calibri"/>
                 <a:cs typeface="Calibri"/>
               </a:rPr>
-              <a:t>RAW STAYS IMMUTABLE</a:t>
+              <a:t>METHOD REPLICATION</a:t>
             </a:r>
           </a:p>
         </p:txBody>
@@ -5333,7 +5562,7 @@
                 <a:ea typeface="Calibri"/>
                 <a:cs typeface="Calibri"/>
               </a:rPr>
-              <a:t>Symlink the authors' raw-data location if needed.</a:t>
+              <a:t>• Complete instrument-level dollar matrices.</a:t>
             </a:r>
           </a:p>
           <a:p xmlns:a="http://schemas.openxmlformats.org/drawingml/2006/main">
@@ -5360,7 +5589,7 @@
                 <a:ea typeface="Calibri"/>
                 <a:cs typeface="Calibri"/>
               </a:rPr>
-              <a:t>Do not duplicate large raw sources.</a:t>
+              <a:t>• Row-normalize direct ownership.</a:t>
             </a:r>
           </a:p>
           <a:p xmlns:a="http://schemas.openxmlformats.org/drawingml/2006/main">
@@ -5387,7 +5616,7 @@
                 <a:ea typeface="Calibri"/>
                 <a:cs typeface="Calibri"/>
               </a:rPr>
-              <a:t>Save only documented interim data that materially speeds reruns.</a:t>
+              <a:t>• Add DINA wealth-group columns.</a:t>
             </a:r>
           </a:p>
           <a:p xmlns:a="http://schemas.openxmlformats.org/drawingml/2006/main">
@@ -5414,7 +5643,34 @@
                 <a:ea typeface="Calibri"/>
                 <a:cs typeface="Calibri"/>
               </a:rPr>
-              <a:t>Always retain compact final matrices, figures, and diagnostics.</a:t>
+              <a:t>• Apply the full Leontief solve.</a:t>
+            </a:r>
+          </a:p>
+          <a:p xmlns:a="http://schemas.openxmlformats.org/drawingml/2006/main">
+            <a:pPr marL="20" indent="-12">
+              <a:spcAft>
+                <a:spcPts val="9"/>
+              </a:spcAft>
+              <a:buChar char="•"/>
+              <a:defRPr sz="1425">
+                <a:solidFill>
+                  <a:srgbClr val="1F2933"/>
+                </a:solidFill>
+                <a:latin typeface="Calibri"/>
+                <a:ea typeface="Calibri"/>
+                <a:cs typeface="Calibri"/>
+              </a:defRPr>
+            </a:pPr>
+            <a:r>
+              <a:rPr sz="1425">
+                <a:solidFill>
+                  <a:srgbClr val="1F2933"/>
+                </a:solidFill>
+                <a:latin typeface="Calibri"/>
+                <a:ea typeface="Calibri"/>
+                <a:cs typeface="Calibri"/>
+              </a:rPr>
+              <a:t>• Report taxonomy and end-year gaps.</a:t>
             </a:r>
           </a:p>
         </p:txBody>
@@ -5502,7 +5758,7 @@
                 <a:ea typeface="Calibri"/>
                 <a:cs typeface="Calibri"/>
               </a:rPr>
-              <a:t>TAKEAWAY</a:t>
+              <a:t>REPLICATION STRATEGY</a:t>
             </a:r>
           </a:p>
         </p:txBody>
@@ -5561,7 +5817,7 @@
                 <a:ea typeface="Calibri Light"/>
                 <a:cs typeface="Calibri Light"/>
               </a:rPr>
-              <a:t>The architecture keeps every transformation auditable</a:t>
+              <a:t>Use the earliest source that identifies each object</a:t>
             </a:r>
           </a:p>
         </p:txBody>
@@ -5598,6 +5854,13 @@
             <a:prstDash val="solid"/>
           </a:ln>
         </p:spPr>
+        <p:txBody>
+          <a:bodyPr xmlns:a="http://schemas.openxmlformats.org/drawingml/2006/main"/>
+          <a:lstStyle xmlns:a="http://schemas.openxmlformats.org/drawingml/2006/main"/>
+          <a:p xmlns:a="http://schemas.openxmlformats.org/drawingml/2006/main">
+            <a:endParaRPr/>
+          </a:p>
+        </p:txBody>
       </p:sp>
       <p:sp>
         <p:nvSpPr>
@@ -5712,7 +5975,7 @@
                 <a:ea typeface="Calibri"/>
                 <a:cs typeface="Calibri"/>
               </a:rPr>
-              <a:t>SOURCE → OBJECT</a:t>
+              <a:t>THREE EVIDENCE LAYERS</a:t>
             </a:r>
           </a:p>
         </p:txBody>
@@ -5771,7 +6034,7 @@
                 <a:ea typeface="Calibri"/>
                 <a:cs typeface="Calibri"/>
               </a:rPr>
-              <a:t>OBJECT → EXHIBIT</a:t>
+              <a:t>STORAGE POLICY</a:t>
             </a:r>
           </a:p>
         </p:txBody>
@@ -5810,17 +6073,24 @@
             <a:prstDash val="solid"/>
           </a:ln>
         </p:spPr>
+        <p:txBody>
+          <a:bodyPr xmlns:a="http://schemas.openxmlformats.org/drawingml/2006/main"/>
+          <a:lstStyle xmlns:a="http://schemas.openxmlformats.org/drawingml/2006/main"/>
+          <a:p xmlns:a="http://schemas.openxmlformats.org/drawingml/2006/main">
+            <a:endParaRPr/>
+          </a:p>
+        </p:txBody>
       </p:sp>
       <p:pic>
         <p:nvPicPr>
-          <p:cNvPr id="43" name=""/>
+          <p:cNvPr id="42" name="Picture 39"/>
           <p:cNvPicPr>
             <a:picLocks xmlns:a="http://schemas.openxmlformats.org/drawingml/2006/main" noChangeAspect="1"/>
           </p:cNvPicPr>
           <p:nvPr/>
         </p:nvPicPr>
         <p:blipFill>
-          <a:blip xmlns:r="http://schemas.openxmlformats.org/officeDocument/2006/relationships" xmlns:a="http://schemas.openxmlformats.org/drawingml/2006/main" r:embed="R5cc8a1a39ddd4aa0"/>
+          <a:blip xmlns:r="http://schemas.openxmlformats.org/officeDocument/2006/relationships" xmlns:a="http://schemas.openxmlformats.org/drawingml/2006/main" r:embed="R7e85b057fee946b8"/>
           <a:stretch xmlns:a="http://schemas.openxmlformats.org/drawingml/2006/main"/>
         </p:blipFill>
         <p:spPr>
@@ -5867,17 +6137,24 @@
             <a:prstDash val="solid"/>
           </a:ln>
         </p:spPr>
+        <p:txBody>
+          <a:bodyPr xmlns:a="http://schemas.openxmlformats.org/drawingml/2006/main"/>
+          <a:lstStyle xmlns:a="http://schemas.openxmlformats.org/drawingml/2006/main"/>
+          <a:p xmlns:a="http://schemas.openxmlformats.org/drawingml/2006/main">
+            <a:endParaRPr/>
+          </a:p>
+        </p:txBody>
       </p:sp>
       <p:pic>
         <p:nvPicPr>
-          <p:cNvPr id="45" name=""/>
+          <p:cNvPr id="44" name="Picture 41"/>
           <p:cNvPicPr>
             <a:picLocks xmlns:a="http://schemas.openxmlformats.org/drawingml/2006/main" noChangeAspect="1"/>
           </p:cNvPicPr>
           <p:nvPr/>
         </p:nvPicPr>
         <p:blipFill>
-          <a:blip xmlns:r="http://schemas.openxmlformats.org/officeDocument/2006/relationships" xmlns:a="http://schemas.openxmlformats.org/drawingml/2006/main" r:embed="Re50f52cc93d941bb"/>
+          <a:blip xmlns:r="http://schemas.openxmlformats.org/officeDocument/2006/relationships" xmlns:a="http://schemas.openxmlformats.org/drawingml/2006/main" r:embed="R7e85b057fee946b8"/>
           <a:stretch xmlns:a="http://schemas.openxmlformats.org/drawingml/2006/main"/>
         </p:blipFill>
         <p:spPr>
@@ -5924,6 +6201,13 @@
             <a:prstDash val="solid"/>
           </a:ln>
         </p:spPr>
+        <p:txBody>
+          <a:bodyPr xmlns:a="http://schemas.openxmlformats.org/drawingml/2006/main"/>
+          <a:lstStyle xmlns:a="http://schemas.openxmlformats.org/drawingml/2006/main"/>
+          <a:p xmlns:a="http://schemas.openxmlformats.org/drawingml/2006/main">
+            <a:endParaRPr/>
+          </a:p>
+        </p:txBody>
       </p:sp>
       <p:sp>
         <p:nvSpPr>
@@ -5957,6 +6241,13 @@
             <a:prstDash val="solid"/>
           </a:ln>
         </p:spPr>
+        <p:txBody>
+          <a:bodyPr xmlns:a="http://schemas.openxmlformats.org/drawingml/2006/main"/>
+          <a:lstStyle xmlns:a="http://schemas.openxmlformats.org/drawingml/2006/main"/>
+          <a:p xmlns:a="http://schemas.openxmlformats.org/drawingml/2006/main">
+            <a:endParaRPr/>
+          </a:p>
+        </p:txBody>
       </p:sp>
       <p:sp>
         <p:nvSpPr>
@@ -6071,7 +6362,7 @@
                 <a:ea typeface="Calibri"/>
                 <a:cs typeface="Calibri"/>
               </a:rPr>
-              <a:t>Every final number should retain its source, unit, aggregation rule, and accounting invariant.</a:t>
+              <a:t>Old-kit-only reconstruction is preferred when identified; the FWTW network requires a documented public-data supplement.</a:t>
             </a:r>
           </a:p>
         </p:txBody>
@@ -6130,33 +6421,33 @@
                 <a:ea typeface="Calibri"/>
                 <a:cs typeface="Calibri"/>
               </a:rPr>
-              <a:t>Source: synthesis of paper methodology and project data documentation.</a:t>
-            </a:r>
-          </a:p>
-        </p:txBody>
-      </p:sp>
-      <p:sp>
-        <p:nvSpPr>
-          <p:cNvPr id="19" name="chain1-surface">
-            <a:extLst xmlns:a="http://schemas.openxmlformats.org/drawingml/2006/main">
-              <a:ext uri="{FF2B5EF4-FFF2-40B4-BE49-F238E27FC236}">
-                <a16:creationId xmlns:a16="http://schemas.microsoft.com/office/drawing/2014/main" id="{36AFB536-83F6-4163-BE77-B73198CAB92D}"/>
-              </a:ext>
-            </a:extLst>
-          </p:cNvPr>
-          <p:cNvSpPr>
-            <a:spLocks xmlns:a="http://schemas.openxmlformats.org/drawingml/2006/main" noGrp="1"/>
-          </p:cNvSpPr>
-          <p:nvPr/>
-        </p:nvSpPr>
-        <p:spPr>
-          <a:xfrm xmlns:a="http://schemas.openxmlformats.org/drawingml/2006/main">
-            <a:off x="742950" y="1676400"/>
-            <a:ext cx="4857750" cy="857250"/>
+              <a:t>Source: project replication protocol; Figure 1 and Figure 8 data contracts.</a:t>
+            </a:r>
+          </a:p>
+        </p:txBody>
+      </p:sp>
+      <p:sp>
+        <p:nvSpPr>
+          <p:cNvPr id="19" name="layer1-surface">
+            <a:extLst xmlns:a="http://schemas.openxmlformats.org/drawingml/2006/main">
+              <a:ext uri="{FF2B5EF4-FFF2-40B4-BE49-F238E27FC236}">
+                <a16:creationId xmlns:a16="http://schemas.microsoft.com/office/drawing/2014/main" id="{BA57D17F-E44A-49B6-9DAF-4598488A19AD}"/>
+              </a:ext>
+            </a:extLst>
+          </p:cNvPr>
+          <p:cNvSpPr>
+            <a:spLocks xmlns:a="http://schemas.openxmlformats.org/drawingml/2006/main" noGrp="1"/>
+          </p:cNvSpPr>
+          <p:nvPr/>
+        </p:nvSpPr>
+        <p:spPr>
+          <a:xfrm xmlns:a="http://schemas.openxmlformats.org/drawingml/2006/main">
+            <a:off x="742950" y="1657350"/>
+            <a:ext cx="4857750" cy="876300"/>
           </a:xfrm>
           <a:prstGeom xmlns:a="http://schemas.openxmlformats.org/drawingml/2006/main" prst="roundRect">
             <a:avLst>
-              <a:gd name="adj" fmla="val 10000"/>
+              <a:gd name="adj" fmla="val 9783"/>
             </a:avLst>
           </a:prstGeom>
           <a:solidFill xmlns:a="http://schemas.openxmlformats.org/drawingml/2006/main">
@@ -6169,24 +6460,31 @@
             <a:prstDash val="solid"/>
           </a:ln>
         </p:spPr>
-      </p:sp>
-      <p:sp>
-        <p:nvSpPr>
-          <p:cNvPr id="20" name="chain1-number">
-            <a:extLst xmlns:a="http://schemas.openxmlformats.org/drawingml/2006/main">
-              <a:ext uri="{FF2B5EF4-FFF2-40B4-BE49-F238E27FC236}">
-                <a16:creationId xmlns:a16="http://schemas.microsoft.com/office/drawing/2014/main" id="{81CB238A-44C0-493F-9DA7-E315A7B07DC4}"/>
-              </a:ext>
-            </a:extLst>
-          </p:cNvPr>
-          <p:cNvSpPr>
-            <a:spLocks xmlns:a="http://schemas.openxmlformats.org/drawingml/2006/main" noGrp="1"/>
-          </p:cNvSpPr>
-          <p:nvPr/>
-        </p:nvSpPr>
-        <p:spPr>
-          <a:xfrm xmlns:a="http://schemas.openxmlformats.org/drawingml/2006/main">
-            <a:off x="895350" y="1828800"/>
+        <p:txBody>
+          <a:bodyPr xmlns:a="http://schemas.openxmlformats.org/drawingml/2006/main"/>
+          <a:lstStyle xmlns:a="http://schemas.openxmlformats.org/drawingml/2006/main"/>
+          <a:p xmlns:a="http://schemas.openxmlformats.org/drawingml/2006/main">
+            <a:endParaRPr/>
+          </a:p>
+        </p:txBody>
+      </p:sp>
+      <p:sp>
+        <p:nvSpPr>
+          <p:cNvPr id="20" name="layer1-number">
+            <a:extLst xmlns:a="http://schemas.openxmlformats.org/drawingml/2006/main">
+              <a:ext uri="{FF2B5EF4-FFF2-40B4-BE49-F238E27FC236}">
+                <a16:creationId xmlns:a16="http://schemas.microsoft.com/office/drawing/2014/main" id="{A8ADF87B-988A-4262-837D-196D38285903}"/>
+              </a:ext>
+            </a:extLst>
+          </p:cNvPr>
+          <p:cNvSpPr>
+            <a:spLocks xmlns:a="http://schemas.openxmlformats.org/drawingml/2006/main" noGrp="1"/>
+          </p:cNvSpPr>
+          <p:nvPr/>
+        </p:nvSpPr>
+        <p:spPr>
+          <a:xfrm xmlns:a="http://schemas.openxmlformats.org/drawingml/2006/main">
+            <a:off x="895350" y="1809750"/>
             <a:ext cx="361950" cy="361950"/>
           </a:xfrm>
           <a:prstGeom xmlns:a="http://schemas.openxmlformats.org/drawingml/2006/main" prst="ellipse">
@@ -6204,11 +6502,12 @@
         </p:spPr>
         <p:txBody>
           <a:bodyPr xmlns:a="http://schemas.openxmlformats.org/drawingml/2006/main" wrap="square" lIns="0" tIns="0" rIns="0" bIns="0" anchor="ctr">
-            <a:normAutofit fontScale="100000"/>
+            <a:normAutofit/>
           </a:bodyPr>
           <a:lstStyle xmlns:a="http://schemas.openxmlformats.org/drawingml/2006/main"/>
           <a:p xmlns:a="http://schemas.openxmlformats.org/drawingml/2006/main">
             <a:pPr algn="ctr">
+              <a:buNone/>
               <a:defRPr sz="1350" b="1">
                 <a:solidFill>
                   <a:srgbClr val="FFFFFF"/>
@@ -6234,21 +6533,21 @@
       </p:sp>
       <p:sp>
         <p:nvSpPr>
-          <p:cNvPr id="21" name="chain1-title">
-            <a:extLst xmlns:a="http://schemas.openxmlformats.org/drawingml/2006/main">
-              <a:ext uri="{FF2B5EF4-FFF2-40B4-BE49-F238E27FC236}">
-                <a16:creationId xmlns:a16="http://schemas.microsoft.com/office/drawing/2014/main" id="{03CA0B56-10EF-42BE-8B71-677D6ECEF688}"/>
-              </a:ext>
-            </a:extLst>
-          </p:cNvPr>
-          <p:cNvSpPr>
-            <a:spLocks xmlns:a="http://schemas.openxmlformats.org/drawingml/2006/main" noGrp="1"/>
-          </p:cNvSpPr>
-          <p:nvPr/>
-        </p:nvSpPr>
-        <p:spPr>
-          <a:xfrm xmlns:a="http://schemas.openxmlformats.org/drawingml/2006/main">
-            <a:off x="1390650" y="1809750"/>
+          <p:cNvPr id="21" name="layer1-title">
+            <a:extLst xmlns:a="http://schemas.openxmlformats.org/drawingml/2006/main">
+              <a:ext uri="{FF2B5EF4-FFF2-40B4-BE49-F238E27FC236}">
+                <a16:creationId xmlns:a16="http://schemas.microsoft.com/office/drawing/2014/main" id="{6C6F53A0-E299-4A88-A374-4000D19E771B}"/>
+              </a:ext>
+            </a:extLst>
+          </p:cNvPr>
+          <p:cNvSpPr>
+            <a:spLocks xmlns:a="http://schemas.openxmlformats.org/drawingml/2006/main" noGrp="1"/>
+          </p:cNvSpPr>
+          <p:nvPr/>
+        </p:nvSpPr>
+        <p:spPr>
+          <a:xfrm xmlns:a="http://schemas.openxmlformats.org/drawingml/2006/main">
+            <a:off x="1390650" y="1790700"/>
             <a:ext cx="4057650" cy="295275"/>
           </a:xfrm>
           <a:prstGeom xmlns:a="http://schemas.openxmlformats.org/drawingml/2006/main" prst="rect">
@@ -6267,6 +6566,7 @@
           <a:lstStyle xmlns:a="http://schemas.openxmlformats.org/drawingml/2006/main"/>
           <a:p xmlns:a="http://schemas.openxmlformats.org/drawingml/2006/main">
             <a:pPr>
+              <a:buNone/>
               <a:defRPr sz="1500" b="1">
                 <a:solidFill>
                   <a:srgbClr val="102A43"/>
@@ -6285,29 +6585,29 @@
                 <a:ea typeface="Calibri"/>
                 <a:cs typeface="Calibri"/>
               </a:rPr>
-              <a:t>Bilateral stocks</a:t>
-            </a:r>
-          </a:p>
-        </p:txBody>
-      </p:sp>
-      <p:sp>
-        <p:nvSpPr>
-          <p:cNvPr id="22" name="chain1-detail">
-            <a:extLst xmlns:a="http://schemas.openxmlformats.org/drawingml/2006/main">
-              <a:ext uri="{FF2B5EF4-FFF2-40B4-BE49-F238E27FC236}">
-                <a16:creationId xmlns:a16="http://schemas.microsoft.com/office/drawing/2014/main" id="{933C28C5-8809-4DF4-B1BB-81303C6A8E77}"/>
-              </a:ext>
-            </a:extLst>
-          </p:cNvPr>
-          <p:cNvSpPr>
-            <a:spLocks xmlns:a="http://schemas.openxmlformats.org/drawingml/2006/main" noGrp="1"/>
-          </p:cNvSpPr>
-          <p:nvPr/>
-        </p:nvSpPr>
-        <p:spPr>
-          <a:xfrm xmlns:a="http://schemas.openxmlformats.org/drawingml/2006/main">
-            <a:off x="1390650" y="2105025"/>
-            <a:ext cx="4057650" cy="333375"/>
+              <a:t>Benchmark</a:t>
+            </a:r>
+          </a:p>
+        </p:txBody>
+      </p:sp>
+      <p:sp>
+        <p:nvSpPr>
+          <p:cNvPr id="22" name="layer1-detail">
+            <a:extLst xmlns:a="http://schemas.openxmlformats.org/drawingml/2006/main">
+              <a:ext uri="{FF2B5EF4-FFF2-40B4-BE49-F238E27FC236}">
+                <a16:creationId xmlns:a16="http://schemas.microsoft.com/office/drawing/2014/main" id="{D2CAFCFF-51E3-418E-9F2E-FFBC7E5AC08D}"/>
+              </a:ext>
+            </a:extLst>
+          </p:cNvPr>
+          <p:cNvSpPr>
+            <a:spLocks xmlns:a="http://schemas.openxmlformats.org/drawingml/2006/main" noGrp="1"/>
+          </p:cNvSpPr>
+          <p:nvPr/>
+        </p:nvSpPr>
+        <p:spPr>
+          <a:xfrm xmlns:a="http://schemas.openxmlformats.org/drawingml/2006/main">
+            <a:off x="1390650" y="2085975"/>
+            <a:ext cx="4057650" cy="352425"/>
           </a:xfrm>
           <a:prstGeom xmlns:a="http://schemas.openxmlformats.org/drawingml/2006/main" prst="rect">
             <a:avLst/>
@@ -6325,6 +6625,7 @@
           <a:lstStyle xmlns:a="http://schemas.openxmlformats.org/drawingml/2006/main"/>
           <a:p xmlns:a="http://schemas.openxmlformats.org/drawingml/2006/main">
             <a:pPr>
+              <a:buNone/>
               <a:defRPr sz="1200">
                 <a:solidFill>
                   <a:srgbClr val="627D98"/>
@@ -6343,33 +6644,33 @@
                 <a:ea typeface="Calibri"/>
                 <a:cs typeface="Calibri"/>
               </a:rPr>
-              <a:t>FA / FWTW instrument matrices in dollars.</a:t>
-            </a:r>
-          </a:p>
-        </p:txBody>
-      </p:sp>
-      <p:sp>
-        <p:nvSpPr>
-          <p:cNvPr id="23" name="chain2-surface">
-            <a:extLst xmlns:a="http://schemas.openxmlformats.org/drawingml/2006/main">
-              <a:ext uri="{FF2B5EF4-FFF2-40B4-BE49-F238E27FC236}">
-                <a16:creationId xmlns:a16="http://schemas.microsoft.com/office/drawing/2014/main" id="{50DEB0E4-91BC-4313-B140-95CC3E8A3C29}"/>
-              </a:ext>
-            </a:extLst>
-          </p:cNvPr>
-          <p:cNvSpPr>
-            <a:spLocks xmlns:a="http://schemas.openxmlformats.org/drawingml/2006/main" noGrp="1"/>
-          </p:cNvSpPr>
-          <p:nvPr/>
-        </p:nvSpPr>
-        <p:spPr>
-          <a:xfrm xmlns:a="http://schemas.openxmlformats.org/drawingml/2006/main">
-            <a:off x="742950" y="2667000"/>
-            <a:ext cx="4857750" cy="857250"/>
+              <a:t>Regenerate authors’ output for its own vintage.</a:t>
+            </a:r>
+          </a:p>
+        </p:txBody>
+      </p:sp>
+      <p:sp>
+        <p:nvSpPr>
+          <p:cNvPr id="23" name="layer2-surface">
+            <a:extLst xmlns:a="http://schemas.openxmlformats.org/drawingml/2006/main">
+              <a:ext uri="{FF2B5EF4-FFF2-40B4-BE49-F238E27FC236}">
+                <a16:creationId xmlns:a16="http://schemas.microsoft.com/office/drawing/2014/main" id="{D33A75BB-AC53-46CB-A836-42B2C2CC3510}"/>
+              </a:ext>
+            </a:extLst>
+          </p:cNvPr>
+          <p:cNvSpPr>
+            <a:spLocks xmlns:a="http://schemas.openxmlformats.org/drawingml/2006/main" noGrp="1"/>
+          </p:cNvSpPr>
+          <p:nvPr/>
+        </p:nvSpPr>
+        <p:spPr>
+          <a:xfrm xmlns:a="http://schemas.openxmlformats.org/drawingml/2006/main">
+            <a:off x="742950" y="2657475"/>
+            <a:ext cx="4857750" cy="876300"/>
           </a:xfrm>
           <a:prstGeom xmlns:a="http://schemas.openxmlformats.org/drawingml/2006/main" prst="roundRect">
             <a:avLst>
-              <a:gd name="adj" fmla="val 10000"/>
+              <a:gd name="adj" fmla="val 9783"/>
             </a:avLst>
           </a:prstGeom>
           <a:solidFill xmlns:a="http://schemas.openxmlformats.org/drawingml/2006/main">
@@ -6382,24 +6683,31 @@
             <a:prstDash val="solid"/>
           </a:ln>
         </p:spPr>
-      </p:sp>
-      <p:sp>
-        <p:nvSpPr>
-          <p:cNvPr id="24" name="chain2-number">
-            <a:extLst xmlns:a="http://schemas.openxmlformats.org/drawingml/2006/main">
-              <a:ext uri="{FF2B5EF4-FFF2-40B4-BE49-F238E27FC236}">
-                <a16:creationId xmlns:a16="http://schemas.microsoft.com/office/drawing/2014/main" id="{C73E0337-80A5-4B94-B771-70C0B3347F60}"/>
-              </a:ext>
-            </a:extLst>
-          </p:cNvPr>
-          <p:cNvSpPr>
-            <a:spLocks xmlns:a="http://schemas.openxmlformats.org/drawingml/2006/main" noGrp="1"/>
-          </p:cNvSpPr>
-          <p:nvPr/>
-        </p:nvSpPr>
-        <p:spPr>
-          <a:xfrm xmlns:a="http://schemas.openxmlformats.org/drawingml/2006/main">
-            <a:off x="895350" y="2819400"/>
+        <p:txBody>
+          <a:bodyPr xmlns:a="http://schemas.openxmlformats.org/drawingml/2006/main"/>
+          <a:lstStyle xmlns:a="http://schemas.openxmlformats.org/drawingml/2006/main"/>
+          <a:p xmlns:a="http://schemas.openxmlformats.org/drawingml/2006/main">
+            <a:endParaRPr/>
+          </a:p>
+        </p:txBody>
+      </p:sp>
+      <p:sp>
+        <p:nvSpPr>
+          <p:cNvPr id="24" name="layer2-number">
+            <a:extLst xmlns:a="http://schemas.openxmlformats.org/drawingml/2006/main">
+              <a:ext uri="{FF2B5EF4-FFF2-40B4-BE49-F238E27FC236}">
+                <a16:creationId xmlns:a16="http://schemas.microsoft.com/office/drawing/2014/main" id="{81DA5561-0D65-4639-9099-8429F0D452D9}"/>
+              </a:ext>
+            </a:extLst>
+          </p:cNvPr>
+          <p:cNvSpPr>
+            <a:spLocks xmlns:a="http://schemas.openxmlformats.org/drawingml/2006/main" noGrp="1"/>
+          </p:cNvSpPr>
+          <p:nvPr/>
+        </p:nvSpPr>
+        <p:spPr>
+          <a:xfrm xmlns:a="http://schemas.openxmlformats.org/drawingml/2006/main">
+            <a:off x="895350" y="2809875"/>
             <a:ext cx="361950" cy="361950"/>
           </a:xfrm>
           <a:prstGeom xmlns:a="http://schemas.openxmlformats.org/drawingml/2006/main" prst="ellipse">
@@ -6417,11 +6725,12 @@
         </p:spPr>
         <p:txBody>
           <a:bodyPr xmlns:a="http://schemas.openxmlformats.org/drawingml/2006/main" wrap="square" lIns="0" tIns="0" rIns="0" bIns="0" anchor="ctr">
-            <a:normAutofit fontScale="100000"/>
+            <a:normAutofit/>
           </a:bodyPr>
           <a:lstStyle xmlns:a="http://schemas.openxmlformats.org/drawingml/2006/main"/>
           <a:p xmlns:a="http://schemas.openxmlformats.org/drawingml/2006/main">
             <a:pPr algn="ctr">
+              <a:buNone/>
               <a:defRPr sz="1350" b="1">
                 <a:solidFill>
                   <a:srgbClr val="FFFFFF"/>
@@ -6447,21 +6756,21 @@
       </p:sp>
       <p:sp>
         <p:nvSpPr>
-          <p:cNvPr id="25" name="chain2-title">
-            <a:extLst xmlns:a="http://schemas.openxmlformats.org/drawingml/2006/main">
-              <a:ext uri="{FF2B5EF4-FFF2-40B4-BE49-F238E27FC236}">
-                <a16:creationId xmlns:a16="http://schemas.microsoft.com/office/drawing/2014/main" id="{7DE4D70E-A8DE-49DE-991D-30180DB6FAA3}"/>
-              </a:ext>
-            </a:extLst>
-          </p:cNvPr>
-          <p:cNvSpPr>
-            <a:spLocks xmlns:a="http://schemas.openxmlformats.org/drawingml/2006/main" noGrp="1"/>
-          </p:cNvSpPr>
-          <p:nvPr/>
-        </p:nvSpPr>
-        <p:spPr>
-          <a:xfrm xmlns:a="http://schemas.openxmlformats.org/drawingml/2006/main">
-            <a:off x="1390650" y="2800350"/>
+          <p:cNvPr id="25" name="layer2-title">
+            <a:extLst xmlns:a="http://schemas.openxmlformats.org/drawingml/2006/main">
+              <a:ext uri="{FF2B5EF4-FFF2-40B4-BE49-F238E27FC236}">
+                <a16:creationId xmlns:a16="http://schemas.microsoft.com/office/drawing/2014/main" id="{0A8C9545-7BDB-4E3B-9FB8-D039237B024E}"/>
+              </a:ext>
+            </a:extLst>
+          </p:cNvPr>
+          <p:cNvSpPr>
+            <a:spLocks xmlns:a="http://schemas.openxmlformats.org/drawingml/2006/main" noGrp="1"/>
+          </p:cNvSpPr>
+          <p:nvPr/>
+        </p:nvSpPr>
+        <p:spPr>
+          <a:xfrm xmlns:a="http://schemas.openxmlformats.org/drawingml/2006/main">
+            <a:off x="1390650" y="2790825"/>
             <a:ext cx="4057650" cy="295275"/>
           </a:xfrm>
           <a:prstGeom xmlns:a="http://schemas.openxmlformats.org/drawingml/2006/main" prst="rect">
@@ -6480,6 +6789,7 @@
           <a:lstStyle xmlns:a="http://schemas.openxmlformats.org/drawingml/2006/main"/>
           <a:p xmlns:a="http://schemas.openxmlformats.org/drawingml/2006/main">
             <a:pPr>
+              <a:buNone/>
               <a:defRPr sz="1500" b="1">
                 <a:solidFill>
                   <a:srgbClr val="102A43"/>
@@ -6498,29 +6808,29 @@
                 <a:ea typeface="Calibri"/>
                 <a:cs typeface="Calibri"/>
               </a:rPr>
-              <a:t>Direct shares</a:t>
-            </a:r>
-          </a:p>
-        </p:txBody>
-      </p:sp>
-      <p:sp>
-        <p:nvSpPr>
-          <p:cNvPr id="26" name="chain2-detail">
-            <a:extLst xmlns:a="http://schemas.openxmlformats.org/drawingml/2006/main">
-              <a:ext uri="{FF2B5EF4-FFF2-40B4-BE49-F238E27FC236}">
-                <a16:creationId xmlns:a16="http://schemas.microsoft.com/office/drawing/2014/main" id="{7394F462-3B0F-47D3-85C8-36323FB73432}"/>
-              </a:ext>
-            </a:extLst>
-          </p:cNvPr>
-          <p:cNvSpPr>
-            <a:spLocks xmlns:a="http://schemas.openxmlformats.org/drawingml/2006/main" noGrp="1"/>
-          </p:cNvSpPr>
-          <p:nvPr/>
-        </p:nvSpPr>
-        <p:spPr>
-          <a:xfrm xmlns:a="http://schemas.openxmlformats.org/drawingml/2006/main">
-            <a:off x="1390650" y="3095625"/>
-            <a:ext cx="4057650" cy="333375"/>
+              <a:t>Reconstruction</a:t>
+            </a:r>
+          </a:p>
+        </p:txBody>
+      </p:sp>
+      <p:sp>
+        <p:nvSpPr>
+          <p:cNvPr id="26" name="layer2-detail">
+            <a:extLst xmlns:a="http://schemas.openxmlformats.org/drawingml/2006/main">
+              <a:ext uri="{FF2B5EF4-FFF2-40B4-BE49-F238E27FC236}">
+                <a16:creationId xmlns:a16="http://schemas.microsoft.com/office/drawing/2014/main" id="{976A2DC8-0015-4F11-B9F7-E4D5CA29A335}"/>
+              </a:ext>
+            </a:extLst>
+          </p:cNvPr>
+          <p:cNvSpPr>
+            <a:spLocks xmlns:a="http://schemas.openxmlformats.org/drawingml/2006/main" noGrp="1"/>
+          </p:cNvSpPr>
+          <p:nvPr/>
+        </p:nvSpPr>
+        <p:spPr>
+          <a:xfrm xmlns:a="http://schemas.openxmlformats.org/drawingml/2006/main">
+            <a:off x="1390650" y="3086100"/>
+            <a:ext cx="4057650" cy="352425"/>
           </a:xfrm>
           <a:prstGeom xmlns:a="http://schemas.openxmlformats.org/drawingml/2006/main" prst="rect">
             <a:avLst/>
@@ -6538,6 +6848,7 @@
           <a:lstStyle xmlns:a="http://schemas.openxmlformats.org/drawingml/2006/main"/>
           <a:p xmlns:a="http://schemas.openxmlformats.org/drawingml/2006/main">
             <a:pPr>
+              <a:buNone/>
               <a:defRPr sz="1200">
                 <a:solidFill>
                   <a:srgbClr val="627D98"/>
@@ -6556,17 +6867,17 @@
                 <a:ea typeface="Calibri"/>
                 <a:cs typeface="Calibri"/>
               </a:rPr>
-              <a:t>Balance cells and row-normalize by issuer.</a:t>
-            </a:r>
-          </a:p>
-        </p:txBody>
-      </p:sp>
-      <p:sp>
-        <p:nvSpPr>
-          <p:cNvPr id="27" name="chain3-surface">
-            <a:extLst xmlns:a="http://schemas.openxmlformats.org/drawingml/2006/main">
-              <a:ext uri="{FF2B5EF4-FFF2-40B4-BE49-F238E27FC236}">
-                <a16:creationId xmlns:a16="http://schemas.microsoft.com/office/drawing/2014/main" id="{900FA293-2F76-44AC-AE6E-A3C8ABE61EF0}"/>
+              <a:t>Use the earliest input that identifies the target object.</a:t>
+            </a:r>
+          </a:p>
+        </p:txBody>
+      </p:sp>
+      <p:sp>
+        <p:nvSpPr>
+          <p:cNvPr id="27" name="layer3-surface">
+            <a:extLst xmlns:a="http://schemas.openxmlformats.org/drawingml/2006/main">
+              <a:ext uri="{FF2B5EF4-FFF2-40B4-BE49-F238E27FC236}">
+                <a16:creationId xmlns:a16="http://schemas.microsoft.com/office/drawing/2014/main" id="{21489112-9F9B-463D-A853-A94C5C839EDC}"/>
               </a:ext>
             </a:extLst>
           </p:cNvPr>
@@ -6578,11 +6889,11 @@
         <p:spPr>
           <a:xfrm xmlns:a="http://schemas.openxmlformats.org/drawingml/2006/main">
             <a:off x="742950" y="3657600"/>
-            <a:ext cx="4857750" cy="857250"/>
+            <a:ext cx="4857750" cy="876300"/>
           </a:xfrm>
           <a:prstGeom xmlns:a="http://schemas.openxmlformats.org/drawingml/2006/main" prst="roundRect">
             <a:avLst>
-              <a:gd name="adj" fmla="val 10000"/>
+              <a:gd name="adj" fmla="val 9783"/>
             </a:avLst>
           </a:prstGeom>
           <a:solidFill xmlns:a="http://schemas.openxmlformats.org/drawingml/2006/main">
@@ -6595,13 +6906,20 @@
             <a:prstDash val="solid"/>
           </a:ln>
         </p:spPr>
-      </p:sp>
-      <p:sp>
-        <p:nvSpPr>
-          <p:cNvPr id="28" name="chain3-number">
-            <a:extLst xmlns:a="http://schemas.openxmlformats.org/drawingml/2006/main">
-              <a:ext uri="{FF2B5EF4-FFF2-40B4-BE49-F238E27FC236}">
-                <a16:creationId xmlns:a16="http://schemas.microsoft.com/office/drawing/2014/main" id="{FE41CF9B-CD86-492C-9BF6-E9B8EC9433F6}"/>
+        <p:txBody>
+          <a:bodyPr xmlns:a="http://schemas.openxmlformats.org/drawingml/2006/main"/>
+          <a:lstStyle xmlns:a="http://schemas.openxmlformats.org/drawingml/2006/main"/>
+          <a:p xmlns:a="http://schemas.openxmlformats.org/drawingml/2006/main">
+            <a:endParaRPr/>
+          </a:p>
+        </p:txBody>
+      </p:sp>
+      <p:sp>
+        <p:nvSpPr>
+          <p:cNvPr id="28" name="layer3-number">
+            <a:extLst xmlns:a="http://schemas.openxmlformats.org/drawingml/2006/main">
+              <a:ext uri="{FF2B5EF4-FFF2-40B4-BE49-F238E27FC236}">
+                <a16:creationId xmlns:a16="http://schemas.microsoft.com/office/drawing/2014/main" id="{61CE2F72-C904-4258-BD1C-4B69D5BAECFC}"/>
               </a:ext>
             </a:extLst>
           </p:cNvPr>
@@ -6630,11 +6948,12 @@
         </p:spPr>
         <p:txBody>
           <a:bodyPr xmlns:a="http://schemas.openxmlformats.org/drawingml/2006/main" wrap="square" lIns="0" tIns="0" rIns="0" bIns="0" anchor="ctr">
-            <a:normAutofit fontScale="100000"/>
+            <a:normAutofit/>
           </a:bodyPr>
           <a:lstStyle xmlns:a="http://schemas.openxmlformats.org/drawingml/2006/main"/>
           <a:p xmlns:a="http://schemas.openxmlformats.org/drawingml/2006/main">
             <a:pPr algn="ctr">
+              <a:buNone/>
               <a:defRPr sz="1350" b="1">
                 <a:solidFill>
                   <a:srgbClr val="FFFFFF"/>
@@ -6660,10 +6979,10 @@
       </p:sp>
       <p:sp>
         <p:nvSpPr>
-          <p:cNvPr id="29" name="chain3-title">
-            <a:extLst xmlns:a="http://schemas.openxmlformats.org/drawingml/2006/main">
-              <a:ext uri="{FF2B5EF4-FFF2-40B4-BE49-F238E27FC236}">
-                <a16:creationId xmlns:a16="http://schemas.microsoft.com/office/drawing/2014/main" id="{F5BCD9C5-DAB3-4E7E-968A-CB4D975ADAEF}"/>
+          <p:cNvPr id="29" name="layer3-title">
+            <a:extLst xmlns:a="http://schemas.openxmlformats.org/drawingml/2006/main">
+              <a:ext uri="{FF2B5EF4-FFF2-40B4-BE49-F238E27FC236}">
+                <a16:creationId xmlns:a16="http://schemas.microsoft.com/office/drawing/2014/main" id="{FEDD66DC-D7FD-403C-B34B-110BFD630213}"/>
               </a:ext>
             </a:extLst>
           </p:cNvPr>
@@ -6693,6 +7012,7 @@
           <a:lstStyle xmlns:a="http://schemas.openxmlformats.org/drawingml/2006/main"/>
           <a:p xmlns:a="http://schemas.openxmlformats.org/drawingml/2006/main">
             <a:pPr>
+              <a:buNone/>
               <a:defRPr sz="1500" b="1">
                 <a:solidFill>
                   <a:srgbClr val="102A43"/>
@@ -6711,17 +7031,17 @@
                 <a:ea typeface="Calibri"/>
                 <a:cs typeface="Calibri"/>
               </a:rPr>
-              <a:t>Ultimate ownership</a:t>
-            </a:r>
-          </a:p>
-        </p:txBody>
-      </p:sp>
-      <p:sp>
-        <p:nvSpPr>
-          <p:cNvPr id="30" name="chain3-detail">
-            <a:extLst xmlns:a="http://schemas.openxmlformats.org/drawingml/2006/main">
-              <a:ext uri="{FF2B5EF4-FFF2-40B4-BE49-F238E27FC236}">
-                <a16:creationId xmlns:a16="http://schemas.microsoft.com/office/drawing/2014/main" id="{5D84456C-2F09-4F9B-89ED-56E6B0128F34}"/>
+              <a:t>Robustness</a:t>
+            </a:r>
+          </a:p>
+        </p:txBody>
+      </p:sp>
+      <p:sp>
+        <p:nvSpPr>
+          <p:cNvPr id="30" name="layer3-detail">
+            <a:extLst xmlns:a="http://schemas.openxmlformats.org/drawingml/2006/main">
+              <a:ext uri="{FF2B5EF4-FFF2-40B4-BE49-F238E27FC236}">
+                <a16:creationId xmlns:a16="http://schemas.microsoft.com/office/drawing/2014/main" id="{1E1CD187-EE9F-44D3-821B-3A6E57B98AC5}"/>
               </a:ext>
             </a:extLst>
           </p:cNvPr>
@@ -6733,7 +7053,7 @@
         <p:spPr>
           <a:xfrm xmlns:a="http://schemas.openxmlformats.org/drawingml/2006/main">
             <a:off x="1390650" y="4086225"/>
-            <a:ext cx="4057650" cy="333375"/>
+            <a:ext cx="4057650" cy="352425"/>
           </a:xfrm>
           <a:prstGeom xmlns:a="http://schemas.openxmlformats.org/drawingml/2006/main" prst="rect">
             <a:avLst/>
@@ -6751,6 +7071,7 @@
           <a:lstStyle xmlns:a="http://schemas.openxmlformats.org/drawingml/2006/main"/>
           <a:p xmlns:a="http://schemas.openxmlformats.org/drawingml/2006/main">
             <a:pPr>
+              <a:buNone/>
               <a:defRPr sz="1200">
                 <a:solidFill>
                   <a:srgbClr val="627D98"/>
@@ -6769,33 +7090,992 @@
                 <a:ea typeface="Calibri"/>
                 <a:cs typeface="Calibri"/>
               </a:rPr>
-              <a:t>Apply the Leontief solve and cohort split.</a:t>
-            </a:r>
-          </a:p>
-        </p:txBody>
-      </p:sp>
-      <p:sp>
-        <p:nvSpPr>
-          <p:cNvPr id="31" name="chain4-surface">
-            <a:extLst xmlns:a="http://schemas.openxmlformats.org/drawingml/2006/main">
-              <a:ext uri="{FF2B5EF4-FFF2-40B4-BE49-F238E27FC236}">
-                <a16:creationId xmlns:a16="http://schemas.microsoft.com/office/drawing/2014/main" id="{D6604C4C-14D6-4211-9C61-88016E3BE3B8}"/>
-              </a:ext>
-            </a:extLst>
-          </p:cNvPr>
-          <p:cNvSpPr>
-            <a:spLocks xmlns:a="http://schemas.openxmlformats.org/drawingml/2006/main" noGrp="1"/>
-          </p:cNvSpPr>
-          <p:nvPr/>
-        </p:nvSpPr>
-        <p:spPr>
-          <a:xfrm xmlns:a="http://schemas.openxmlformats.org/drawingml/2006/main">
-            <a:off x="6667500" y="1981200"/>
-            <a:ext cx="4429125" cy="1009650"/>
+              <a:t>Change vintage or taxonomy only with an explicit label.</a:t>
+            </a:r>
+          </a:p>
+        </p:txBody>
+      </p:sp>
+      <p:sp>
+        <p:nvSpPr>
+          <p:cNvPr id="31" name="raw-immutable-badge">
+            <a:extLst xmlns:a="http://schemas.openxmlformats.org/drawingml/2006/main">
+              <a:ext uri="{FF2B5EF4-FFF2-40B4-BE49-F238E27FC236}">
+                <a16:creationId xmlns:a16="http://schemas.microsoft.com/office/drawing/2014/main" id="{0B0A0500-0C36-44BC-8962-F09A6363DD17}"/>
+              </a:ext>
+            </a:extLst>
+          </p:cNvPr>
+          <p:cNvSpPr>
+            <a:spLocks xmlns:a="http://schemas.openxmlformats.org/drawingml/2006/main" noGrp="1"/>
+          </p:cNvSpPr>
+          <p:nvPr/>
+        </p:nvSpPr>
+        <p:spPr>
+          <a:xfrm xmlns:a="http://schemas.openxmlformats.org/drawingml/2006/main">
+            <a:off x="6667500" y="1733550"/>
+            <a:ext cx="2000250" cy="257175"/>
           </a:xfrm>
           <a:prstGeom xmlns:a="http://schemas.openxmlformats.org/drawingml/2006/main" prst="roundRect">
             <a:avLst>
-              <a:gd name="adj" fmla="val 8491"/>
+              <a:gd name="adj" fmla="val 44444"/>
+            </a:avLst>
+          </a:prstGeom>
+          <a:solidFill xmlns:a="http://schemas.openxmlformats.org/drawingml/2006/main">
+            <a:srgbClr val="102A43"/>
+          </a:solidFill>
+          <a:ln xmlns:a="http://schemas.openxmlformats.org/drawingml/2006/main" w="9525">
+            <a:solidFill>
+              <a:srgbClr val="102A43"/>
+            </a:solidFill>
+            <a:prstDash val="solid"/>
+          </a:ln>
+        </p:spPr>
+        <p:txBody>
+          <a:bodyPr xmlns:a="http://schemas.openxmlformats.org/drawingml/2006/main" wrap="square" lIns="38100" tIns="9525" rIns="38100" bIns="9525" anchor="ctr">
+            <a:normAutofit/>
+          </a:bodyPr>
+          <a:lstStyle xmlns:a="http://schemas.openxmlformats.org/drawingml/2006/main"/>
+          <a:p xmlns:a="http://schemas.openxmlformats.org/drawingml/2006/main">
+            <a:pPr algn="ctr">
+              <a:buNone/>
+              <a:defRPr sz="975" b="1">
+                <a:solidFill>
+                  <a:srgbClr val="FFFFFF"/>
+                </a:solidFill>
+                <a:latin typeface="Calibri"/>
+                <a:ea typeface="Calibri"/>
+                <a:cs typeface="Calibri"/>
+              </a:defRPr>
+            </a:pPr>
+            <a:r>
+              <a:rPr sz="975" b="1">
+                <a:solidFill>
+                  <a:srgbClr val="FFFFFF"/>
+                </a:solidFill>
+                <a:latin typeface="Calibri"/>
+                <a:ea typeface="Calibri"/>
+                <a:cs typeface="Calibri"/>
+              </a:rPr>
+              <a:t>RAW STAYS IMMUTABLE</a:t>
+            </a:r>
+          </a:p>
+        </p:txBody>
+      </p:sp>
+      <p:sp>
+        <p:nvSpPr>
+          <p:cNvPr id="32" name="storage-list">
+            <a:extLst xmlns:a="http://schemas.openxmlformats.org/drawingml/2006/main">
+              <a:ext uri="{FF2B5EF4-FFF2-40B4-BE49-F238E27FC236}">
+                <a16:creationId xmlns:a16="http://schemas.microsoft.com/office/drawing/2014/main" id="{8D1E82F5-4CAD-4A1A-B5E6-F4AD3A901A88}"/>
+              </a:ext>
+            </a:extLst>
+          </p:cNvPr>
+          <p:cNvSpPr>
+            <a:spLocks xmlns:a="http://schemas.openxmlformats.org/drawingml/2006/main" noGrp="1"/>
+          </p:cNvSpPr>
+          <p:nvPr/>
+        </p:nvSpPr>
+        <p:spPr>
+          <a:xfrm xmlns:a="http://schemas.openxmlformats.org/drawingml/2006/main">
+            <a:off x="6667500" y="2266950"/>
+            <a:ext cx="4429125" cy="2095500"/>
+          </a:xfrm>
+          <a:prstGeom xmlns:a="http://schemas.openxmlformats.org/drawingml/2006/main" prst="rect">
+            <a:avLst/>
+          </a:prstGeom>
+          <a:noFill xmlns:a="http://schemas.openxmlformats.org/drawingml/2006/main"/>
+          <a:ln xmlns:a="http://schemas.openxmlformats.org/drawingml/2006/main" w="0">
+            <a:noFill/>
+            <a:prstDash val="solid"/>
+          </a:ln>
+        </p:spPr>
+        <p:txBody>
+          <a:bodyPr xmlns:a="http://schemas.openxmlformats.org/drawingml/2006/main" wrap="square" lIns="38100" tIns="38100" rIns="76200" bIns="38100" anchor="t">
+            <a:normAutofit/>
+          </a:bodyPr>
+          <a:lstStyle xmlns:a="http://schemas.openxmlformats.org/drawingml/2006/main"/>
+          <a:p xmlns:a="http://schemas.openxmlformats.org/drawingml/2006/main">
+            <a:pPr marL="20" indent="-12">
+              <a:spcAft>
+                <a:spcPts val="9"/>
+              </a:spcAft>
+              <a:buChar char="•"/>
+              <a:defRPr sz="1425">
+                <a:solidFill>
+                  <a:srgbClr val="1F2933"/>
+                </a:solidFill>
+                <a:latin typeface="Calibri"/>
+                <a:ea typeface="Calibri"/>
+                <a:cs typeface="Calibri"/>
+              </a:defRPr>
+            </a:pPr>
+            <a:r>
+              <a:rPr sz="1425">
+                <a:solidFill>
+                  <a:srgbClr val="1F2933"/>
+                </a:solidFill>
+                <a:latin typeface="Calibri"/>
+                <a:ea typeface="Calibri"/>
+                <a:cs typeface="Calibri"/>
+              </a:rPr>
+              <a:t>Symlink the authors' raw-data location if needed.</a:t>
+            </a:r>
+          </a:p>
+          <a:p xmlns:a="http://schemas.openxmlformats.org/drawingml/2006/main">
+            <a:pPr marL="20" indent="-12">
+              <a:spcAft>
+                <a:spcPts val="9"/>
+              </a:spcAft>
+              <a:buChar char="•"/>
+              <a:defRPr sz="1425">
+                <a:solidFill>
+                  <a:srgbClr val="1F2933"/>
+                </a:solidFill>
+                <a:latin typeface="Calibri"/>
+                <a:ea typeface="Calibri"/>
+                <a:cs typeface="Calibri"/>
+              </a:defRPr>
+            </a:pPr>
+            <a:r>
+              <a:rPr sz="1425">
+                <a:solidFill>
+                  <a:srgbClr val="1F2933"/>
+                </a:solidFill>
+                <a:latin typeface="Calibri"/>
+                <a:ea typeface="Calibri"/>
+                <a:cs typeface="Calibri"/>
+              </a:rPr>
+              <a:t>Do not duplicate large raw sources.</a:t>
+            </a:r>
+          </a:p>
+          <a:p xmlns:a="http://schemas.openxmlformats.org/drawingml/2006/main">
+            <a:pPr marL="20" indent="-12">
+              <a:spcAft>
+                <a:spcPts val="9"/>
+              </a:spcAft>
+              <a:buChar char="•"/>
+              <a:defRPr sz="1425">
+                <a:solidFill>
+                  <a:srgbClr val="1F2933"/>
+                </a:solidFill>
+                <a:latin typeface="Calibri"/>
+                <a:ea typeface="Calibri"/>
+                <a:cs typeface="Calibri"/>
+              </a:defRPr>
+            </a:pPr>
+            <a:r>
+              <a:rPr sz="1425">
+                <a:solidFill>
+                  <a:srgbClr val="1F2933"/>
+                </a:solidFill>
+                <a:latin typeface="Calibri"/>
+                <a:ea typeface="Calibri"/>
+                <a:cs typeface="Calibri"/>
+              </a:rPr>
+              <a:t>Save only documented interim data that materially speeds reruns.</a:t>
+            </a:r>
+          </a:p>
+          <a:p xmlns:a="http://schemas.openxmlformats.org/drawingml/2006/main">
+            <a:pPr marL="20" indent="-12">
+              <a:spcAft>
+                <a:spcPts val="9"/>
+              </a:spcAft>
+              <a:buChar char="•"/>
+              <a:defRPr sz="1425">
+                <a:solidFill>
+                  <a:srgbClr val="1F2933"/>
+                </a:solidFill>
+                <a:latin typeface="Calibri"/>
+                <a:ea typeface="Calibri"/>
+                <a:cs typeface="Calibri"/>
+              </a:defRPr>
+            </a:pPr>
+            <a:r>
+              <a:rPr sz="1425">
+                <a:solidFill>
+                  <a:srgbClr val="1F2933"/>
+                </a:solidFill>
+                <a:latin typeface="Calibri"/>
+                <a:ea typeface="Calibri"/>
+                <a:cs typeface="Calibri"/>
+              </a:rPr>
+              <a:t>Always retain compact final matrices, figures, and diagnostics.</a:t>
+            </a:r>
+          </a:p>
+        </p:txBody>
+      </p:sp>
+    </p:spTree>
+    <p:extLst>
+      <p:ext uri="{BB962C8B-B14F-4D97-AF65-F5344CB8AC3E}">
+        <p14:creationId xmlns:p14="http://schemas.microsoft.com/office/powerpoint/2010/main" val="1658438733"/>
+      </p:ext>
+    </p:extLst>
+  </p:cSld>
+</p:sld>
+</file>
+
+<file path=ppt/slides/slide13.xml><?xml version="1.0" encoding="utf-8"?>
+<p:sld xmlns:p="http://schemas.openxmlformats.org/presentationml/2006/main">
+  <p:cSld>
+    <p:bg>
+      <p:bgPr>
+        <a:solidFill xmlns:a="http://schemas.openxmlformats.org/drawingml/2006/main">
+          <a:srgbClr val="FFFFFF"/>
+        </a:solidFill>
+      </p:bgPr>
+    </p:bg>
+    <p:spTree>
+      <p:nvGrpSpPr>
+        <p:cNvPr id="1" name=""/>
+        <p:cNvGrpSpPr/>
+        <p:nvPr/>
+      </p:nvGrpSpPr>
+      <p:grpSpPr>
+        <a:xfrm xmlns:a="http://schemas.openxmlformats.org/drawingml/2006/main"/>
+      </p:grpSpPr>
+      <p:sp>
+        <p:nvSpPr>
+          <p:cNvPr id="16" name="kicker">
+            <a:extLst xmlns:a="http://schemas.openxmlformats.org/drawingml/2006/main">
+              <a:ext uri="{FF2B5EF4-FFF2-40B4-BE49-F238E27FC236}">
+                <a16:creationId xmlns:a16="http://schemas.microsoft.com/office/drawing/2014/main" id="{A21B0EF0-DF12-49E0-8282-A5EB5B11AC45}"/>
+              </a:ext>
+            </a:extLst>
+          </p:cNvPr>
+          <p:cNvSpPr>
+            <a:spLocks xmlns:a="http://schemas.openxmlformats.org/drawingml/2006/main" noGrp="1"/>
+          </p:cNvSpPr>
+          <p:nvPr/>
+        </p:nvSpPr>
+        <p:spPr>
+          <a:xfrm xmlns:a="http://schemas.openxmlformats.org/drawingml/2006/main">
+            <a:off x="457200" y="228600"/>
+            <a:ext cx="8572500" cy="209550"/>
+          </a:xfrm>
+          <a:prstGeom xmlns:a="http://schemas.openxmlformats.org/drawingml/2006/main" prst="rect">
+            <a:avLst/>
+          </a:prstGeom>
+          <a:noFill xmlns:a="http://schemas.openxmlformats.org/drawingml/2006/main"/>
+          <a:ln xmlns:a="http://schemas.openxmlformats.org/drawingml/2006/main" w="0">
+            <a:noFill/>
+            <a:prstDash val="solid"/>
+          </a:ln>
+        </p:spPr>
+        <p:txBody>
+          <a:bodyPr xmlns:a="http://schemas.openxmlformats.org/drawingml/2006/main" wrap="square" lIns="38100" tIns="19050" rIns="38100" bIns="19050" anchor="t">
+            <a:noAutofit/>
+          </a:bodyPr>
+          <a:lstStyle xmlns:a="http://schemas.openxmlformats.org/drawingml/2006/main"/>
+          <a:p xmlns:a="http://schemas.openxmlformats.org/drawingml/2006/main">
+            <a:pPr algn="l">
+              <a:buNone/>
+              <a:defRPr sz="1050" b="1">
+                <a:solidFill>
+                  <a:srgbClr val="C65D16"/>
+                </a:solidFill>
+                <a:latin typeface="Calibri"/>
+                <a:ea typeface="Calibri"/>
+                <a:cs typeface="Calibri"/>
+              </a:defRPr>
+            </a:pPr>
+            <a:r>
+              <a:rPr sz="1050" b="1">
+                <a:solidFill>
+                  <a:srgbClr val="C65D16"/>
+                </a:solidFill>
+                <a:latin typeface="Calibri"/>
+                <a:ea typeface="Calibri"/>
+                <a:cs typeface="Calibri"/>
+              </a:rPr>
+              <a:t>TAKEAWAY</a:t>
+            </a:r>
+          </a:p>
+        </p:txBody>
+      </p:sp>
+      <p:sp>
+        <p:nvSpPr>
+          <p:cNvPr id="2" name="title">
+            <a:extLst xmlns:a="http://schemas.openxmlformats.org/drawingml/2006/main">
+              <a:ext uri="{FF2B5EF4-FFF2-40B4-BE49-F238E27FC236}">
+                <a16:creationId xmlns:a16="http://schemas.microsoft.com/office/drawing/2014/main" id="{980D81F7-DD28-469F-9690-DA4664C92695}"/>
+              </a:ext>
+            </a:extLst>
+          </p:cNvPr>
+          <p:cNvSpPr>
+            <a:spLocks xmlns:a="http://schemas.openxmlformats.org/drawingml/2006/main" noGrp="1"/>
+          </p:cNvSpPr>
+          <p:nvPr/>
+        </p:nvSpPr>
+        <p:spPr>
+          <a:xfrm xmlns:a="http://schemas.openxmlformats.org/drawingml/2006/main">
+            <a:off x="457200" y="457200"/>
+            <a:ext cx="10763250" cy="495300"/>
+          </a:xfrm>
+          <a:prstGeom xmlns:a="http://schemas.openxmlformats.org/drawingml/2006/main" prst="rect">
+            <a:avLst/>
+          </a:prstGeom>
+          <a:noFill xmlns:a="http://schemas.openxmlformats.org/drawingml/2006/main"/>
+          <a:ln xmlns:a="http://schemas.openxmlformats.org/drawingml/2006/main" w="0">
+            <a:noFill/>
+            <a:prstDash val="solid"/>
+          </a:ln>
+        </p:spPr>
+        <p:txBody>
+          <a:bodyPr xmlns:a="http://schemas.openxmlformats.org/drawingml/2006/main" wrap="none" lIns="0" tIns="0" rIns="0" bIns="0" anchor="ctr">
+            <a:normAutofit/>
+          </a:bodyPr>
+          <a:lstStyle xmlns:a="http://schemas.openxmlformats.org/drawingml/2006/main"/>
+          <a:p xmlns:a="http://schemas.openxmlformats.org/drawingml/2006/main">
+            <a:pPr algn="l">
+              <a:buNone/>
+              <a:defRPr sz="2700" b="1">
+                <a:solidFill>
+                  <a:srgbClr val="102A43"/>
+                </a:solidFill>
+                <a:latin typeface="Calibri Light"/>
+                <a:ea typeface="Calibri Light"/>
+                <a:cs typeface="Calibri Light"/>
+              </a:defRPr>
+            </a:pPr>
+            <a:r>
+              <a:rPr sz="2700" b="1">
+                <a:solidFill>
+                  <a:srgbClr val="102A43"/>
+                </a:solidFill>
+                <a:latin typeface="Calibri Light"/>
+                <a:ea typeface="Calibri Light"/>
+                <a:cs typeface="Calibri Light"/>
+              </a:rPr>
+              <a:t>The architecture keeps every transformation auditable</a:t>
+            </a:r>
+          </a:p>
+        </p:txBody>
+      </p:sp>
+      <p:sp>
+        <p:nvSpPr>
+          <p:cNvPr id="3" name="header-rule">
+            <a:extLst xmlns:a="http://schemas.openxmlformats.org/drawingml/2006/main">
+              <a:ext uri="{FF2B5EF4-FFF2-40B4-BE49-F238E27FC236}">
+                <a16:creationId xmlns:a16="http://schemas.microsoft.com/office/drawing/2014/main" id="{4CDCC845-0954-47BE-99D9-ACC92C7E0BDF}"/>
+              </a:ext>
+            </a:extLst>
+          </p:cNvPr>
+          <p:cNvSpPr>
+            <a:spLocks xmlns:a="http://schemas.openxmlformats.org/drawingml/2006/main" noGrp="1"/>
+          </p:cNvSpPr>
+          <p:nvPr/>
+        </p:nvSpPr>
+        <p:spPr>
+          <a:xfrm xmlns:a="http://schemas.openxmlformats.org/drawingml/2006/main">
+            <a:off x="457200" y="981075"/>
+            <a:ext cx="11277600" cy="19050"/>
+          </a:xfrm>
+          <a:prstGeom xmlns:a="http://schemas.openxmlformats.org/drawingml/2006/main" prst="rect">
+            <a:avLst/>
+          </a:prstGeom>
+          <a:solidFill xmlns:a="http://schemas.openxmlformats.org/drawingml/2006/main">
+            <a:srgbClr val="102A43"/>
+          </a:solidFill>
+          <a:ln xmlns:a="http://schemas.openxmlformats.org/drawingml/2006/main" w="0">
+            <a:solidFill>
+              <a:srgbClr val="102A43"/>
+            </a:solidFill>
+            <a:prstDash val="solid"/>
+          </a:ln>
+        </p:spPr>
+        <p:txBody>
+          <a:bodyPr xmlns:a="http://schemas.openxmlformats.org/drawingml/2006/main"/>
+          <a:lstStyle xmlns:a="http://schemas.openxmlformats.org/drawingml/2006/main"/>
+          <a:p xmlns:a="http://schemas.openxmlformats.org/drawingml/2006/main">
+            <a:endParaRPr/>
+          </a:p>
+        </p:txBody>
+      </p:sp>
+      <p:sp>
+        <p:nvSpPr>
+          <p:cNvPr id="4" name="slide-number">
+            <a:extLst xmlns:a="http://schemas.openxmlformats.org/drawingml/2006/main">
+              <a:ext uri="{FF2B5EF4-FFF2-40B4-BE49-F238E27FC236}">
+                <a16:creationId xmlns:a16="http://schemas.microsoft.com/office/drawing/2014/main" id="{D40E37CD-502F-44AD-863C-998C0D343148}"/>
+              </a:ext>
+            </a:extLst>
+          </p:cNvPr>
+          <p:cNvSpPr>
+            <a:spLocks xmlns:a="http://schemas.openxmlformats.org/drawingml/2006/main" noGrp="1"/>
+          </p:cNvSpPr>
+          <p:nvPr/>
+        </p:nvSpPr>
+        <p:spPr>
+          <a:xfrm xmlns:a="http://schemas.openxmlformats.org/drawingml/2006/main">
+            <a:off x="11334750" y="257175"/>
+            <a:ext cx="400050" cy="228600"/>
+          </a:xfrm>
+          <a:prstGeom xmlns:a="http://schemas.openxmlformats.org/drawingml/2006/main" prst="rect">
+            <a:avLst/>
+          </a:prstGeom>
+          <a:noFill xmlns:a="http://schemas.openxmlformats.org/drawingml/2006/main"/>
+          <a:ln xmlns:a="http://schemas.openxmlformats.org/drawingml/2006/main" w="0">
+            <a:noFill/>
+            <a:prstDash val="solid"/>
+          </a:ln>
+        </p:spPr>
+        <p:txBody>
+          <a:bodyPr xmlns:a="http://schemas.openxmlformats.org/drawingml/2006/main" wrap="square" lIns="38100" tIns="19050" rIns="38100" bIns="19050" anchor="t">
+            <a:normAutofit fontScale="100000"/>
+          </a:bodyPr>
+          <a:lstStyle xmlns:a="http://schemas.openxmlformats.org/drawingml/2006/main"/>
+          <a:p xmlns:a="http://schemas.openxmlformats.org/drawingml/2006/main">
+            <a:pPr algn="r">
+              <a:buNone/>
+              <a:defRPr sz="1050" b="1">
+                <a:solidFill>
+                  <a:srgbClr val="627D98"/>
+                </a:solidFill>
+                <a:latin typeface="Calibri"/>
+                <a:ea typeface="Calibri"/>
+                <a:cs typeface="Calibri"/>
+              </a:defRPr>
+            </a:pPr>
+            <a:r>
+              <a:rPr sz="1050" b="1">
+                <a:solidFill>
+                  <a:srgbClr val="627D98"/>
+                </a:solidFill>
+                <a:latin typeface="Calibri"/>
+                <a:ea typeface="Calibri"/>
+                <a:cs typeface="Calibri"/>
+              </a:rPr>
+              <a:t>13</a:t>
+            </a:r>
+          </a:p>
+        </p:txBody>
+      </p:sp>
+      <p:sp>
+        <p:nvSpPr>
+          <p:cNvPr id="5" name="left-label">
+            <a:extLst xmlns:a="http://schemas.openxmlformats.org/drawingml/2006/main">
+              <a:ext uri="{FF2B5EF4-FFF2-40B4-BE49-F238E27FC236}">
+                <a16:creationId xmlns:a16="http://schemas.microsoft.com/office/drawing/2014/main" id="{7D68AFC4-C9F0-4906-8B90-9F78159CD369}"/>
+              </a:ext>
+            </a:extLst>
+          </p:cNvPr>
+          <p:cNvSpPr>
+            <a:spLocks xmlns:a="http://schemas.openxmlformats.org/drawingml/2006/main" noGrp="1"/>
+          </p:cNvSpPr>
+          <p:nvPr/>
+        </p:nvSpPr>
+        <p:spPr>
+          <a:xfrm xmlns:a="http://schemas.openxmlformats.org/drawingml/2006/main">
+            <a:off x="457200" y="1104900"/>
+            <a:ext cx="5410200" cy="257175"/>
+          </a:xfrm>
+          <a:prstGeom xmlns:a="http://schemas.openxmlformats.org/drawingml/2006/main" prst="rect">
+            <a:avLst/>
+          </a:prstGeom>
+          <a:noFill xmlns:a="http://schemas.openxmlformats.org/drawingml/2006/main"/>
+          <a:ln xmlns:a="http://schemas.openxmlformats.org/drawingml/2006/main" w="0">
+            <a:noFill/>
+            <a:prstDash val="solid"/>
+          </a:ln>
+        </p:spPr>
+        <p:txBody>
+          <a:bodyPr xmlns:a="http://schemas.openxmlformats.org/drawingml/2006/main" wrap="square" lIns="38100" tIns="19050" rIns="38100" bIns="19050" anchor="t">
+            <a:normAutofit/>
+          </a:bodyPr>
+          <a:lstStyle xmlns:a="http://schemas.openxmlformats.org/drawingml/2006/main"/>
+          <a:p xmlns:a="http://schemas.openxmlformats.org/drawingml/2006/main">
+            <a:pPr algn="l">
+              <a:buNone/>
+              <a:defRPr sz="1050" b="1">
+                <a:solidFill>
+                  <a:srgbClr val="2E5B88"/>
+                </a:solidFill>
+                <a:latin typeface="Calibri"/>
+                <a:ea typeface="Calibri"/>
+                <a:cs typeface="Calibri"/>
+              </a:defRPr>
+            </a:pPr>
+            <a:r>
+              <a:rPr sz="1050" b="1">
+                <a:solidFill>
+                  <a:srgbClr val="2E5B88"/>
+                </a:solidFill>
+                <a:latin typeface="Calibri"/>
+                <a:ea typeface="Calibri"/>
+                <a:cs typeface="Calibri"/>
+              </a:rPr>
+              <a:t>SOURCE → OBJECT</a:t>
+            </a:r>
+          </a:p>
+        </p:txBody>
+      </p:sp>
+      <p:sp>
+        <p:nvSpPr>
+          <p:cNvPr id="6" name="right-label">
+            <a:extLst xmlns:a="http://schemas.openxmlformats.org/drawingml/2006/main">
+              <a:ext uri="{FF2B5EF4-FFF2-40B4-BE49-F238E27FC236}">
+                <a16:creationId xmlns:a16="http://schemas.microsoft.com/office/drawing/2014/main" id="{169CDC6F-7B71-4F41-AC26-C991BF45F73E}"/>
+              </a:ext>
+            </a:extLst>
+          </p:cNvPr>
+          <p:cNvSpPr>
+            <a:spLocks xmlns:a="http://schemas.openxmlformats.org/drawingml/2006/main" noGrp="1"/>
+          </p:cNvSpPr>
+          <p:nvPr/>
+        </p:nvSpPr>
+        <p:spPr>
+          <a:xfrm xmlns:a="http://schemas.openxmlformats.org/drawingml/2006/main">
+            <a:off x="6324600" y="1104900"/>
+            <a:ext cx="5410200" cy="257175"/>
+          </a:xfrm>
+          <a:prstGeom xmlns:a="http://schemas.openxmlformats.org/drawingml/2006/main" prst="rect">
+            <a:avLst/>
+          </a:prstGeom>
+          <a:noFill xmlns:a="http://schemas.openxmlformats.org/drawingml/2006/main"/>
+          <a:ln xmlns:a="http://schemas.openxmlformats.org/drawingml/2006/main" w="0">
+            <a:noFill/>
+            <a:prstDash val="solid"/>
+          </a:ln>
+        </p:spPr>
+        <p:txBody>
+          <a:bodyPr xmlns:a="http://schemas.openxmlformats.org/drawingml/2006/main" wrap="square" lIns="38100" tIns="19050" rIns="38100" bIns="19050" anchor="t">
+            <a:normAutofit/>
+          </a:bodyPr>
+          <a:lstStyle xmlns:a="http://schemas.openxmlformats.org/drawingml/2006/main"/>
+          <a:p xmlns:a="http://schemas.openxmlformats.org/drawingml/2006/main">
+            <a:pPr algn="l">
+              <a:buNone/>
+              <a:defRPr sz="1050" b="1">
+                <a:solidFill>
+                  <a:srgbClr val="2E5B88"/>
+                </a:solidFill>
+                <a:latin typeface="Calibri"/>
+                <a:ea typeface="Calibri"/>
+                <a:cs typeface="Calibri"/>
+              </a:defRPr>
+            </a:pPr>
+            <a:r>
+              <a:rPr sz="1050" b="1">
+                <a:solidFill>
+                  <a:srgbClr val="2E5B88"/>
+                </a:solidFill>
+                <a:latin typeface="Calibri"/>
+                <a:ea typeface="Calibri"/>
+                <a:cs typeface="Calibri"/>
+              </a:rPr>
+              <a:t>OBJECT → EXHIBIT</a:t>
+            </a:r>
+          </a:p>
+        </p:txBody>
+      </p:sp>
+      <p:sp>
+        <p:nvSpPr>
+          <p:cNvPr id="7" name="Regenerated 2021 saving-glut figure-frame">
+            <a:extLst xmlns:a="http://schemas.openxmlformats.org/drawingml/2006/main">
+              <a:ext uri="{FF2B5EF4-FFF2-40B4-BE49-F238E27FC236}">
+                <a16:creationId xmlns:a16="http://schemas.microsoft.com/office/drawing/2014/main" id="{F41A9B74-0FDD-4969-A588-536A7E714AB3}"/>
+              </a:ext>
+            </a:extLst>
+          </p:cNvPr>
+          <p:cNvSpPr>
+            <a:spLocks xmlns:a="http://schemas.openxmlformats.org/drawingml/2006/main" noGrp="1"/>
+          </p:cNvSpPr>
+          <p:nvPr/>
+        </p:nvSpPr>
+        <p:spPr>
+          <a:xfrm xmlns:a="http://schemas.openxmlformats.org/drawingml/2006/main">
+            <a:off x="457200" y="1428750"/>
+            <a:ext cx="5410200" cy="3476625"/>
+          </a:xfrm>
+          <a:prstGeom xmlns:a="http://schemas.openxmlformats.org/drawingml/2006/main" prst="roundRect">
+            <a:avLst>
+              <a:gd name="adj" fmla="val 2192"/>
+            </a:avLst>
+          </a:prstGeom>
+          <a:solidFill xmlns:a="http://schemas.openxmlformats.org/drawingml/2006/main">
+            <a:srgbClr val="F7FAFC"/>
+          </a:solidFill>
+          <a:ln xmlns:a="http://schemas.openxmlformats.org/drawingml/2006/main" w="9525">
+            <a:solidFill>
+              <a:srgbClr val="D8E1E8"/>
+            </a:solidFill>
+            <a:prstDash val="solid"/>
+          </a:ln>
+        </p:spPr>
+        <p:txBody>
+          <a:bodyPr xmlns:a="http://schemas.openxmlformats.org/drawingml/2006/main"/>
+          <a:lstStyle xmlns:a="http://schemas.openxmlformats.org/drawingml/2006/main"/>
+          <a:p xmlns:a="http://schemas.openxmlformats.org/drawingml/2006/main">
+            <a:endParaRPr/>
+          </a:p>
+        </p:txBody>
+      </p:sp>
+      <p:pic>
+        <p:nvPicPr>
+          <p:cNvPr id="45" name="Picture 42"/>
+          <p:cNvPicPr>
+            <a:picLocks xmlns:a="http://schemas.openxmlformats.org/drawingml/2006/main" noChangeAspect="1"/>
+          </p:cNvPicPr>
+          <p:nvPr/>
+        </p:nvPicPr>
+        <p:blipFill>
+          <a:blip xmlns:r="http://schemas.openxmlformats.org/officeDocument/2006/relationships" xmlns:a="http://schemas.openxmlformats.org/drawingml/2006/main" r:embed="R4efb920e0d9a4572"/>
+          <a:stretch xmlns:a="http://schemas.openxmlformats.org/drawingml/2006/main"/>
+        </p:blipFill>
+        <p:spPr>
+          <a:xfrm xmlns:a="http://schemas.openxmlformats.org/drawingml/2006/main">
+            <a:off x="11715750" y="6762750"/>
+            <a:ext cx="9525" cy="9525"/>
+          </a:xfrm>
+          <a:prstGeom xmlns:a="http://schemas.openxmlformats.org/drawingml/2006/main" prst="rect">
+            <a:avLst/>
+          </a:prstGeom>
+        </p:spPr>
+      </p:pic>
+      <p:sp>
+        <p:nvSpPr>
+          <p:cNvPr id="9" name="2025 Figure 5 saving by wealth group-frame">
+            <a:extLst xmlns:a="http://schemas.openxmlformats.org/drawingml/2006/main">
+              <a:ext uri="{FF2B5EF4-FFF2-40B4-BE49-F238E27FC236}">
+                <a16:creationId xmlns:a16="http://schemas.microsoft.com/office/drawing/2014/main" id="{CECC33D5-8AA8-489D-A8CE-CF41FD19251A}"/>
+              </a:ext>
+            </a:extLst>
+          </p:cNvPr>
+          <p:cNvSpPr>
+            <a:spLocks xmlns:a="http://schemas.openxmlformats.org/drawingml/2006/main" noGrp="1"/>
+          </p:cNvSpPr>
+          <p:nvPr/>
+        </p:nvSpPr>
+        <p:spPr>
+          <a:xfrm xmlns:a="http://schemas.openxmlformats.org/drawingml/2006/main">
+            <a:off x="6324600" y="1428750"/>
+            <a:ext cx="5410200" cy="3476625"/>
+          </a:xfrm>
+          <a:prstGeom xmlns:a="http://schemas.openxmlformats.org/drawingml/2006/main" prst="roundRect">
+            <a:avLst>
+              <a:gd name="adj" fmla="val 2192"/>
+            </a:avLst>
+          </a:prstGeom>
+          <a:solidFill xmlns:a="http://schemas.openxmlformats.org/drawingml/2006/main">
+            <a:srgbClr val="F7FAFC"/>
+          </a:solidFill>
+          <a:ln xmlns:a="http://schemas.openxmlformats.org/drawingml/2006/main" w="9525">
+            <a:solidFill>
+              <a:srgbClr val="D8E1E8"/>
+            </a:solidFill>
+            <a:prstDash val="solid"/>
+          </a:ln>
+        </p:spPr>
+        <p:txBody>
+          <a:bodyPr xmlns:a="http://schemas.openxmlformats.org/drawingml/2006/main"/>
+          <a:lstStyle xmlns:a="http://schemas.openxmlformats.org/drawingml/2006/main"/>
+          <a:p xmlns:a="http://schemas.openxmlformats.org/drawingml/2006/main">
+            <a:endParaRPr/>
+          </a:p>
+        </p:txBody>
+      </p:sp>
+      <p:pic>
+        <p:nvPicPr>
+          <p:cNvPr id="47" name="Picture 44"/>
+          <p:cNvPicPr>
+            <a:picLocks xmlns:a="http://schemas.openxmlformats.org/drawingml/2006/main" noChangeAspect="1"/>
+          </p:cNvPicPr>
+          <p:nvPr/>
+        </p:nvPicPr>
+        <p:blipFill>
+          <a:blip xmlns:r="http://schemas.openxmlformats.org/officeDocument/2006/relationships" xmlns:a="http://schemas.openxmlformats.org/drawingml/2006/main" r:embed="R4efb920e0d9a4572"/>
+          <a:stretch xmlns:a="http://schemas.openxmlformats.org/drawingml/2006/main"/>
+        </p:blipFill>
+        <p:spPr>
+          <a:xfrm xmlns:a="http://schemas.openxmlformats.org/drawingml/2006/main">
+            <a:off x="11715750" y="6762750"/>
+            <a:ext cx="9525" cy="9525"/>
+          </a:xfrm>
+          <a:prstGeom xmlns:a="http://schemas.openxmlformats.org/drawingml/2006/main" prst="rect">
+            <a:avLst/>
+          </a:prstGeom>
+        </p:spPr>
+      </p:pic>
+      <p:sp>
+        <p:nvSpPr>
+          <p:cNvPr id="11" name="assessment-band">
+            <a:extLst xmlns:a="http://schemas.openxmlformats.org/drawingml/2006/main">
+              <a:ext uri="{FF2B5EF4-FFF2-40B4-BE49-F238E27FC236}">
+                <a16:creationId xmlns:a16="http://schemas.microsoft.com/office/drawing/2014/main" id="{661CFCE0-D157-4A4A-A3D4-5070BEB380E2}"/>
+              </a:ext>
+            </a:extLst>
+          </p:cNvPr>
+          <p:cNvSpPr>
+            <a:spLocks xmlns:a="http://schemas.openxmlformats.org/drawingml/2006/main" noGrp="1"/>
+          </p:cNvSpPr>
+          <p:nvPr/>
+        </p:nvSpPr>
+        <p:spPr>
+          <a:xfrm xmlns:a="http://schemas.openxmlformats.org/drawingml/2006/main">
+            <a:off x="457200" y="5095875"/>
+            <a:ext cx="11277600" cy="1028700"/>
+          </a:xfrm>
+          <a:prstGeom xmlns:a="http://schemas.openxmlformats.org/drawingml/2006/main" prst="roundRect">
+            <a:avLst>
+              <a:gd name="adj" fmla="val 7407"/>
+            </a:avLst>
+          </a:prstGeom>
+          <a:solidFill xmlns:a="http://schemas.openxmlformats.org/drawingml/2006/main">
+            <a:srgbClr val="EDF2F6"/>
+          </a:solidFill>
+          <a:ln xmlns:a="http://schemas.openxmlformats.org/drawingml/2006/main" w="9525">
+            <a:solidFill>
+              <a:srgbClr val="D8E1E8"/>
+            </a:solidFill>
+            <a:prstDash val="solid"/>
+          </a:ln>
+        </p:spPr>
+        <p:txBody>
+          <a:bodyPr xmlns:a="http://schemas.openxmlformats.org/drawingml/2006/main"/>
+          <a:lstStyle xmlns:a="http://schemas.openxmlformats.org/drawingml/2006/main"/>
+          <a:p xmlns:a="http://schemas.openxmlformats.org/drawingml/2006/main">
+            <a:endParaRPr/>
+          </a:p>
+        </p:txBody>
+      </p:sp>
+      <p:sp>
+        <p:nvSpPr>
+          <p:cNvPr id="12" name="assessment-accent">
+            <a:extLst xmlns:a="http://schemas.openxmlformats.org/drawingml/2006/main">
+              <a:ext uri="{FF2B5EF4-FFF2-40B4-BE49-F238E27FC236}">
+                <a16:creationId xmlns:a16="http://schemas.microsoft.com/office/drawing/2014/main" id="{16808DF2-B678-483C-92D7-325DE5843F58}"/>
+              </a:ext>
+            </a:extLst>
+          </p:cNvPr>
+          <p:cNvSpPr>
+            <a:spLocks xmlns:a="http://schemas.openxmlformats.org/drawingml/2006/main" noGrp="1"/>
+          </p:cNvSpPr>
+          <p:nvPr/>
+        </p:nvSpPr>
+        <p:spPr>
+          <a:xfrm xmlns:a="http://schemas.openxmlformats.org/drawingml/2006/main">
+            <a:off x="457200" y="6286500"/>
+            <a:ext cx="11277600" cy="19050"/>
+          </a:xfrm>
+          <a:prstGeom xmlns:a="http://schemas.openxmlformats.org/drawingml/2006/main" prst="rect">
+            <a:avLst/>
+          </a:prstGeom>
+          <a:solidFill xmlns:a="http://schemas.openxmlformats.org/drawingml/2006/main">
+            <a:srgbClr val="D8E1E8"/>
+          </a:solidFill>
+          <a:ln xmlns:a="http://schemas.openxmlformats.org/drawingml/2006/main" w="0">
+            <a:solidFill>
+              <a:srgbClr val="D8E1E8"/>
+            </a:solidFill>
+            <a:prstDash val="solid"/>
+          </a:ln>
+        </p:spPr>
+        <p:txBody>
+          <a:bodyPr xmlns:a="http://schemas.openxmlformats.org/drawingml/2006/main"/>
+          <a:lstStyle xmlns:a="http://schemas.openxmlformats.org/drawingml/2006/main"/>
+          <a:p xmlns:a="http://schemas.openxmlformats.org/drawingml/2006/main">
+            <a:endParaRPr/>
+          </a:p>
+        </p:txBody>
+      </p:sp>
+      <p:sp>
+        <p:nvSpPr>
+          <p:cNvPr id="13" name="verdict">
+            <a:extLst xmlns:a="http://schemas.openxmlformats.org/drawingml/2006/main">
+              <a:ext uri="{FF2B5EF4-FFF2-40B4-BE49-F238E27FC236}">
+                <a16:creationId xmlns:a16="http://schemas.microsoft.com/office/drawing/2014/main" id="{4C8931D4-85C6-4FA0-9526-7745475E19AD}"/>
+              </a:ext>
+            </a:extLst>
+          </p:cNvPr>
+          <p:cNvSpPr>
+            <a:spLocks xmlns:a="http://schemas.openxmlformats.org/drawingml/2006/main" noGrp="1"/>
+          </p:cNvSpPr>
+          <p:nvPr/>
+        </p:nvSpPr>
+        <p:spPr>
+          <a:xfrm xmlns:a="http://schemas.openxmlformats.org/drawingml/2006/main">
+            <a:off x="685800" y="5257800"/>
+            <a:ext cx="2428875" cy="295275"/>
+          </a:xfrm>
+          <a:prstGeom xmlns:a="http://schemas.openxmlformats.org/drawingml/2006/main" prst="rect">
+            <a:avLst/>
+          </a:prstGeom>
+          <a:noFill xmlns:a="http://schemas.openxmlformats.org/drawingml/2006/main"/>
+          <a:ln xmlns:a="http://schemas.openxmlformats.org/drawingml/2006/main" w="0">
+            <a:noFill/>
+            <a:prstDash val="solid"/>
+          </a:ln>
+        </p:spPr>
+        <p:txBody>
+          <a:bodyPr xmlns:a="http://schemas.openxmlformats.org/drawingml/2006/main" wrap="square" lIns="38100" tIns="19050" rIns="38100" bIns="19050" anchor="t">
+            <a:noAutofit/>
+          </a:bodyPr>
+          <a:lstStyle xmlns:a="http://schemas.openxmlformats.org/drawingml/2006/main"/>
+          <a:p xmlns:a="http://schemas.openxmlformats.org/drawingml/2006/main">
+            <a:pPr algn="l">
+              <a:buNone/>
+              <a:defRPr sz="1125" b="1">
+                <a:solidFill>
+                  <a:srgbClr val="C65D16"/>
+                </a:solidFill>
+                <a:latin typeface="Calibri"/>
+                <a:ea typeface="Calibri"/>
+                <a:cs typeface="Calibri"/>
+              </a:defRPr>
+            </a:pPr>
+            <a:r>
+              <a:rPr sz="1125" b="1">
+                <a:solidFill>
+                  <a:srgbClr val="C65D16"/>
+                </a:solidFill>
+                <a:latin typeface="Calibri"/>
+                <a:ea typeface="Calibri"/>
+                <a:cs typeface="Calibri"/>
+              </a:rPr>
+              <a:t>WHY IT MATTERS</a:t>
+            </a:r>
+          </a:p>
+        </p:txBody>
+      </p:sp>
+      <p:sp>
+        <p:nvSpPr>
+          <p:cNvPr id="14" name="assessment">
+            <a:extLst xmlns:a="http://schemas.openxmlformats.org/drawingml/2006/main">
+              <a:ext uri="{FF2B5EF4-FFF2-40B4-BE49-F238E27FC236}">
+                <a16:creationId xmlns:a16="http://schemas.microsoft.com/office/drawing/2014/main" id="{00A0EF70-9C45-4DDE-A376-FB6C73A8E3E0}"/>
+              </a:ext>
+            </a:extLst>
+          </p:cNvPr>
+          <p:cNvSpPr>
+            <a:spLocks xmlns:a="http://schemas.openxmlformats.org/drawingml/2006/main" noGrp="1"/>
+          </p:cNvSpPr>
+          <p:nvPr/>
+        </p:nvSpPr>
+        <p:spPr>
+          <a:xfrm xmlns:a="http://schemas.openxmlformats.org/drawingml/2006/main">
+            <a:off x="3143250" y="5219700"/>
+            <a:ext cx="8191500" cy="685800"/>
+          </a:xfrm>
+          <a:prstGeom xmlns:a="http://schemas.openxmlformats.org/drawingml/2006/main" prst="rect">
+            <a:avLst/>
+          </a:prstGeom>
+          <a:noFill xmlns:a="http://schemas.openxmlformats.org/drawingml/2006/main"/>
+          <a:ln xmlns:a="http://schemas.openxmlformats.org/drawingml/2006/main" w="0">
+            <a:noFill/>
+            <a:prstDash val="solid"/>
+          </a:ln>
+        </p:spPr>
+        <p:txBody>
+          <a:bodyPr xmlns:a="http://schemas.openxmlformats.org/drawingml/2006/main" wrap="square" lIns="38100" tIns="38100" rIns="38100" bIns="38100" anchor="ctr">
+            <a:normAutofit/>
+          </a:bodyPr>
+          <a:lstStyle xmlns:a="http://schemas.openxmlformats.org/drawingml/2006/main"/>
+          <a:p xmlns:a="http://schemas.openxmlformats.org/drawingml/2006/main">
+            <a:pPr algn="l">
+              <a:buNone/>
+              <a:defRPr sz="1650" b="1">
+                <a:solidFill>
+                  <a:srgbClr val="102A43"/>
+                </a:solidFill>
+                <a:latin typeface="Calibri"/>
+                <a:ea typeface="Calibri"/>
+                <a:cs typeface="Calibri"/>
+              </a:defRPr>
+            </a:pPr>
+            <a:r>
+              <a:rPr sz="1650" b="1">
+                <a:solidFill>
+                  <a:srgbClr val="102A43"/>
+                </a:solidFill>
+                <a:latin typeface="Calibri"/>
+                <a:ea typeface="Calibri"/>
+                <a:cs typeface="Calibri"/>
+              </a:rPr>
+              <a:t>Every final number should retain its source, unit, aggregation rule, and accounting invariant.</a:t>
+            </a:r>
+          </a:p>
+        </p:txBody>
+      </p:sp>
+      <p:sp>
+        <p:nvSpPr>
+          <p:cNvPr id="15" name="difference">
+            <a:extLst xmlns:a="http://schemas.openxmlformats.org/drawingml/2006/main">
+              <a:ext uri="{FF2B5EF4-FFF2-40B4-BE49-F238E27FC236}">
+                <a16:creationId xmlns:a16="http://schemas.microsoft.com/office/drawing/2014/main" id="{A4A3628C-1F59-4962-A00B-08C286CC7B82}"/>
+              </a:ext>
+            </a:extLst>
+          </p:cNvPr>
+          <p:cNvSpPr>
+            <a:spLocks xmlns:a="http://schemas.openxmlformats.org/drawingml/2006/main" noGrp="1"/>
+          </p:cNvSpPr>
+          <p:nvPr/>
+        </p:nvSpPr>
+        <p:spPr>
+          <a:xfrm xmlns:a="http://schemas.openxmlformats.org/drawingml/2006/main">
+            <a:off x="533400" y="6343650"/>
+            <a:ext cx="11125200" cy="190500"/>
+          </a:xfrm>
+          <a:prstGeom xmlns:a="http://schemas.openxmlformats.org/drawingml/2006/main" prst="rect">
+            <a:avLst/>
+          </a:prstGeom>
+          <a:noFill xmlns:a="http://schemas.openxmlformats.org/drawingml/2006/main"/>
+          <a:ln xmlns:a="http://schemas.openxmlformats.org/drawingml/2006/main" w="0">
+            <a:noFill/>
+            <a:prstDash val="solid"/>
+          </a:ln>
+        </p:spPr>
+        <p:txBody>
+          <a:bodyPr xmlns:a="http://schemas.openxmlformats.org/drawingml/2006/main" wrap="none" lIns="0" tIns="0" rIns="0" bIns="0" anchor="ctr">
+            <a:normAutofit/>
+          </a:bodyPr>
+          <a:lstStyle xmlns:a="http://schemas.openxmlformats.org/drawingml/2006/main"/>
+          <a:p xmlns:a="http://schemas.openxmlformats.org/drawingml/2006/main">
+            <a:pPr algn="l">
+              <a:buNone/>
+              <a:defRPr sz="825" b="0">
+                <a:solidFill>
+                  <a:srgbClr val="627D98"/>
+                </a:solidFill>
+                <a:latin typeface="Calibri"/>
+                <a:ea typeface="Calibri"/>
+                <a:cs typeface="Calibri"/>
+              </a:defRPr>
+            </a:pPr>
+            <a:r>
+              <a:rPr sz="825" b="0">
+                <a:solidFill>
+                  <a:srgbClr val="627D98"/>
+                </a:solidFill>
+                <a:latin typeface="Calibri"/>
+                <a:ea typeface="Calibri"/>
+                <a:cs typeface="Calibri"/>
+              </a:rPr>
+              <a:t>Source: synthesis of paper methodology and project data documentation.</a:t>
+            </a:r>
+          </a:p>
+        </p:txBody>
+      </p:sp>
+      <p:sp>
+        <p:nvSpPr>
+          <p:cNvPr id="19" name="chain1-surface">
+            <a:extLst xmlns:a="http://schemas.openxmlformats.org/drawingml/2006/main">
+              <a:ext uri="{FF2B5EF4-FFF2-40B4-BE49-F238E27FC236}">
+                <a16:creationId xmlns:a16="http://schemas.microsoft.com/office/drawing/2014/main" id="{36AFB536-83F6-4163-BE77-B73198CAB92D}"/>
+              </a:ext>
+            </a:extLst>
+          </p:cNvPr>
+          <p:cNvSpPr>
+            <a:spLocks xmlns:a="http://schemas.openxmlformats.org/drawingml/2006/main" noGrp="1"/>
+          </p:cNvSpPr>
+          <p:nvPr/>
+        </p:nvSpPr>
+        <p:spPr>
+          <a:xfrm xmlns:a="http://schemas.openxmlformats.org/drawingml/2006/main">
+            <a:off x="742950" y="1676400"/>
+            <a:ext cx="4857750" cy="857250"/>
+          </a:xfrm>
+          <a:prstGeom xmlns:a="http://schemas.openxmlformats.org/drawingml/2006/main" prst="roundRect">
+            <a:avLst>
+              <a:gd name="adj" fmla="val 10000"/>
             </a:avLst>
           </a:prstGeom>
           <a:solidFill xmlns:a="http://schemas.openxmlformats.org/drawingml/2006/main">
@@ -6808,6 +8088,682 @@
             <a:prstDash val="solid"/>
           </a:ln>
         </p:spPr>
+        <p:txBody>
+          <a:bodyPr xmlns:a="http://schemas.openxmlformats.org/drawingml/2006/main"/>
+          <a:lstStyle xmlns:a="http://schemas.openxmlformats.org/drawingml/2006/main"/>
+          <a:p xmlns:a="http://schemas.openxmlformats.org/drawingml/2006/main">
+            <a:endParaRPr/>
+          </a:p>
+        </p:txBody>
+      </p:sp>
+      <p:sp>
+        <p:nvSpPr>
+          <p:cNvPr id="20" name="chain1-number">
+            <a:extLst xmlns:a="http://schemas.openxmlformats.org/drawingml/2006/main">
+              <a:ext uri="{FF2B5EF4-FFF2-40B4-BE49-F238E27FC236}">
+                <a16:creationId xmlns:a16="http://schemas.microsoft.com/office/drawing/2014/main" id="{81CB238A-44C0-493F-9DA7-E315A7B07DC4}"/>
+              </a:ext>
+            </a:extLst>
+          </p:cNvPr>
+          <p:cNvSpPr>
+            <a:spLocks xmlns:a="http://schemas.openxmlformats.org/drawingml/2006/main" noGrp="1"/>
+          </p:cNvSpPr>
+          <p:nvPr/>
+        </p:nvSpPr>
+        <p:spPr>
+          <a:xfrm xmlns:a="http://schemas.openxmlformats.org/drawingml/2006/main">
+            <a:off x="895350" y="1828800"/>
+            <a:ext cx="361950" cy="361950"/>
+          </a:xfrm>
+          <a:prstGeom xmlns:a="http://schemas.openxmlformats.org/drawingml/2006/main" prst="ellipse">
+            <a:avLst/>
+          </a:prstGeom>
+          <a:solidFill xmlns:a="http://schemas.openxmlformats.org/drawingml/2006/main">
+            <a:srgbClr val="2E5B88"/>
+          </a:solidFill>
+          <a:ln xmlns:a="http://schemas.openxmlformats.org/drawingml/2006/main" w="0">
+            <a:solidFill>
+              <a:srgbClr val="2E5B88"/>
+            </a:solidFill>
+            <a:prstDash val="solid"/>
+          </a:ln>
+        </p:spPr>
+        <p:txBody>
+          <a:bodyPr xmlns:a="http://schemas.openxmlformats.org/drawingml/2006/main" wrap="square" lIns="0" tIns="0" rIns="0" bIns="0" anchor="ctr">
+            <a:normAutofit/>
+          </a:bodyPr>
+          <a:lstStyle xmlns:a="http://schemas.openxmlformats.org/drawingml/2006/main"/>
+          <a:p xmlns:a="http://schemas.openxmlformats.org/drawingml/2006/main">
+            <a:pPr algn="ctr">
+              <a:buNone/>
+              <a:defRPr sz="1350" b="1">
+                <a:solidFill>
+                  <a:srgbClr val="FFFFFF"/>
+                </a:solidFill>
+                <a:latin typeface="Calibri"/>
+                <a:ea typeface="Calibri"/>
+                <a:cs typeface="Calibri"/>
+              </a:defRPr>
+            </a:pPr>
+            <a:r>
+              <a:rPr sz="1350" b="1">
+                <a:solidFill>
+                  <a:srgbClr val="FFFFFF"/>
+                </a:solidFill>
+                <a:latin typeface="Calibri"/>
+                <a:ea typeface="Calibri"/>
+                <a:cs typeface="Calibri"/>
+              </a:rPr>
+              <a:t>1</a:t>
+            </a:r>
+          </a:p>
+        </p:txBody>
+      </p:sp>
+      <p:sp>
+        <p:nvSpPr>
+          <p:cNvPr id="21" name="chain1-title">
+            <a:extLst xmlns:a="http://schemas.openxmlformats.org/drawingml/2006/main">
+              <a:ext uri="{FF2B5EF4-FFF2-40B4-BE49-F238E27FC236}">
+                <a16:creationId xmlns:a16="http://schemas.microsoft.com/office/drawing/2014/main" id="{03CA0B56-10EF-42BE-8B71-677D6ECEF688}"/>
+              </a:ext>
+            </a:extLst>
+          </p:cNvPr>
+          <p:cNvSpPr>
+            <a:spLocks xmlns:a="http://schemas.openxmlformats.org/drawingml/2006/main" noGrp="1"/>
+          </p:cNvSpPr>
+          <p:nvPr/>
+        </p:nvSpPr>
+        <p:spPr>
+          <a:xfrm xmlns:a="http://schemas.openxmlformats.org/drawingml/2006/main">
+            <a:off x="1390650" y="1809750"/>
+            <a:ext cx="4057650" cy="295275"/>
+          </a:xfrm>
+          <a:prstGeom xmlns:a="http://schemas.openxmlformats.org/drawingml/2006/main" prst="rect">
+            <a:avLst/>
+          </a:prstGeom>
+          <a:noFill xmlns:a="http://schemas.openxmlformats.org/drawingml/2006/main"/>
+          <a:ln xmlns:a="http://schemas.openxmlformats.org/drawingml/2006/main" w="0">
+            <a:noFill/>
+            <a:prstDash val="solid"/>
+          </a:ln>
+        </p:spPr>
+        <p:txBody>
+          <a:bodyPr xmlns:a="http://schemas.openxmlformats.org/drawingml/2006/main" wrap="square" lIns="38100" tIns="19050" rIns="38100" bIns="19050" anchor="t">
+            <a:normAutofit/>
+          </a:bodyPr>
+          <a:lstStyle xmlns:a="http://schemas.openxmlformats.org/drawingml/2006/main"/>
+          <a:p xmlns:a="http://schemas.openxmlformats.org/drawingml/2006/main">
+            <a:pPr>
+              <a:buNone/>
+              <a:defRPr sz="1500" b="1">
+                <a:solidFill>
+                  <a:srgbClr val="102A43"/>
+                </a:solidFill>
+                <a:latin typeface="Calibri"/>
+                <a:ea typeface="Calibri"/>
+                <a:cs typeface="Calibri"/>
+              </a:defRPr>
+            </a:pPr>
+            <a:r>
+              <a:rPr sz="1500" b="1">
+                <a:solidFill>
+                  <a:srgbClr val="102A43"/>
+                </a:solidFill>
+                <a:latin typeface="Calibri"/>
+                <a:ea typeface="Calibri"/>
+                <a:cs typeface="Calibri"/>
+              </a:rPr>
+              <a:t>Bilateral stocks</a:t>
+            </a:r>
+          </a:p>
+        </p:txBody>
+      </p:sp>
+      <p:sp>
+        <p:nvSpPr>
+          <p:cNvPr id="22" name="chain1-detail">
+            <a:extLst xmlns:a="http://schemas.openxmlformats.org/drawingml/2006/main">
+              <a:ext uri="{FF2B5EF4-FFF2-40B4-BE49-F238E27FC236}">
+                <a16:creationId xmlns:a16="http://schemas.microsoft.com/office/drawing/2014/main" id="{933C28C5-8809-4DF4-B1BB-81303C6A8E77}"/>
+              </a:ext>
+            </a:extLst>
+          </p:cNvPr>
+          <p:cNvSpPr>
+            <a:spLocks xmlns:a="http://schemas.openxmlformats.org/drawingml/2006/main" noGrp="1"/>
+          </p:cNvSpPr>
+          <p:nvPr/>
+        </p:nvSpPr>
+        <p:spPr>
+          <a:xfrm xmlns:a="http://schemas.openxmlformats.org/drawingml/2006/main">
+            <a:off x="1390650" y="2105025"/>
+            <a:ext cx="4057650" cy="333375"/>
+          </a:xfrm>
+          <a:prstGeom xmlns:a="http://schemas.openxmlformats.org/drawingml/2006/main" prst="rect">
+            <a:avLst/>
+          </a:prstGeom>
+          <a:noFill xmlns:a="http://schemas.openxmlformats.org/drawingml/2006/main"/>
+          <a:ln xmlns:a="http://schemas.openxmlformats.org/drawingml/2006/main" w="0">
+            <a:noFill/>
+            <a:prstDash val="solid"/>
+          </a:ln>
+        </p:spPr>
+        <p:txBody>
+          <a:bodyPr xmlns:a="http://schemas.openxmlformats.org/drawingml/2006/main" wrap="square" lIns="38100" tIns="19050" rIns="38100" bIns="19050" anchor="t">
+            <a:normAutofit/>
+          </a:bodyPr>
+          <a:lstStyle xmlns:a="http://schemas.openxmlformats.org/drawingml/2006/main"/>
+          <a:p xmlns:a="http://schemas.openxmlformats.org/drawingml/2006/main">
+            <a:pPr>
+              <a:buNone/>
+              <a:defRPr sz="1200">
+                <a:solidFill>
+                  <a:srgbClr val="627D98"/>
+                </a:solidFill>
+                <a:latin typeface="Calibri"/>
+                <a:ea typeface="Calibri"/>
+                <a:cs typeface="Calibri"/>
+              </a:defRPr>
+            </a:pPr>
+            <a:r>
+              <a:rPr sz="1200">
+                <a:solidFill>
+                  <a:srgbClr val="627D98"/>
+                </a:solidFill>
+                <a:latin typeface="Calibri"/>
+                <a:ea typeface="Calibri"/>
+                <a:cs typeface="Calibri"/>
+              </a:rPr>
+              <a:t>FA / FWTW instrument matrices in dollars.</a:t>
+            </a:r>
+          </a:p>
+        </p:txBody>
+      </p:sp>
+      <p:sp>
+        <p:nvSpPr>
+          <p:cNvPr id="23" name="chain2-surface">
+            <a:extLst xmlns:a="http://schemas.openxmlformats.org/drawingml/2006/main">
+              <a:ext uri="{FF2B5EF4-FFF2-40B4-BE49-F238E27FC236}">
+                <a16:creationId xmlns:a16="http://schemas.microsoft.com/office/drawing/2014/main" id="{50DEB0E4-91BC-4313-B140-95CC3E8A3C29}"/>
+              </a:ext>
+            </a:extLst>
+          </p:cNvPr>
+          <p:cNvSpPr>
+            <a:spLocks xmlns:a="http://schemas.openxmlformats.org/drawingml/2006/main" noGrp="1"/>
+          </p:cNvSpPr>
+          <p:nvPr/>
+        </p:nvSpPr>
+        <p:spPr>
+          <a:xfrm xmlns:a="http://schemas.openxmlformats.org/drawingml/2006/main">
+            <a:off x="742950" y="2667000"/>
+            <a:ext cx="4857750" cy="857250"/>
+          </a:xfrm>
+          <a:prstGeom xmlns:a="http://schemas.openxmlformats.org/drawingml/2006/main" prst="roundRect">
+            <a:avLst>
+              <a:gd name="adj" fmla="val 10000"/>
+            </a:avLst>
+          </a:prstGeom>
+          <a:solidFill xmlns:a="http://schemas.openxmlformats.org/drawingml/2006/main">
+            <a:srgbClr val="FFFFFF"/>
+          </a:solidFill>
+          <a:ln xmlns:a="http://schemas.openxmlformats.org/drawingml/2006/main" w="9525">
+            <a:solidFill>
+              <a:srgbClr val="D8E1E8"/>
+            </a:solidFill>
+            <a:prstDash val="solid"/>
+          </a:ln>
+        </p:spPr>
+        <p:txBody>
+          <a:bodyPr xmlns:a="http://schemas.openxmlformats.org/drawingml/2006/main"/>
+          <a:lstStyle xmlns:a="http://schemas.openxmlformats.org/drawingml/2006/main"/>
+          <a:p xmlns:a="http://schemas.openxmlformats.org/drawingml/2006/main">
+            <a:endParaRPr/>
+          </a:p>
+        </p:txBody>
+      </p:sp>
+      <p:sp>
+        <p:nvSpPr>
+          <p:cNvPr id="24" name="chain2-number">
+            <a:extLst xmlns:a="http://schemas.openxmlformats.org/drawingml/2006/main">
+              <a:ext uri="{FF2B5EF4-FFF2-40B4-BE49-F238E27FC236}">
+                <a16:creationId xmlns:a16="http://schemas.microsoft.com/office/drawing/2014/main" id="{C73E0337-80A5-4B94-B771-70C0B3347F60}"/>
+              </a:ext>
+            </a:extLst>
+          </p:cNvPr>
+          <p:cNvSpPr>
+            <a:spLocks xmlns:a="http://schemas.openxmlformats.org/drawingml/2006/main" noGrp="1"/>
+          </p:cNvSpPr>
+          <p:nvPr/>
+        </p:nvSpPr>
+        <p:spPr>
+          <a:xfrm xmlns:a="http://schemas.openxmlformats.org/drawingml/2006/main">
+            <a:off x="895350" y="2819400"/>
+            <a:ext cx="361950" cy="361950"/>
+          </a:xfrm>
+          <a:prstGeom xmlns:a="http://schemas.openxmlformats.org/drawingml/2006/main" prst="ellipse">
+            <a:avLst/>
+          </a:prstGeom>
+          <a:solidFill xmlns:a="http://schemas.openxmlformats.org/drawingml/2006/main">
+            <a:srgbClr val="C65D16"/>
+          </a:solidFill>
+          <a:ln xmlns:a="http://schemas.openxmlformats.org/drawingml/2006/main" w="0">
+            <a:solidFill>
+              <a:srgbClr val="C65D16"/>
+            </a:solidFill>
+            <a:prstDash val="solid"/>
+          </a:ln>
+        </p:spPr>
+        <p:txBody>
+          <a:bodyPr xmlns:a="http://schemas.openxmlformats.org/drawingml/2006/main" wrap="square" lIns="0" tIns="0" rIns="0" bIns="0" anchor="ctr">
+            <a:normAutofit/>
+          </a:bodyPr>
+          <a:lstStyle xmlns:a="http://schemas.openxmlformats.org/drawingml/2006/main"/>
+          <a:p xmlns:a="http://schemas.openxmlformats.org/drawingml/2006/main">
+            <a:pPr algn="ctr">
+              <a:buNone/>
+              <a:defRPr sz="1350" b="1">
+                <a:solidFill>
+                  <a:srgbClr val="FFFFFF"/>
+                </a:solidFill>
+                <a:latin typeface="Calibri"/>
+                <a:ea typeface="Calibri"/>
+                <a:cs typeface="Calibri"/>
+              </a:defRPr>
+            </a:pPr>
+            <a:r>
+              <a:rPr sz="1350" b="1">
+                <a:solidFill>
+                  <a:srgbClr val="FFFFFF"/>
+                </a:solidFill>
+                <a:latin typeface="Calibri"/>
+                <a:ea typeface="Calibri"/>
+                <a:cs typeface="Calibri"/>
+              </a:rPr>
+              <a:t>2</a:t>
+            </a:r>
+          </a:p>
+        </p:txBody>
+      </p:sp>
+      <p:sp>
+        <p:nvSpPr>
+          <p:cNvPr id="25" name="chain2-title">
+            <a:extLst xmlns:a="http://schemas.openxmlformats.org/drawingml/2006/main">
+              <a:ext uri="{FF2B5EF4-FFF2-40B4-BE49-F238E27FC236}">
+                <a16:creationId xmlns:a16="http://schemas.microsoft.com/office/drawing/2014/main" id="{7DE4D70E-A8DE-49DE-991D-30180DB6FAA3}"/>
+              </a:ext>
+            </a:extLst>
+          </p:cNvPr>
+          <p:cNvSpPr>
+            <a:spLocks xmlns:a="http://schemas.openxmlformats.org/drawingml/2006/main" noGrp="1"/>
+          </p:cNvSpPr>
+          <p:nvPr/>
+        </p:nvSpPr>
+        <p:spPr>
+          <a:xfrm xmlns:a="http://schemas.openxmlformats.org/drawingml/2006/main">
+            <a:off x="1390650" y="2800350"/>
+            <a:ext cx="4057650" cy="295275"/>
+          </a:xfrm>
+          <a:prstGeom xmlns:a="http://schemas.openxmlformats.org/drawingml/2006/main" prst="rect">
+            <a:avLst/>
+          </a:prstGeom>
+          <a:noFill xmlns:a="http://schemas.openxmlformats.org/drawingml/2006/main"/>
+          <a:ln xmlns:a="http://schemas.openxmlformats.org/drawingml/2006/main" w="0">
+            <a:noFill/>
+            <a:prstDash val="solid"/>
+          </a:ln>
+        </p:spPr>
+        <p:txBody>
+          <a:bodyPr xmlns:a="http://schemas.openxmlformats.org/drawingml/2006/main" wrap="square" lIns="38100" tIns="19050" rIns="38100" bIns="19050" anchor="t">
+            <a:normAutofit/>
+          </a:bodyPr>
+          <a:lstStyle xmlns:a="http://schemas.openxmlformats.org/drawingml/2006/main"/>
+          <a:p xmlns:a="http://schemas.openxmlformats.org/drawingml/2006/main">
+            <a:pPr>
+              <a:buNone/>
+              <a:defRPr sz="1500" b="1">
+                <a:solidFill>
+                  <a:srgbClr val="102A43"/>
+                </a:solidFill>
+                <a:latin typeface="Calibri"/>
+                <a:ea typeface="Calibri"/>
+                <a:cs typeface="Calibri"/>
+              </a:defRPr>
+            </a:pPr>
+            <a:r>
+              <a:rPr sz="1500" b="1">
+                <a:solidFill>
+                  <a:srgbClr val="102A43"/>
+                </a:solidFill>
+                <a:latin typeface="Calibri"/>
+                <a:ea typeface="Calibri"/>
+                <a:cs typeface="Calibri"/>
+              </a:rPr>
+              <a:t>Direct shares</a:t>
+            </a:r>
+          </a:p>
+        </p:txBody>
+      </p:sp>
+      <p:sp>
+        <p:nvSpPr>
+          <p:cNvPr id="26" name="chain2-detail">
+            <a:extLst xmlns:a="http://schemas.openxmlformats.org/drawingml/2006/main">
+              <a:ext uri="{FF2B5EF4-FFF2-40B4-BE49-F238E27FC236}">
+                <a16:creationId xmlns:a16="http://schemas.microsoft.com/office/drawing/2014/main" id="{7394F462-3B0F-47D3-85C8-36323FB73432}"/>
+              </a:ext>
+            </a:extLst>
+          </p:cNvPr>
+          <p:cNvSpPr>
+            <a:spLocks xmlns:a="http://schemas.openxmlformats.org/drawingml/2006/main" noGrp="1"/>
+          </p:cNvSpPr>
+          <p:nvPr/>
+        </p:nvSpPr>
+        <p:spPr>
+          <a:xfrm xmlns:a="http://schemas.openxmlformats.org/drawingml/2006/main">
+            <a:off x="1390650" y="3095625"/>
+            <a:ext cx="4057650" cy="333375"/>
+          </a:xfrm>
+          <a:prstGeom xmlns:a="http://schemas.openxmlformats.org/drawingml/2006/main" prst="rect">
+            <a:avLst/>
+          </a:prstGeom>
+          <a:noFill xmlns:a="http://schemas.openxmlformats.org/drawingml/2006/main"/>
+          <a:ln xmlns:a="http://schemas.openxmlformats.org/drawingml/2006/main" w="0">
+            <a:noFill/>
+            <a:prstDash val="solid"/>
+          </a:ln>
+        </p:spPr>
+        <p:txBody>
+          <a:bodyPr xmlns:a="http://schemas.openxmlformats.org/drawingml/2006/main" wrap="square" lIns="38100" tIns="19050" rIns="38100" bIns="19050" anchor="t">
+            <a:normAutofit/>
+          </a:bodyPr>
+          <a:lstStyle xmlns:a="http://schemas.openxmlformats.org/drawingml/2006/main"/>
+          <a:p xmlns:a="http://schemas.openxmlformats.org/drawingml/2006/main">
+            <a:pPr>
+              <a:buNone/>
+              <a:defRPr sz="1200">
+                <a:solidFill>
+                  <a:srgbClr val="627D98"/>
+                </a:solidFill>
+                <a:latin typeface="Calibri"/>
+                <a:ea typeface="Calibri"/>
+                <a:cs typeface="Calibri"/>
+              </a:defRPr>
+            </a:pPr>
+            <a:r>
+              <a:rPr sz="1200">
+                <a:solidFill>
+                  <a:srgbClr val="627D98"/>
+                </a:solidFill>
+                <a:latin typeface="Calibri"/>
+                <a:ea typeface="Calibri"/>
+                <a:cs typeface="Calibri"/>
+              </a:rPr>
+              <a:t>Balance cells and row-normalize by issuer.</a:t>
+            </a:r>
+          </a:p>
+        </p:txBody>
+      </p:sp>
+      <p:sp>
+        <p:nvSpPr>
+          <p:cNvPr id="27" name="chain3-surface">
+            <a:extLst xmlns:a="http://schemas.openxmlformats.org/drawingml/2006/main">
+              <a:ext uri="{FF2B5EF4-FFF2-40B4-BE49-F238E27FC236}">
+                <a16:creationId xmlns:a16="http://schemas.microsoft.com/office/drawing/2014/main" id="{900FA293-2F76-44AC-AE6E-A3C8ABE61EF0}"/>
+              </a:ext>
+            </a:extLst>
+          </p:cNvPr>
+          <p:cNvSpPr>
+            <a:spLocks xmlns:a="http://schemas.openxmlformats.org/drawingml/2006/main" noGrp="1"/>
+          </p:cNvSpPr>
+          <p:nvPr/>
+        </p:nvSpPr>
+        <p:spPr>
+          <a:xfrm xmlns:a="http://schemas.openxmlformats.org/drawingml/2006/main">
+            <a:off x="742950" y="3657600"/>
+            <a:ext cx="4857750" cy="857250"/>
+          </a:xfrm>
+          <a:prstGeom xmlns:a="http://schemas.openxmlformats.org/drawingml/2006/main" prst="roundRect">
+            <a:avLst>
+              <a:gd name="adj" fmla="val 10000"/>
+            </a:avLst>
+          </a:prstGeom>
+          <a:solidFill xmlns:a="http://schemas.openxmlformats.org/drawingml/2006/main">
+            <a:srgbClr val="FFFFFF"/>
+          </a:solidFill>
+          <a:ln xmlns:a="http://schemas.openxmlformats.org/drawingml/2006/main" w="9525">
+            <a:solidFill>
+              <a:srgbClr val="D8E1E8"/>
+            </a:solidFill>
+            <a:prstDash val="solid"/>
+          </a:ln>
+        </p:spPr>
+        <p:txBody>
+          <a:bodyPr xmlns:a="http://schemas.openxmlformats.org/drawingml/2006/main"/>
+          <a:lstStyle xmlns:a="http://schemas.openxmlformats.org/drawingml/2006/main"/>
+          <a:p xmlns:a="http://schemas.openxmlformats.org/drawingml/2006/main">
+            <a:endParaRPr/>
+          </a:p>
+        </p:txBody>
+      </p:sp>
+      <p:sp>
+        <p:nvSpPr>
+          <p:cNvPr id="28" name="chain3-number">
+            <a:extLst xmlns:a="http://schemas.openxmlformats.org/drawingml/2006/main">
+              <a:ext uri="{FF2B5EF4-FFF2-40B4-BE49-F238E27FC236}">
+                <a16:creationId xmlns:a16="http://schemas.microsoft.com/office/drawing/2014/main" id="{FE41CF9B-CD86-492C-9BF6-E9B8EC9433F6}"/>
+              </a:ext>
+            </a:extLst>
+          </p:cNvPr>
+          <p:cNvSpPr>
+            <a:spLocks xmlns:a="http://schemas.openxmlformats.org/drawingml/2006/main" noGrp="1"/>
+          </p:cNvSpPr>
+          <p:nvPr/>
+        </p:nvSpPr>
+        <p:spPr>
+          <a:xfrm xmlns:a="http://schemas.openxmlformats.org/drawingml/2006/main">
+            <a:off x="895350" y="3810000"/>
+            <a:ext cx="361950" cy="361950"/>
+          </a:xfrm>
+          <a:prstGeom xmlns:a="http://schemas.openxmlformats.org/drawingml/2006/main" prst="ellipse">
+            <a:avLst/>
+          </a:prstGeom>
+          <a:solidFill xmlns:a="http://schemas.openxmlformats.org/drawingml/2006/main">
+            <a:srgbClr val="2A7F7F"/>
+          </a:solidFill>
+          <a:ln xmlns:a="http://schemas.openxmlformats.org/drawingml/2006/main" w="0">
+            <a:solidFill>
+              <a:srgbClr val="2A7F7F"/>
+            </a:solidFill>
+            <a:prstDash val="solid"/>
+          </a:ln>
+        </p:spPr>
+        <p:txBody>
+          <a:bodyPr xmlns:a="http://schemas.openxmlformats.org/drawingml/2006/main" wrap="square" lIns="0" tIns="0" rIns="0" bIns="0" anchor="ctr">
+            <a:normAutofit/>
+          </a:bodyPr>
+          <a:lstStyle xmlns:a="http://schemas.openxmlformats.org/drawingml/2006/main"/>
+          <a:p xmlns:a="http://schemas.openxmlformats.org/drawingml/2006/main">
+            <a:pPr algn="ctr">
+              <a:buNone/>
+              <a:defRPr sz="1350" b="1">
+                <a:solidFill>
+                  <a:srgbClr val="FFFFFF"/>
+                </a:solidFill>
+                <a:latin typeface="Calibri"/>
+                <a:ea typeface="Calibri"/>
+                <a:cs typeface="Calibri"/>
+              </a:defRPr>
+            </a:pPr>
+            <a:r>
+              <a:rPr sz="1350" b="1">
+                <a:solidFill>
+                  <a:srgbClr val="FFFFFF"/>
+                </a:solidFill>
+                <a:latin typeface="Calibri"/>
+                <a:ea typeface="Calibri"/>
+                <a:cs typeface="Calibri"/>
+              </a:rPr>
+              <a:t>3</a:t>
+            </a:r>
+          </a:p>
+        </p:txBody>
+      </p:sp>
+      <p:sp>
+        <p:nvSpPr>
+          <p:cNvPr id="29" name="chain3-title">
+            <a:extLst xmlns:a="http://schemas.openxmlformats.org/drawingml/2006/main">
+              <a:ext uri="{FF2B5EF4-FFF2-40B4-BE49-F238E27FC236}">
+                <a16:creationId xmlns:a16="http://schemas.microsoft.com/office/drawing/2014/main" id="{F5BCD9C5-DAB3-4E7E-968A-CB4D975ADAEF}"/>
+              </a:ext>
+            </a:extLst>
+          </p:cNvPr>
+          <p:cNvSpPr>
+            <a:spLocks xmlns:a="http://schemas.openxmlformats.org/drawingml/2006/main" noGrp="1"/>
+          </p:cNvSpPr>
+          <p:nvPr/>
+        </p:nvSpPr>
+        <p:spPr>
+          <a:xfrm xmlns:a="http://schemas.openxmlformats.org/drawingml/2006/main">
+            <a:off x="1390650" y="3790950"/>
+            <a:ext cx="4057650" cy="295275"/>
+          </a:xfrm>
+          <a:prstGeom xmlns:a="http://schemas.openxmlformats.org/drawingml/2006/main" prst="rect">
+            <a:avLst/>
+          </a:prstGeom>
+          <a:noFill xmlns:a="http://schemas.openxmlformats.org/drawingml/2006/main"/>
+          <a:ln xmlns:a="http://schemas.openxmlformats.org/drawingml/2006/main" w="0">
+            <a:noFill/>
+            <a:prstDash val="solid"/>
+          </a:ln>
+        </p:spPr>
+        <p:txBody>
+          <a:bodyPr xmlns:a="http://schemas.openxmlformats.org/drawingml/2006/main" wrap="square" lIns="38100" tIns="19050" rIns="38100" bIns="19050" anchor="t">
+            <a:normAutofit/>
+          </a:bodyPr>
+          <a:lstStyle xmlns:a="http://schemas.openxmlformats.org/drawingml/2006/main"/>
+          <a:p xmlns:a="http://schemas.openxmlformats.org/drawingml/2006/main">
+            <a:pPr>
+              <a:buNone/>
+              <a:defRPr sz="1500" b="1">
+                <a:solidFill>
+                  <a:srgbClr val="102A43"/>
+                </a:solidFill>
+                <a:latin typeface="Calibri"/>
+                <a:ea typeface="Calibri"/>
+                <a:cs typeface="Calibri"/>
+              </a:defRPr>
+            </a:pPr>
+            <a:r>
+              <a:rPr sz="1500" b="1">
+                <a:solidFill>
+                  <a:srgbClr val="102A43"/>
+                </a:solidFill>
+                <a:latin typeface="Calibri"/>
+                <a:ea typeface="Calibri"/>
+                <a:cs typeface="Calibri"/>
+              </a:rPr>
+              <a:t>Ultimate ownership</a:t>
+            </a:r>
+          </a:p>
+        </p:txBody>
+      </p:sp>
+      <p:sp>
+        <p:nvSpPr>
+          <p:cNvPr id="30" name="chain3-detail">
+            <a:extLst xmlns:a="http://schemas.openxmlformats.org/drawingml/2006/main">
+              <a:ext uri="{FF2B5EF4-FFF2-40B4-BE49-F238E27FC236}">
+                <a16:creationId xmlns:a16="http://schemas.microsoft.com/office/drawing/2014/main" id="{5D84456C-2F09-4F9B-89ED-56E6B0128F34}"/>
+              </a:ext>
+            </a:extLst>
+          </p:cNvPr>
+          <p:cNvSpPr>
+            <a:spLocks xmlns:a="http://schemas.openxmlformats.org/drawingml/2006/main" noGrp="1"/>
+          </p:cNvSpPr>
+          <p:nvPr/>
+        </p:nvSpPr>
+        <p:spPr>
+          <a:xfrm xmlns:a="http://schemas.openxmlformats.org/drawingml/2006/main">
+            <a:off x="1390650" y="4086225"/>
+            <a:ext cx="4057650" cy="333375"/>
+          </a:xfrm>
+          <a:prstGeom xmlns:a="http://schemas.openxmlformats.org/drawingml/2006/main" prst="rect">
+            <a:avLst/>
+          </a:prstGeom>
+          <a:noFill xmlns:a="http://schemas.openxmlformats.org/drawingml/2006/main"/>
+          <a:ln xmlns:a="http://schemas.openxmlformats.org/drawingml/2006/main" w="0">
+            <a:noFill/>
+            <a:prstDash val="solid"/>
+          </a:ln>
+        </p:spPr>
+        <p:txBody>
+          <a:bodyPr xmlns:a="http://schemas.openxmlformats.org/drawingml/2006/main" wrap="square" lIns="38100" tIns="19050" rIns="38100" bIns="19050" anchor="t">
+            <a:normAutofit/>
+          </a:bodyPr>
+          <a:lstStyle xmlns:a="http://schemas.openxmlformats.org/drawingml/2006/main"/>
+          <a:p xmlns:a="http://schemas.openxmlformats.org/drawingml/2006/main">
+            <a:pPr>
+              <a:buNone/>
+              <a:defRPr sz="1200">
+                <a:solidFill>
+                  <a:srgbClr val="627D98"/>
+                </a:solidFill>
+                <a:latin typeface="Calibri"/>
+                <a:ea typeface="Calibri"/>
+                <a:cs typeface="Calibri"/>
+              </a:defRPr>
+            </a:pPr>
+            <a:r>
+              <a:rPr sz="1200">
+                <a:solidFill>
+                  <a:srgbClr val="627D98"/>
+                </a:solidFill>
+                <a:latin typeface="Calibri"/>
+                <a:ea typeface="Calibri"/>
+                <a:cs typeface="Calibri"/>
+              </a:rPr>
+              <a:t>Apply the Leontief solve and cohort split.</a:t>
+            </a:r>
+          </a:p>
+        </p:txBody>
+      </p:sp>
+      <p:sp>
+        <p:nvSpPr>
+          <p:cNvPr id="31" name="chain4-surface">
+            <a:extLst xmlns:a="http://schemas.openxmlformats.org/drawingml/2006/main">
+              <a:ext uri="{FF2B5EF4-FFF2-40B4-BE49-F238E27FC236}">
+                <a16:creationId xmlns:a16="http://schemas.microsoft.com/office/drawing/2014/main" id="{D6604C4C-14D6-4211-9C61-88016E3BE3B8}"/>
+              </a:ext>
+            </a:extLst>
+          </p:cNvPr>
+          <p:cNvSpPr>
+            <a:spLocks xmlns:a="http://schemas.openxmlformats.org/drawingml/2006/main" noGrp="1"/>
+          </p:cNvSpPr>
+          <p:nvPr/>
+        </p:nvSpPr>
+        <p:spPr>
+          <a:xfrm xmlns:a="http://schemas.openxmlformats.org/drawingml/2006/main">
+            <a:off x="6667500" y="1981200"/>
+            <a:ext cx="4429125" cy="1009650"/>
+          </a:xfrm>
+          <a:prstGeom xmlns:a="http://schemas.openxmlformats.org/drawingml/2006/main" prst="roundRect">
+            <a:avLst>
+              <a:gd name="adj" fmla="val 8491"/>
+            </a:avLst>
+          </a:prstGeom>
+          <a:solidFill xmlns:a="http://schemas.openxmlformats.org/drawingml/2006/main">
+            <a:srgbClr val="FFFFFF"/>
+          </a:solidFill>
+          <a:ln xmlns:a="http://schemas.openxmlformats.org/drawingml/2006/main" w="9525">
+            <a:solidFill>
+              <a:srgbClr val="D8E1E8"/>
+            </a:solidFill>
+            <a:prstDash val="solid"/>
+          </a:ln>
+        </p:spPr>
+        <p:txBody>
+          <a:bodyPr xmlns:a="http://schemas.openxmlformats.org/drawingml/2006/main"/>
+          <a:lstStyle xmlns:a="http://schemas.openxmlformats.org/drawingml/2006/main"/>
+          <a:p xmlns:a="http://schemas.openxmlformats.org/drawingml/2006/main">
+            <a:endParaRPr/>
+          </a:p>
+        </p:txBody>
       </p:sp>
       <p:sp>
         <p:nvSpPr>
@@ -6843,11 +8799,12 @@
         </p:spPr>
         <p:txBody>
           <a:bodyPr xmlns:a="http://schemas.openxmlformats.org/drawingml/2006/main" wrap="square" lIns="0" tIns="0" rIns="0" bIns="0" anchor="ctr">
-            <a:normAutofit fontScale="100000"/>
+            <a:normAutofit/>
           </a:bodyPr>
           <a:lstStyle xmlns:a="http://schemas.openxmlformats.org/drawingml/2006/main"/>
           <a:p xmlns:a="http://schemas.openxmlformats.org/drawingml/2006/main">
             <a:pPr algn="ctr">
+              <a:buNone/>
               <a:defRPr sz="1350" b="1">
                 <a:solidFill>
                   <a:srgbClr val="FFFFFF"/>
@@ -6901,11 +8858,12 @@
         </p:spPr>
         <p:txBody>
           <a:bodyPr xmlns:a="http://schemas.openxmlformats.org/drawingml/2006/main" wrap="square" lIns="38100" tIns="19050" rIns="38100" bIns="19050" anchor="t">
-            <a:normAutofit fontScale="100000"/>
+            <a:normAutofit/>
           </a:bodyPr>
           <a:lstStyle xmlns:a="http://schemas.openxmlformats.org/drawingml/2006/main"/>
           <a:p xmlns:a="http://schemas.openxmlformats.org/drawingml/2006/main">
             <a:pPr>
+              <a:buNone/>
               <a:defRPr sz="1500" b="1">
                 <a:solidFill>
                   <a:srgbClr val="102A43"/>
@@ -6959,11 +8917,12 @@
         </p:spPr>
         <p:txBody>
           <a:bodyPr xmlns:a="http://schemas.openxmlformats.org/drawingml/2006/main" wrap="square" lIns="38100" tIns="19050" rIns="38100" bIns="19050" anchor="t">
-            <a:normAutofit fontScale="100000"/>
+            <a:normAutofit/>
           </a:bodyPr>
           <a:lstStyle xmlns:a="http://schemas.openxmlformats.org/drawingml/2006/main"/>
           <a:p xmlns:a="http://schemas.openxmlformats.org/drawingml/2006/main">
             <a:pPr>
+              <a:buNone/>
               <a:defRPr sz="1200">
                 <a:solidFill>
                   <a:srgbClr val="627D98"/>
@@ -7017,7 +8976,7 @@
         </p:spPr>
         <p:txBody>
           <a:bodyPr xmlns:a="http://schemas.openxmlformats.org/drawingml/2006/main" wrap="square" lIns="38100" tIns="38100" rIns="76200" bIns="38100" anchor="t">
-            <a:normAutofit fontScale="100000"/>
+            <a:normAutofit/>
           </a:bodyPr>
           <a:lstStyle xmlns:a="http://schemas.openxmlformats.org/drawingml/2006/main"/>
           <a:p xmlns:a="http://schemas.openxmlformats.org/drawingml/2006/main">
@@ -7254,7 +9213,7 @@
         </p:spPr>
         <p:txBody>
           <a:bodyPr xmlns:a="http://schemas.openxmlformats.org/drawingml/2006/main" wrap="none" lIns="0" tIns="0" rIns="0" bIns="0" anchor="ctr">
-            <a:normAutofit fontScale="100000"/>
+            <a:normAutofit/>
           </a:bodyPr>
           <a:lstStyle xmlns:a="http://schemas.openxmlformats.org/drawingml/2006/main"/>
           <a:p xmlns:a="http://schemas.openxmlformats.org/drawingml/2006/main">
@@ -7315,6 +9274,13 @@
             <a:prstDash val="solid"/>
           </a:ln>
         </p:spPr>
+        <p:txBody>
+          <a:bodyPr xmlns:a="http://schemas.openxmlformats.org/drawingml/2006/main"/>
+          <a:lstStyle xmlns:a="http://schemas.openxmlformats.org/drawingml/2006/main"/>
+          <a:p xmlns:a="http://schemas.openxmlformats.org/drawingml/2006/main">
+            <a:endParaRPr/>
+          </a:p>
+        </p:txBody>
       </p:sp>
       <p:sp>
         <p:nvSpPr>
@@ -7346,7 +9312,7 @@
         </p:spPr>
         <p:txBody>
           <a:bodyPr xmlns:a="http://schemas.openxmlformats.org/drawingml/2006/main" wrap="square" lIns="38100" tIns="19050" rIns="38100" bIns="19050" anchor="t">
-            <a:normAutofit fontScale="100000"/>
+            <a:normAutofit/>
           </a:bodyPr>
           <a:lstStyle xmlns:a="http://schemas.openxmlformats.org/drawingml/2006/main"/>
           <a:p xmlns:a="http://schemas.openxmlformats.org/drawingml/2006/main">
@@ -7405,7 +9371,7 @@
         </p:spPr>
         <p:txBody>
           <a:bodyPr xmlns:a="http://schemas.openxmlformats.org/drawingml/2006/main" wrap="square" lIns="38100" tIns="19050" rIns="38100" bIns="19050" anchor="t">
-            <a:normAutofit fontScale="100000"/>
+            <a:normAutofit/>
           </a:bodyPr>
           <a:lstStyle xmlns:a="http://schemas.openxmlformats.org/drawingml/2006/main"/>
           <a:p xmlns:a="http://schemas.openxmlformats.org/drawingml/2006/main">
@@ -7464,7 +9430,7 @@
         </p:spPr>
         <p:txBody>
           <a:bodyPr xmlns:a="http://schemas.openxmlformats.org/drawingml/2006/main" wrap="square" lIns="38100" tIns="19050" rIns="38100" bIns="19050" anchor="t">
-            <a:normAutofit fontScale="100000"/>
+            <a:normAutofit/>
           </a:bodyPr>
           <a:lstStyle xmlns:a="http://schemas.openxmlformats.org/drawingml/2006/main"/>
           <a:p xmlns:a="http://schemas.openxmlformats.org/drawingml/2006/main">
@@ -7527,17 +9493,24 @@
             <a:prstDash val="solid"/>
           </a:ln>
         </p:spPr>
+        <p:txBody>
+          <a:bodyPr xmlns:a="http://schemas.openxmlformats.org/drawingml/2006/main"/>
+          <a:lstStyle xmlns:a="http://schemas.openxmlformats.org/drawingml/2006/main"/>
+          <a:p xmlns:a="http://schemas.openxmlformats.org/drawingml/2006/main">
+            <a:endParaRPr/>
+          </a:p>
+        </p:txBody>
       </p:sp>
       <p:pic>
         <p:nvPicPr>
-          <p:cNvPr id="34" name=""/>
+          <p:cNvPr id="36" name="Picture 33"/>
           <p:cNvPicPr>
             <a:picLocks xmlns:a="http://schemas.openxmlformats.org/drawingml/2006/main" noChangeAspect="1"/>
           </p:cNvPicPr>
           <p:nvPr/>
         </p:nvPicPr>
         <p:blipFill>
-          <a:blip xmlns:r="http://schemas.openxmlformats.org/officeDocument/2006/relationships" xmlns:a="http://schemas.openxmlformats.org/drawingml/2006/main" r:embed="Rc2fc7ea64f304060"/>
+          <a:blip xmlns:r="http://schemas.openxmlformats.org/officeDocument/2006/relationships" xmlns:a="http://schemas.openxmlformats.org/drawingml/2006/main" r:embed="R3d9e5997cdb441de"/>
           <a:stretch xmlns:a="http://schemas.openxmlformats.org/drawingml/2006/main"/>
         </p:blipFill>
         <p:spPr>
@@ -7584,17 +9557,24 @@
             <a:prstDash val="solid"/>
           </a:ln>
         </p:spPr>
+        <p:txBody>
+          <a:bodyPr xmlns:a="http://schemas.openxmlformats.org/drawingml/2006/main"/>
+          <a:lstStyle xmlns:a="http://schemas.openxmlformats.org/drawingml/2006/main"/>
+          <a:p xmlns:a="http://schemas.openxmlformats.org/drawingml/2006/main">
+            <a:endParaRPr/>
+          </a:p>
+        </p:txBody>
       </p:sp>
       <p:pic>
         <p:nvPicPr>
-          <p:cNvPr id="36" name=""/>
+          <p:cNvPr id="38" name="Picture 35"/>
           <p:cNvPicPr>
             <a:picLocks xmlns:a="http://schemas.openxmlformats.org/drawingml/2006/main" noChangeAspect="1"/>
           </p:cNvPicPr>
           <p:nvPr/>
         </p:nvPicPr>
         <p:blipFill>
-          <a:blip xmlns:r="http://schemas.openxmlformats.org/officeDocument/2006/relationships" xmlns:a="http://schemas.openxmlformats.org/drawingml/2006/main" r:embed="R38ecdbc43e7941a0"/>
+          <a:blip xmlns:r="http://schemas.openxmlformats.org/officeDocument/2006/relationships" xmlns:a="http://schemas.openxmlformats.org/drawingml/2006/main" r:embed="R3d9e5997cdb441de"/>
           <a:stretch xmlns:a="http://schemas.openxmlformats.org/drawingml/2006/main"/>
         </p:blipFill>
         <p:spPr>
@@ -7641,6 +9621,13 @@
             <a:prstDash val="solid"/>
           </a:ln>
         </p:spPr>
+        <p:txBody>
+          <a:bodyPr xmlns:a="http://schemas.openxmlformats.org/drawingml/2006/main"/>
+          <a:lstStyle xmlns:a="http://schemas.openxmlformats.org/drawingml/2006/main"/>
+          <a:p xmlns:a="http://schemas.openxmlformats.org/drawingml/2006/main">
+            <a:endParaRPr/>
+          </a:p>
+        </p:txBody>
       </p:sp>
       <p:sp>
         <p:nvSpPr>
@@ -7674,6 +9661,13 @@
             <a:prstDash val="solid"/>
           </a:ln>
         </p:spPr>
+        <p:txBody>
+          <a:bodyPr xmlns:a="http://schemas.openxmlformats.org/drawingml/2006/main"/>
+          <a:lstStyle xmlns:a="http://schemas.openxmlformats.org/drawingml/2006/main"/>
+          <a:p xmlns:a="http://schemas.openxmlformats.org/drawingml/2006/main">
+            <a:endParaRPr/>
+          </a:p>
+        </p:txBody>
       </p:sp>
       <p:sp>
         <p:nvSpPr>
@@ -7764,7 +9758,7 @@
         </p:spPr>
         <p:txBody>
           <a:bodyPr xmlns:a="http://schemas.openxmlformats.org/drawingml/2006/main" wrap="square" lIns="38100" tIns="38100" rIns="38100" bIns="38100" anchor="ctr">
-            <a:normAutofit fontScale="100000"/>
+            <a:normAutofit/>
           </a:bodyPr>
           <a:lstStyle xmlns:a="http://schemas.openxmlformats.org/drawingml/2006/main"/>
           <a:p xmlns:a="http://schemas.openxmlformats.org/drawingml/2006/main">
@@ -7823,7 +9817,7 @@
         </p:spPr>
         <p:txBody>
           <a:bodyPr xmlns:a="http://schemas.openxmlformats.org/drawingml/2006/main" wrap="none" lIns="0" tIns="0" rIns="0" bIns="0" anchor="ctr">
-            <a:normAutofit fontScale="100000"/>
+            <a:normAutofit/>
           </a:bodyPr>
           <a:lstStyle xmlns:a="http://schemas.openxmlformats.org/drawingml/2006/main"/>
           <a:p xmlns:a="http://schemas.openxmlformats.org/drawingml/2006/main">
@@ -7888,11 +9882,12 @@
         </p:spPr>
         <p:txBody>
           <a:bodyPr xmlns:a="http://schemas.openxmlformats.org/drawingml/2006/main" wrap="square" lIns="38100" tIns="9525" rIns="38100" bIns="9525" anchor="ctr">
-            <a:normAutofit fontScale="100000"/>
+            <a:normAutofit/>
           </a:bodyPr>
           <a:lstStyle xmlns:a="http://schemas.openxmlformats.org/drawingml/2006/main"/>
           <a:p xmlns:a="http://schemas.openxmlformats.org/drawingml/2006/main">
             <a:pPr algn="ctr">
+              <a:buNone/>
               <a:defRPr sz="975" b="1">
                 <a:solidFill>
                   <a:srgbClr val="FFFFFF"/>
@@ -7946,11 +9941,12 @@
         </p:spPr>
         <p:txBody>
           <a:bodyPr xmlns:a="http://schemas.openxmlformats.org/drawingml/2006/main" wrap="square" lIns="38100" tIns="19050" rIns="38100" bIns="19050" anchor="t">
-            <a:normAutofit fontScale="100000"/>
+            <a:normAutofit/>
           </a:bodyPr>
           <a:lstStyle xmlns:a="http://schemas.openxmlformats.org/drawingml/2006/main"/>
           <a:p xmlns:a="http://schemas.openxmlformats.org/drawingml/2006/main">
             <a:pPr algn="ctr">
+              <a:buNone/>
               <a:defRPr sz="1725" b="1">
                 <a:solidFill>
                   <a:srgbClr val="102A43"/>
@@ -8004,11 +10000,12 @@
         </p:spPr>
         <p:txBody>
           <a:bodyPr xmlns:a="http://schemas.openxmlformats.org/drawingml/2006/main" wrap="square" lIns="38100" tIns="19050" rIns="38100" bIns="19050" anchor="t">
-            <a:normAutofit fontScale="100000"/>
+            <a:normAutofit/>
           </a:bodyPr>
           <a:lstStyle xmlns:a="http://schemas.openxmlformats.org/drawingml/2006/main"/>
           <a:p xmlns:a="http://schemas.openxmlformats.org/drawingml/2006/main">
             <a:pPr algn="ctr">
+              <a:buNone/>
               <a:defRPr sz="1500">
                 <a:solidFill>
                   <a:srgbClr val="2E5B88"/>
@@ -8068,11 +10065,12 @@
         </p:spPr>
         <p:txBody>
           <a:bodyPr xmlns:a="http://schemas.openxmlformats.org/drawingml/2006/main" wrap="square" lIns="38100" tIns="9525" rIns="38100" bIns="9525" anchor="ctr">
-            <a:normAutofit fontScale="100000"/>
+            <a:normAutofit/>
           </a:bodyPr>
           <a:lstStyle xmlns:a="http://schemas.openxmlformats.org/drawingml/2006/main"/>
           <a:p xmlns:a="http://schemas.openxmlformats.org/drawingml/2006/main">
             <a:pPr algn="ctr">
+              <a:buNone/>
               <a:defRPr sz="975" b="1">
                 <a:solidFill>
                   <a:srgbClr val="FFFFFF"/>
@@ -8126,11 +10124,12 @@
         </p:spPr>
         <p:txBody>
           <a:bodyPr xmlns:a="http://schemas.openxmlformats.org/drawingml/2006/main" wrap="square" lIns="38100" tIns="19050" rIns="38100" bIns="19050" anchor="t">
-            <a:normAutofit fontScale="100000"/>
+            <a:normAutofit/>
           </a:bodyPr>
           <a:lstStyle xmlns:a="http://schemas.openxmlformats.org/drawingml/2006/main"/>
           <a:p xmlns:a="http://schemas.openxmlformats.org/drawingml/2006/main">
             <a:pPr algn="ctr">
+              <a:buNone/>
               <a:defRPr sz="1575" b="1">
                 <a:solidFill>
                   <a:srgbClr val="102A43"/>
@@ -8184,6 +10183,13 @@
             <a:prstDash val="solid"/>
           </a:ln>
         </p:spPr>
+        <p:txBody>
+          <a:bodyPr xmlns:a="http://schemas.openxmlformats.org/drawingml/2006/main"/>
+          <a:lstStyle xmlns:a="http://schemas.openxmlformats.org/drawingml/2006/main"/>
+          <a:p xmlns:a="http://schemas.openxmlformats.org/drawingml/2006/main">
+            <a:endParaRPr/>
+          </a:p>
+        </p:txBody>
       </p:sp>
       <p:sp>
         <p:nvSpPr>
@@ -8221,11 +10227,12 @@
         </p:spPr>
         <p:txBody>
           <a:bodyPr xmlns:a="http://schemas.openxmlformats.org/drawingml/2006/main" wrap="square" lIns="38100" tIns="9525" rIns="38100" bIns="9525" anchor="ctr">
-            <a:normAutofit fontScale="100000"/>
+            <a:normAutofit/>
           </a:bodyPr>
           <a:lstStyle xmlns:a="http://schemas.openxmlformats.org/drawingml/2006/main"/>
           <a:p xmlns:a="http://schemas.openxmlformats.org/drawingml/2006/main">
             <a:pPr algn="ctr">
+              <a:buNone/>
               <a:defRPr sz="975" b="1">
                 <a:solidFill>
                   <a:srgbClr val="FFFFFF"/>
@@ -8279,11 +10286,12 @@
         </p:spPr>
         <p:txBody>
           <a:bodyPr xmlns:a="http://schemas.openxmlformats.org/drawingml/2006/main" wrap="square" lIns="38100" tIns="19050" rIns="38100" bIns="19050" anchor="t">
-            <a:normAutofit fontScale="100000"/>
+            <a:normAutofit/>
           </a:bodyPr>
           <a:lstStyle xmlns:a="http://schemas.openxmlformats.org/drawingml/2006/main"/>
           <a:p xmlns:a="http://schemas.openxmlformats.org/drawingml/2006/main">
             <a:pPr algn="ctr">
+              <a:buNone/>
               <a:defRPr sz="1575">
                 <a:solidFill>
                   <a:srgbClr val="1F2933"/>
@@ -8449,7 +10457,7 @@
                 <a:ea typeface="Calibri Light"/>
                 <a:cs typeface="Calibri Light"/>
               </a:rPr>
-              <a:t>FWTW provides one matrix per financial instrument</a:t>
+              <a:t>The paper constructs one matrix per instrument and year</a:t>
             </a:r>
           </a:p>
         </p:txBody>
@@ -8486,6 +10494,13 @@
             <a:prstDash val="solid"/>
           </a:ln>
         </p:spPr>
+        <p:txBody>
+          <a:bodyPr xmlns:a="http://schemas.openxmlformats.org/drawingml/2006/main"/>
+          <a:lstStyle xmlns:a="http://schemas.openxmlformats.org/drawingml/2006/main"/>
+          <a:p xmlns:a="http://schemas.openxmlformats.org/drawingml/2006/main">
+            <a:endParaRPr/>
+          </a:p>
+        </p:txBody>
       </p:sp>
       <p:sp>
         <p:nvSpPr>
@@ -8505,6 +10520,124 @@
           <a:xfrm xmlns:a="http://schemas.openxmlformats.org/drawingml/2006/main">
             <a:off x="11334750" y="257175"/>
             <a:ext cx="400050" cy="228600"/>
+          </a:xfrm>
+          <a:prstGeom xmlns:a="http://schemas.openxmlformats.org/drawingml/2006/main" prst="rect">
+            <a:avLst/>
+          </a:prstGeom>
+          <a:noFill xmlns:a="http://schemas.openxmlformats.org/drawingml/2006/main"/>
+          <a:ln xmlns:a="http://schemas.openxmlformats.org/drawingml/2006/main" w="0">
+            <a:noFill/>
+            <a:prstDash val="solid"/>
+          </a:ln>
+        </p:spPr>
+        <p:txBody>
+          <a:bodyPr xmlns:a="http://schemas.openxmlformats.org/drawingml/2006/main" wrap="square" lIns="38100" tIns="19050" rIns="38100" bIns="19050" anchor="t">
+            <a:normAutofit/>
+          </a:bodyPr>
+          <a:lstStyle xmlns:a="http://schemas.openxmlformats.org/drawingml/2006/main"/>
+          <a:p xmlns:a="http://schemas.openxmlformats.org/drawingml/2006/main">
+            <a:pPr algn="r">
+              <a:buNone/>
+              <a:defRPr sz="1050" b="1">
+                <a:solidFill>
+                  <a:srgbClr val="627D98"/>
+                </a:solidFill>
+                <a:latin typeface="Calibri"/>
+                <a:ea typeface="Calibri"/>
+                <a:cs typeface="Calibri"/>
+              </a:defRPr>
+            </a:pPr>
+            <a:r>
+              <a:rPr sz="1050" b="1">
+                <a:solidFill>
+                  <a:srgbClr val="627D98"/>
+                </a:solidFill>
+                <a:latin typeface="Calibri"/>
+                <a:ea typeface="Calibri"/>
+                <a:cs typeface="Calibri"/>
+              </a:rPr>
+              <a:t>03</a:t>
+            </a:r>
+          </a:p>
+        </p:txBody>
+      </p:sp>
+      <p:sp>
+        <p:nvSpPr>
+          <p:cNvPr id="5" name="left-label">
+            <a:extLst xmlns:a="http://schemas.openxmlformats.org/drawingml/2006/main">
+              <a:ext uri="{FF2B5EF4-FFF2-40B4-BE49-F238E27FC236}">
+                <a16:creationId xmlns:a16="http://schemas.microsoft.com/office/drawing/2014/main" id="{7D68AFC4-C9F0-4906-8B90-9F78159CD369}"/>
+              </a:ext>
+            </a:extLst>
+          </p:cNvPr>
+          <p:cNvSpPr>
+            <a:spLocks xmlns:a="http://schemas.openxmlformats.org/drawingml/2006/main" noGrp="1"/>
+          </p:cNvSpPr>
+          <p:nvPr/>
+        </p:nvSpPr>
+        <p:spPr>
+          <a:xfrm xmlns:a="http://schemas.openxmlformats.org/drawingml/2006/main">
+            <a:off x="457200" y="1104900"/>
+            <a:ext cx="5410200" cy="257175"/>
+          </a:xfrm>
+          <a:prstGeom xmlns:a="http://schemas.openxmlformats.org/drawingml/2006/main" prst="rect">
+            <a:avLst/>
+          </a:prstGeom>
+          <a:noFill xmlns:a="http://schemas.openxmlformats.org/drawingml/2006/main"/>
+          <a:ln xmlns:a="http://schemas.openxmlformats.org/drawingml/2006/main" w="0">
+            <a:noFill/>
+            <a:prstDash val="solid"/>
+          </a:ln>
+        </p:spPr>
+        <p:txBody>
+          <a:bodyPr xmlns:a="http://schemas.openxmlformats.org/drawingml/2006/main" wrap="square" lIns="38100" tIns="19050" rIns="38100" bIns="19050" anchor="t">
+            <a:normAutofit/>
+          </a:bodyPr>
+          <a:lstStyle xmlns:a="http://schemas.openxmlformats.org/drawingml/2006/main"/>
+          <a:p xmlns:a="http://schemas.openxmlformats.org/drawingml/2006/main">
+            <a:pPr algn="l">
+              <a:buNone/>
+              <a:defRPr sz="1050" b="1">
+                <a:solidFill>
+                  <a:srgbClr val="2E5B88"/>
+                </a:solidFill>
+                <a:latin typeface="Calibri"/>
+                <a:ea typeface="Calibri"/>
+                <a:cs typeface="Calibri"/>
+              </a:defRPr>
+            </a:pPr>
+            <a:r>
+              <a:rPr sz="1050" b="1">
+                <a:solidFill>
+                  <a:srgbClr val="2E5B88"/>
+                </a:solidFill>
+                <a:latin typeface="Calibri"/>
+                <a:ea typeface="Calibri"/>
+                <a:cs typeface="Calibri"/>
+              </a:rPr>
+              <a:t>BILATERAL DOLLAR CLAIMS</a:t>
+            </a:r>
+          </a:p>
+        </p:txBody>
+      </p:sp>
+      <p:sp>
+        <p:nvSpPr>
+          <p:cNvPr id="6" name="right-label">
+            <a:extLst xmlns:a="http://schemas.openxmlformats.org/drawingml/2006/main">
+              <a:ext uri="{FF2B5EF4-FFF2-40B4-BE49-F238E27FC236}">
+                <a16:creationId xmlns:a16="http://schemas.microsoft.com/office/drawing/2014/main" id="{169CDC6F-7B71-4F41-AC26-C991BF45F73E}"/>
+              </a:ext>
+            </a:extLst>
+          </p:cNvPr>
+          <p:cNvSpPr>
+            <a:spLocks xmlns:a="http://schemas.openxmlformats.org/drawingml/2006/main" noGrp="1"/>
+          </p:cNvSpPr>
+          <p:nvPr/>
+        </p:nvSpPr>
+        <p:spPr>
+          <a:xfrm xmlns:a="http://schemas.openxmlformats.org/drawingml/2006/main">
+            <a:off x="6324600" y="1104900"/>
+            <a:ext cx="5410200" cy="257175"/>
           </a:xfrm>
           <a:prstGeom xmlns:a="http://schemas.openxmlformats.org/drawingml/2006/main" prst="rect">
             <a:avLst/>
@@ -8521,65 +10654,6 @@
           </a:bodyPr>
           <a:lstStyle xmlns:a="http://schemas.openxmlformats.org/drawingml/2006/main"/>
           <a:p xmlns:a="http://schemas.openxmlformats.org/drawingml/2006/main">
-            <a:pPr algn="r">
-              <a:buNone/>
-              <a:defRPr sz="1050" b="1">
-                <a:solidFill>
-                  <a:srgbClr val="627D98"/>
-                </a:solidFill>
-                <a:latin typeface="Calibri"/>
-                <a:ea typeface="Calibri"/>
-                <a:cs typeface="Calibri"/>
-              </a:defRPr>
-            </a:pPr>
-            <a:r>
-              <a:rPr sz="1050" b="1">
-                <a:solidFill>
-                  <a:srgbClr val="627D98"/>
-                </a:solidFill>
-                <a:latin typeface="Calibri"/>
-                <a:ea typeface="Calibri"/>
-                <a:cs typeface="Calibri"/>
-              </a:rPr>
-              <a:t>03</a:t>
-            </a:r>
-          </a:p>
-        </p:txBody>
-      </p:sp>
-      <p:sp>
-        <p:nvSpPr>
-          <p:cNvPr id="5" name="left-label">
-            <a:extLst xmlns:a="http://schemas.openxmlformats.org/drawingml/2006/main">
-              <a:ext uri="{FF2B5EF4-FFF2-40B4-BE49-F238E27FC236}">
-                <a16:creationId xmlns:a16="http://schemas.microsoft.com/office/drawing/2014/main" id="{7D68AFC4-C9F0-4906-8B90-9F78159CD369}"/>
-              </a:ext>
-            </a:extLst>
-          </p:cNvPr>
-          <p:cNvSpPr>
-            <a:spLocks xmlns:a="http://schemas.openxmlformats.org/drawingml/2006/main" noGrp="1"/>
-          </p:cNvSpPr>
-          <p:nvPr/>
-        </p:nvSpPr>
-        <p:spPr>
-          <a:xfrm xmlns:a="http://schemas.openxmlformats.org/drawingml/2006/main">
-            <a:off x="457200" y="1104900"/>
-            <a:ext cx="5410200" cy="257175"/>
-          </a:xfrm>
-          <a:prstGeom xmlns:a="http://schemas.openxmlformats.org/drawingml/2006/main" prst="rect">
-            <a:avLst/>
-          </a:prstGeom>
-          <a:noFill xmlns:a="http://schemas.openxmlformats.org/drawingml/2006/main"/>
-          <a:ln xmlns:a="http://schemas.openxmlformats.org/drawingml/2006/main" w="0">
-            <a:noFill/>
-            <a:prstDash val="solid"/>
-          </a:ln>
-        </p:spPr>
-        <p:txBody>
-          <a:bodyPr xmlns:a="http://schemas.openxmlformats.org/drawingml/2006/main" wrap="square" lIns="38100" tIns="19050" rIns="38100" bIns="19050" anchor="t">
-            <a:normAutofit fontScale="100000"/>
-          </a:bodyPr>
-          <a:lstStyle xmlns:a="http://schemas.openxmlformats.org/drawingml/2006/main"/>
-          <a:p xmlns:a="http://schemas.openxmlformats.org/drawingml/2006/main">
             <a:pPr algn="l">
               <a:buNone/>
               <a:defRPr sz="1050" b="1">
@@ -8600,66 +10674,7 @@
                 <a:ea typeface="Calibri"/>
                 <a:cs typeface="Calibri"/>
               </a:rPr>
-              <a:t>BILATERAL DOLLAR CLAIMS</a:t>
-            </a:r>
-          </a:p>
-        </p:txBody>
-      </p:sp>
-      <p:sp>
-        <p:nvSpPr>
-          <p:cNvPr id="6" name="right-label">
-            <a:extLst xmlns:a="http://schemas.openxmlformats.org/drawingml/2006/main">
-              <a:ext uri="{FF2B5EF4-FFF2-40B4-BE49-F238E27FC236}">
-                <a16:creationId xmlns:a16="http://schemas.microsoft.com/office/drawing/2014/main" id="{169CDC6F-7B71-4F41-AC26-C991BF45F73E}"/>
-              </a:ext>
-            </a:extLst>
-          </p:cNvPr>
-          <p:cNvSpPr>
-            <a:spLocks xmlns:a="http://schemas.openxmlformats.org/drawingml/2006/main" noGrp="1"/>
-          </p:cNvSpPr>
-          <p:nvPr/>
-        </p:nvSpPr>
-        <p:spPr>
-          <a:xfrm xmlns:a="http://schemas.openxmlformats.org/drawingml/2006/main">
-            <a:off x="6324600" y="1104900"/>
-            <a:ext cx="5410200" cy="257175"/>
-          </a:xfrm>
-          <a:prstGeom xmlns:a="http://schemas.openxmlformats.org/drawingml/2006/main" prst="rect">
-            <a:avLst/>
-          </a:prstGeom>
-          <a:noFill xmlns:a="http://schemas.openxmlformats.org/drawingml/2006/main"/>
-          <a:ln xmlns:a="http://schemas.openxmlformats.org/drawingml/2006/main" w="0">
-            <a:noFill/>
-            <a:prstDash val="solid"/>
-          </a:ln>
-        </p:spPr>
-        <p:txBody>
-          <a:bodyPr xmlns:a="http://schemas.openxmlformats.org/drawingml/2006/main" wrap="square" lIns="38100" tIns="19050" rIns="38100" bIns="19050" anchor="t">
-            <a:normAutofit fontScale="100000"/>
-          </a:bodyPr>
-          <a:lstStyle xmlns:a="http://schemas.openxmlformats.org/drawingml/2006/main"/>
-          <a:p xmlns:a="http://schemas.openxmlformats.org/drawingml/2006/main">
-            <a:pPr algn="l">
-              <a:buNone/>
-              <a:defRPr sz="1050" b="1">
-                <a:solidFill>
-                  <a:srgbClr val="2E5B88"/>
-                </a:solidFill>
-                <a:latin typeface="Calibri"/>
-                <a:ea typeface="Calibri"/>
-                <a:cs typeface="Calibri"/>
-              </a:defRPr>
-            </a:pPr>
-            <a:r>
-              <a:rPr sz="1050" b="1">
-                <a:solidFill>
-                  <a:srgbClr val="2E5B88"/>
-                </a:solidFill>
-                <a:latin typeface="Calibri"/>
-                <a:ea typeface="Calibri"/>
-                <a:cs typeface="Calibri"/>
-              </a:rPr>
-              <a:t>DIMENSIONS BEFORE AGGREGATION</a:t>
+              <a:t>2025 TARGET DIMENSIONS</a:t>
             </a:r>
           </a:p>
         </p:txBody>
@@ -8698,17 +10713,24 @@
             <a:prstDash val="solid"/>
           </a:ln>
         </p:spPr>
+        <p:txBody>
+          <a:bodyPr xmlns:a="http://schemas.openxmlformats.org/drawingml/2006/main"/>
+          <a:lstStyle xmlns:a="http://schemas.openxmlformats.org/drawingml/2006/main"/>
+          <a:p xmlns:a="http://schemas.openxmlformats.org/drawingml/2006/main">
+            <a:endParaRPr/>
+          </a:p>
+        </p:txBody>
       </p:sp>
       <p:pic>
         <p:nvPicPr>
-          <p:cNvPr id="36" name=""/>
+          <p:cNvPr id="40" name="Picture 35"/>
           <p:cNvPicPr>
             <a:picLocks xmlns:a="http://schemas.openxmlformats.org/drawingml/2006/main" noChangeAspect="1"/>
           </p:cNvPicPr>
           <p:nvPr/>
         </p:nvPicPr>
         <p:blipFill>
-          <a:blip xmlns:r="http://schemas.openxmlformats.org/officeDocument/2006/relationships" xmlns:a="http://schemas.openxmlformats.org/drawingml/2006/main" r:embed="R08b3d406dd2f407a"/>
+          <a:blip xmlns:r="http://schemas.openxmlformats.org/officeDocument/2006/relationships" xmlns:a="http://schemas.openxmlformats.org/drawingml/2006/main" r:embed="Re0f772455a094e79"/>
           <a:stretch xmlns:a="http://schemas.openxmlformats.org/drawingml/2006/main"/>
         </p:blipFill>
         <p:spPr>
@@ -8755,17 +10777,24 @@
             <a:prstDash val="solid"/>
           </a:ln>
         </p:spPr>
+        <p:txBody>
+          <a:bodyPr xmlns:a="http://schemas.openxmlformats.org/drawingml/2006/main"/>
+          <a:lstStyle xmlns:a="http://schemas.openxmlformats.org/drawingml/2006/main"/>
+          <a:p xmlns:a="http://schemas.openxmlformats.org/drawingml/2006/main">
+            <a:endParaRPr/>
+          </a:p>
+        </p:txBody>
       </p:sp>
       <p:pic>
         <p:nvPicPr>
-          <p:cNvPr id="38" name=""/>
+          <p:cNvPr id="42" name="Picture 37"/>
           <p:cNvPicPr>
             <a:picLocks xmlns:a="http://schemas.openxmlformats.org/drawingml/2006/main" noChangeAspect="1"/>
           </p:cNvPicPr>
           <p:nvPr/>
         </p:nvPicPr>
         <p:blipFill>
-          <a:blip xmlns:r="http://schemas.openxmlformats.org/officeDocument/2006/relationships" xmlns:a="http://schemas.openxmlformats.org/drawingml/2006/main" r:embed="Rce6f9c316f114956"/>
+          <a:blip xmlns:r="http://schemas.openxmlformats.org/officeDocument/2006/relationships" xmlns:a="http://schemas.openxmlformats.org/drawingml/2006/main" r:embed="Re0f772455a094e79"/>
           <a:stretch xmlns:a="http://schemas.openxmlformats.org/drawingml/2006/main"/>
         </p:blipFill>
         <p:spPr>
@@ -8812,6 +10841,13 @@
             <a:prstDash val="solid"/>
           </a:ln>
         </p:spPr>
+        <p:txBody>
+          <a:bodyPr xmlns:a="http://schemas.openxmlformats.org/drawingml/2006/main"/>
+          <a:lstStyle xmlns:a="http://schemas.openxmlformats.org/drawingml/2006/main"/>
+          <a:p xmlns:a="http://schemas.openxmlformats.org/drawingml/2006/main">
+            <a:endParaRPr/>
+          </a:p>
+        </p:txBody>
       </p:sp>
       <p:sp>
         <p:nvSpPr>
@@ -8845,6 +10881,13 @@
             <a:prstDash val="solid"/>
           </a:ln>
         </p:spPr>
+        <p:txBody>
+          <a:bodyPr xmlns:a="http://schemas.openxmlformats.org/drawingml/2006/main"/>
+          <a:lstStyle xmlns:a="http://schemas.openxmlformats.org/drawingml/2006/main"/>
+          <a:p xmlns:a="http://schemas.openxmlformats.org/drawingml/2006/main">
+            <a:endParaRPr/>
+          </a:p>
+        </p:txBody>
       </p:sp>
       <p:sp>
         <p:nvSpPr>
@@ -8959,7 +11002,7 @@
                 <a:ea typeface="Calibri"/>
                 <a:cs typeface="Calibri"/>
               </a:rPr>
-              <a:t>The ownership network begins with instrument-specific dollar matrices—not with DINA household microdata.</a:t>
+              <a:t>Each target matrix is an instrument-specific dollar table; the current public CSV represents the same object in long form, with a different taxonomy.</a:t>
             </a:r>
           </a:p>
         </p:txBody>
@@ -9018,7 +11061,7 @@
                 <a:ea typeface="Calibri"/>
                 <a:cs typeface="Calibri"/>
               </a:rPr>
-              <a:t>Source: paper Equation (4) construction; Financial Accounts/FWTW documentation.</a:t>
+              <a:t>Source: 2025 paper, Section 2.2 and Equation (4); Federal Reserve FWTW documentation.</a:t>
             </a:r>
           </a:p>
         </p:txBody>
@@ -9057,20 +11100,27 @@
             <a:prstDash val="solid"/>
           </a:ln>
         </p:spPr>
+        <p:txBody>
+          <a:bodyPr xmlns:a="http://schemas.openxmlformats.org/drawingml/2006/main"/>
+          <a:lstStyle xmlns:a="http://schemas.openxmlformats.org/drawingml/2006/main"/>
+          <a:p xmlns:a="http://schemas.openxmlformats.org/drawingml/2006/main">
+            <a:endParaRPr/>
+          </a:p>
+        </p:txBody>
       </p:sp>
       <p:pic>
         <p:nvPicPr>
-          <p:cNvPr id="45" name=""/>
+          <p:cNvPr id="49" name="Graphic 44"/>
           <p:cNvPicPr>
             <a:picLocks xmlns:a="http://schemas.openxmlformats.org/drawingml/2006/main" noChangeAspect="1"/>
           </p:cNvPicPr>
           <p:nvPr/>
         </p:nvPicPr>
         <p:blipFill>
-          <a:blip xmlns:r="http://schemas.openxmlformats.org/officeDocument/2006/relationships" xmlns:a="http://schemas.openxmlformats.org/drawingml/2006/main" r:embed="R320060a327a34e3f">
+          <a:blip xmlns:r="http://schemas.openxmlformats.org/officeDocument/2006/relationships" xmlns:a="http://schemas.openxmlformats.org/drawingml/2006/main" r:embed="Re0f772455a094e79">
             <a:extLst>
               <a:ext uri="{96DAC541-7B7A-43D3-8B79-37D633B846F1}">
-                <asvg:svgBlip xmlns:asvg="http://schemas.microsoft.com/office/drawing/2016/SVG/main" r:embed="R80c3d80b5fc44c14"/>
+                <asvg:svgBlip xmlns:asvg="http://schemas.microsoft.com/office/drawing/2016/SVG/main" r:embed="R1d009538410043e8"/>
               </a:ext>
             </a:extLst>
           </a:blip>
@@ -9116,7 +11166,7 @@
         </p:spPr>
         <p:txBody>
           <a:bodyPr xmlns:a="http://schemas.openxmlformats.org/drawingml/2006/main" wrap="square" lIns="38100" tIns="38100" rIns="76200" bIns="38100" anchor="t">
-            <a:normAutofit fontScale="100000"/>
+            <a:normAutofit/>
           </a:bodyPr>
           <a:lstStyle xmlns:a="http://schemas.openxmlformats.org/drawingml/2006/main"/>
           <a:p xmlns:a="http://schemas.openxmlformats.org/drawingml/2006/main">
@@ -9236,6 +11286,13 @@
             <a:prstDash val="solid"/>
           </a:ln>
         </p:spPr>
+        <p:txBody>
+          <a:bodyPr xmlns:a="http://schemas.openxmlformats.org/drawingml/2006/main"/>
+          <a:lstStyle xmlns:a="http://schemas.openxmlformats.org/drawingml/2006/main"/>
+          <a:p xmlns:a="http://schemas.openxmlformats.org/drawingml/2006/main">
+            <a:endParaRPr/>
+          </a:p>
+        </p:txBody>
       </p:sp>
       <p:sp>
         <p:nvSpPr>
@@ -9267,11 +11324,12 @@
         </p:spPr>
         <p:txBody>
           <a:bodyPr xmlns:a="http://schemas.openxmlformats.org/drawingml/2006/main" wrap="square" lIns="0" tIns="0" rIns="0" bIns="0" anchor="ctr">
-            <a:normAutofit fontScale="100000"/>
+            <a:normAutofit/>
           </a:bodyPr>
           <a:lstStyle xmlns:a="http://schemas.openxmlformats.org/drawingml/2006/main"/>
           <a:p xmlns:a="http://schemas.openxmlformats.org/drawingml/2006/main">
             <a:pPr algn="ctr">
+              <a:buNone/>
               <a:defRPr sz="1950" b="0">
                 <a:solidFill>
                   <a:srgbClr val="102A43"/>
@@ -9329,6 +11387,13 @@
             <a:prstDash val="solid"/>
           </a:ln>
         </p:spPr>
+        <p:txBody>
+          <a:bodyPr xmlns:a="http://schemas.openxmlformats.org/drawingml/2006/main"/>
+          <a:lstStyle xmlns:a="http://schemas.openxmlformats.org/drawingml/2006/main"/>
+          <a:p xmlns:a="http://schemas.openxmlformats.org/drawingml/2006/main">
+            <a:endParaRPr/>
+          </a:p>
+        </p:txBody>
       </p:sp>
       <p:sp>
         <p:nvSpPr>
@@ -9360,11 +11425,12 @@
         </p:spPr>
         <p:txBody>
           <a:bodyPr xmlns:a="http://schemas.openxmlformats.org/drawingml/2006/main" wrap="square" lIns="0" tIns="0" rIns="0" bIns="0" anchor="ctr">
-            <a:normAutofit fontScale="100000"/>
+            <a:normAutofit/>
           </a:bodyPr>
           <a:lstStyle xmlns:a="http://schemas.openxmlformats.org/drawingml/2006/main"/>
           <a:p xmlns:a="http://schemas.openxmlformats.org/drawingml/2006/main">
             <a:pPr algn="ctr">
+              <a:buNone/>
               <a:defRPr sz="1950" b="0">
                 <a:solidFill>
                   <a:srgbClr val="102A43"/>
@@ -9422,20 +11488,27 @@
             <a:prstDash val="solid"/>
           </a:ln>
         </p:spPr>
+        <p:txBody>
+          <a:bodyPr xmlns:a="http://schemas.openxmlformats.org/drawingml/2006/main"/>
+          <a:lstStyle xmlns:a="http://schemas.openxmlformats.org/drawingml/2006/main"/>
+          <a:p xmlns:a="http://schemas.openxmlformats.org/drawingml/2006/main">
+            <a:endParaRPr/>
+          </a:p>
+        </p:txBody>
       </p:sp>
       <p:pic>
         <p:nvPicPr>
-          <p:cNvPr id="52" name=""/>
+          <p:cNvPr id="56" name="Graphic 51"/>
           <p:cNvPicPr>
             <a:picLocks xmlns:a="http://schemas.openxmlformats.org/drawingml/2006/main" noChangeAspect="1"/>
           </p:cNvPicPr>
           <p:nvPr/>
         </p:nvPicPr>
         <p:blipFill>
-          <a:blip xmlns:r="http://schemas.openxmlformats.org/officeDocument/2006/relationships" xmlns:a="http://schemas.openxmlformats.org/drawingml/2006/main" r:embed="R8943cc1c03774ced">
+          <a:blip xmlns:r="http://schemas.openxmlformats.org/officeDocument/2006/relationships" xmlns:a="http://schemas.openxmlformats.org/drawingml/2006/main" r:embed="Rc2a4daa434324bbf">
             <a:extLst>
               <a:ext uri="{96DAC541-7B7A-43D3-8B79-37D633B846F1}">
-                <asvg:svgBlip xmlns:asvg="http://schemas.microsoft.com/office/drawing/2016/SVG/main" r:embed="Rbd37be961a7b4ab5"/>
+                <asvg:svgBlip xmlns:asvg="http://schemas.microsoft.com/office/drawing/2016/SVG/main" r:embed="R761c402ecc704abd"/>
               </a:ext>
             </a:extLst>
           </a:blip>
@@ -9481,11 +11554,12 @@
         </p:spPr>
         <p:txBody>
           <a:bodyPr xmlns:a="http://schemas.openxmlformats.org/drawingml/2006/main" wrap="square" lIns="38100" tIns="19050" rIns="38100" bIns="19050" anchor="t">
-            <a:normAutofit fontScale="88235"/>
+            <a:normAutofit fontScale="95735" lnSpcReduction="10000"/>
           </a:bodyPr>
           <a:lstStyle xmlns:a="http://schemas.openxmlformats.org/drawingml/2006/main"/>
           <a:p xmlns:a="http://schemas.openxmlformats.org/drawingml/2006/main">
             <a:pPr algn="ctr">
+              <a:buNone/>
               <a:defRPr sz="1275">
                 <a:solidFill>
                   <a:srgbClr val="627D98"/>
@@ -9651,7 +11725,7 @@
                 <a:ea typeface="Calibri Light"/>
                 <a:cs typeface="Calibri Light"/>
               </a:rPr>
-              <a:t>Missing bilateral cells are balanced—not inferred by DINA</a:t>
+              <a:t>FWTW completes unidentified cells before DINA enters</a:t>
             </a:r>
           </a:p>
         </p:txBody>
@@ -9688,6 +11762,13 @@
             <a:prstDash val="solid"/>
           </a:ln>
         </p:spPr>
+        <p:txBody>
+          <a:bodyPr xmlns:a="http://schemas.openxmlformats.org/drawingml/2006/main"/>
+          <a:lstStyle xmlns:a="http://schemas.openxmlformats.org/drawingml/2006/main"/>
+          <a:p xmlns:a="http://schemas.openxmlformats.org/drawingml/2006/main">
+            <a:endParaRPr/>
+          </a:p>
+        </p:txBody>
       </p:sp>
       <p:sp>
         <p:nvSpPr>
@@ -9707,6 +11788,65 @@
           <a:xfrm xmlns:a="http://schemas.openxmlformats.org/drawingml/2006/main">
             <a:off x="11334750" y="257175"/>
             <a:ext cx="400050" cy="228600"/>
+          </a:xfrm>
+          <a:prstGeom xmlns:a="http://schemas.openxmlformats.org/drawingml/2006/main" prst="rect">
+            <a:avLst/>
+          </a:prstGeom>
+          <a:noFill xmlns:a="http://schemas.openxmlformats.org/drawingml/2006/main"/>
+          <a:ln xmlns:a="http://schemas.openxmlformats.org/drawingml/2006/main" w="0">
+            <a:noFill/>
+            <a:prstDash val="solid"/>
+          </a:ln>
+        </p:spPr>
+        <p:txBody>
+          <a:bodyPr xmlns:a="http://schemas.openxmlformats.org/drawingml/2006/main" wrap="square" lIns="38100" tIns="19050" rIns="38100" bIns="19050" anchor="t">
+            <a:normAutofit/>
+          </a:bodyPr>
+          <a:lstStyle xmlns:a="http://schemas.openxmlformats.org/drawingml/2006/main"/>
+          <a:p xmlns:a="http://schemas.openxmlformats.org/drawingml/2006/main">
+            <a:pPr algn="r">
+              <a:buNone/>
+              <a:defRPr sz="1050" b="1">
+                <a:solidFill>
+                  <a:srgbClr val="627D98"/>
+                </a:solidFill>
+                <a:latin typeface="Calibri"/>
+                <a:ea typeface="Calibri"/>
+                <a:cs typeface="Calibri"/>
+              </a:defRPr>
+            </a:pPr>
+            <a:r>
+              <a:rPr sz="1050" b="1">
+                <a:solidFill>
+                  <a:srgbClr val="627D98"/>
+                </a:solidFill>
+                <a:latin typeface="Calibri"/>
+                <a:ea typeface="Calibri"/>
+                <a:cs typeface="Calibri"/>
+              </a:rPr>
+              <a:t>04</a:t>
+            </a:r>
+          </a:p>
+        </p:txBody>
+      </p:sp>
+      <p:sp>
+        <p:nvSpPr>
+          <p:cNvPr id="5" name="left-label">
+            <a:extLst xmlns:a="http://schemas.openxmlformats.org/drawingml/2006/main">
+              <a:ext uri="{FF2B5EF4-FFF2-40B4-BE49-F238E27FC236}">
+                <a16:creationId xmlns:a16="http://schemas.microsoft.com/office/drawing/2014/main" id="{7D68AFC4-C9F0-4906-8B90-9F78159CD369}"/>
+              </a:ext>
+            </a:extLst>
+          </p:cNvPr>
+          <p:cNvSpPr>
+            <a:spLocks xmlns:a="http://schemas.openxmlformats.org/drawingml/2006/main" noGrp="1"/>
+          </p:cNvSpPr>
+          <p:nvPr/>
+        </p:nvSpPr>
+        <p:spPr>
+          <a:xfrm xmlns:a="http://schemas.openxmlformats.org/drawingml/2006/main">
+            <a:off x="457200" y="1104900"/>
+            <a:ext cx="5410200" cy="257175"/>
           </a:xfrm>
           <a:prstGeom xmlns:a="http://schemas.openxmlformats.org/drawingml/2006/main" prst="rect">
             <a:avLst/>
@@ -9723,11 +11863,11 @@
           </a:bodyPr>
           <a:lstStyle xmlns:a="http://schemas.openxmlformats.org/drawingml/2006/main"/>
           <a:p xmlns:a="http://schemas.openxmlformats.org/drawingml/2006/main">
-            <a:pPr algn="r">
+            <a:pPr algn="l">
               <a:buNone/>
               <a:defRPr sz="1050" b="1">
                 <a:solidFill>
-                  <a:srgbClr val="627D98"/>
+                  <a:srgbClr val="2E5B88"/>
                 </a:solidFill>
                 <a:latin typeface="Calibri"/>
                 <a:ea typeface="Calibri"/>
@@ -9737,34 +11877,34 @@
             <a:r>
               <a:rPr sz="1050" b="1">
                 <a:solidFill>
-                  <a:srgbClr val="627D98"/>
-                </a:solidFill>
-                <a:latin typeface="Calibri"/>
-                <a:ea typeface="Calibri"/>
-                <a:cs typeface="Calibri"/>
-              </a:rPr>
-              <a:t>04</a:t>
-            </a:r>
-          </a:p>
-        </p:txBody>
-      </p:sp>
-      <p:sp>
-        <p:nvSpPr>
-          <p:cNvPr id="5" name="left-label">
-            <a:extLst xmlns:a="http://schemas.openxmlformats.org/drawingml/2006/main">
-              <a:ext uri="{FF2B5EF4-FFF2-40B4-BE49-F238E27FC236}">
-                <a16:creationId xmlns:a16="http://schemas.microsoft.com/office/drawing/2014/main" id="{7D68AFC4-C9F0-4906-8B90-9F78159CD369}"/>
-              </a:ext>
-            </a:extLst>
-          </p:cNvPr>
-          <p:cNvSpPr>
-            <a:spLocks xmlns:a="http://schemas.openxmlformats.org/drawingml/2006/main" noGrp="1"/>
-          </p:cNvSpPr>
-          <p:nvPr/>
-        </p:nvSpPr>
-        <p:spPr>
-          <a:xfrm xmlns:a="http://schemas.openxmlformats.org/drawingml/2006/main">
-            <a:off x="457200" y="1104900"/>
+                  <a:srgbClr val="2E5B88"/>
+                </a:solidFill>
+                <a:latin typeface="Calibri"/>
+                <a:ea typeface="Calibri"/>
+                <a:cs typeface="Calibri"/>
+              </a:rPr>
+              <a:t>WHEN ONE CELL REMAINS UNIDENTIFIED</a:t>
+            </a:r>
+          </a:p>
+        </p:txBody>
+      </p:sp>
+      <p:sp>
+        <p:nvSpPr>
+          <p:cNvPr id="6" name="right-label">
+            <a:extLst xmlns:a="http://schemas.openxmlformats.org/drawingml/2006/main">
+              <a:ext uri="{FF2B5EF4-FFF2-40B4-BE49-F238E27FC236}">
+                <a16:creationId xmlns:a16="http://schemas.microsoft.com/office/drawing/2014/main" id="{169CDC6F-7B71-4F41-AC26-C991BF45F73E}"/>
+              </a:ext>
+            </a:extLst>
+          </p:cNvPr>
+          <p:cNvSpPr>
+            <a:spLocks xmlns:a="http://schemas.openxmlformats.org/drawingml/2006/main" noGrp="1"/>
+          </p:cNvSpPr>
+          <p:nvPr/>
+        </p:nvSpPr>
+        <p:spPr>
+          <a:xfrm xmlns:a="http://schemas.openxmlformats.org/drawingml/2006/main">
+            <a:off x="6324600" y="1104900"/>
             <a:ext cx="5410200" cy="257175"/>
           </a:xfrm>
           <a:prstGeom xmlns:a="http://schemas.openxmlformats.org/drawingml/2006/main" prst="rect">
@@ -9802,66 +11942,7 @@
                 <a:ea typeface="Calibri"/>
                 <a:cs typeface="Calibri"/>
               </a:rPr>
-              <a:t>WHEN ONE CELL IS MISSING</a:t>
-            </a:r>
-          </a:p>
-        </p:txBody>
-      </p:sp>
-      <p:sp>
-        <p:nvSpPr>
-          <p:cNvPr id="6" name="right-label">
-            <a:extLst xmlns:a="http://schemas.openxmlformats.org/drawingml/2006/main">
-              <a:ext uri="{FF2B5EF4-FFF2-40B4-BE49-F238E27FC236}">
-                <a16:creationId xmlns:a16="http://schemas.microsoft.com/office/drawing/2014/main" id="{169CDC6F-7B71-4F41-AC26-C991BF45F73E}"/>
-              </a:ext>
-            </a:extLst>
-          </p:cNvPr>
-          <p:cNvSpPr>
-            <a:spLocks xmlns:a="http://schemas.openxmlformats.org/drawingml/2006/main" noGrp="1"/>
-          </p:cNvSpPr>
-          <p:nvPr/>
-        </p:nvSpPr>
-        <p:spPr>
-          <a:xfrm xmlns:a="http://schemas.openxmlformats.org/drawingml/2006/main">
-            <a:off x="6324600" y="1104900"/>
-            <a:ext cx="5410200" cy="257175"/>
-          </a:xfrm>
-          <a:prstGeom xmlns:a="http://schemas.openxmlformats.org/drawingml/2006/main" prst="rect">
-            <a:avLst/>
-          </a:prstGeom>
-          <a:noFill xmlns:a="http://schemas.openxmlformats.org/drawingml/2006/main"/>
-          <a:ln xmlns:a="http://schemas.openxmlformats.org/drawingml/2006/main" w="0">
-            <a:noFill/>
-            <a:prstDash val="solid"/>
-          </a:ln>
-        </p:spPr>
-        <p:txBody>
-          <a:bodyPr xmlns:a="http://schemas.openxmlformats.org/drawingml/2006/main" wrap="square" lIns="38100" tIns="19050" rIns="38100" bIns="19050" anchor="t">
-            <a:normAutofit fontScale="100000"/>
-          </a:bodyPr>
-          <a:lstStyle xmlns:a="http://schemas.openxmlformats.org/drawingml/2006/main"/>
-          <a:p xmlns:a="http://schemas.openxmlformats.org/drawingml/2006/main">
-            <a:pPr algn="l">
-              <a:buNone/>
-              <a:defRPr sz="1050" b="1">
-                <a:solidFill>
-                  <a:srgbClr val="2E5B88"/>
-                </a:solidFill>
-                <a:latin typeface="Calibri"/>
-                <a:ea typeface="Calibri"/>
-                <a:cs typeface="Calibri"/>
-              </a:defRPr>
-            </a:pPr>
-            <a:r>
-              <a:rPr sz="1050" b="1">
-                <a:solidFill>
-                  <a:srgbClr val="2E5B88"/>
-                </a:solidFill>
-                <a:latin typeface="Calibri"/>
-                <a:ea typeface="Calibri"/>
-                <a:cs typeface="Calibri"/>
-              </a:rPr>
-              <a:t>WHEN THE SYSTEM IS UNDERDETERMINED</a:t>
+              <a:t>WHEN MANY CELLS REMAIN UNIDENTIFIED</a:t>
             </a:r>
           </a:p>
         </p:txBody>
@@ -9900,17 +11981,24 @@
             <a:prstDash val="solid"/>
           </a:ln>
         </p:spPr>
+        <p:txBody>
+          <a:bodyPr xmlns:a="http://schemas.openxmlformats.org/drawingml/2006/main"/>
+          <a:lstStyle xmlns:a="http://schemas.openxmlformats.org/drawingml/2006/main"/>
+          <a:p xmlns:a="http://schemas.openxmlformats.org/drawingml/2006/main">
+            <a:endParaRPr/>
+          </a:p>
+        </p:txBody>
       </p:sp>
       <p:pic>
         <p:nvPicPr>
-          <p:cNvPr id="42" name=""/>
+          <p:cNvPr id="45" name="Picture 41"/>
           <p:cNvPicPr>
             <a:picLocks xmlns:a="http://schemas.openxmlformats.org/drawingml/2006/main" noChangeAspect="1"/>
           </p:cNvPicPr>
           <p:nvPr/>
         </p:nvPicPr>
         <p:blipFill>
-          <a:blip xmlns:r="http://schemas.openxmlformats.org/officeDocument/2006/relationships" xmlns:a="http://schemas.openxmlformats.org/drawingml/2006/main" r:embed="R21ba9606eea24abe"/>
+          <a:blip xmlns:r="http://schemas.openxmlformats.org/officeDocument/2006/relationships" xmlns:a="http://schemas.openxmlformats.org/drawingml/2006/main" r:embed="R287b007292d644b2"/>
           <a:stretch xmlns:a="http://schemas.openxmlformats.org/drawingml/2006/main"/>
         </p:blipFill>
         <p:spPr>
@@ -9957,17 +12045,24 @@
             <a:prstDash val="solid"/>
           </a:ln>
         </p:spPr>
+        <p:txBody>
+          <a:bodyPr xmlns:a="http://schemas.openxmlformats.org/drawingml/2006/main"/>
+          <a:lstStyle xmlns:a="http://schemas.openxmlformats.org/drawingml/2006/main"/>
+          <a:p xmlns:a="http://schemas.openxmlformats.org/drawingml/2006/main">
+            <a:endParaRPr/>
+          </a:p>
+        </p:txBody>
       </p:sp>
       <p:pic>
         <p:nvPicPr>
-          <p:cNvPr id="44" name=""/>
+          <p:cNvPr id="47" name="Picture 43"/>
           <p:cNvPicPr>
             <a:picLocks xmlns:a="http://schemas.openxmlformats.org/drawingml/2006/main" noChangeAspect="1"/>
           </p:cNvPicPr>
           <p:nvPr/>
         </p:nvPicPr>
         <p:blipFill>
-          <a:blip xmlns:r="http://schemas.openxmlformats.org/officeDocument/2006/relationships" xmlns:a="http://schemas.openxmlformats.org/drawingml/2006/main" r:embed="R0aaf12465e57494d"/>
+          <a:blip xmlns:r="http://schemas.openxmlformats.org/officeDocument/2006/relationships" xmlns:a="http://schemas.openxmlformats.org/drawingml/2006/main" r:embed="R287b007292d644b2"/>
           <a:stretch xmlns:a="http://schemas.openxmlformats.org/drawingml/2006/main"/>
         </p:blipFill>
         <p:spPr>
@@ -10014,6 +12109,13 @@
             <a:prstDash val="solid"/>
           </a:ln>
         </p:spPr>
+        <p:txBody>
+          <a:bodyPr xmlns:a="http://schemas.openxmlformats.org/drawingml/2006/main"/>
+          <a:lstStyle xmlns:a="http://schemas.openxmlformats.org/drawingml/2006/main"/>
+          <a:p xmlns:a="http://schemas.openxmlformats.org/drawingml/2006/main">
+            <a:endParaRPr/>
+          </a:p>
+        </p:txBody>
       </p:sp>
       <p:sp>
         <p:nvSpPr>
@@ -10047,6 +12149,13 @@
             <a:prstDash val="solid"/>
           </a:ln>
         </p:spPr>
+        <p:txBody>
+          <a:bodyPr xmlns:a="http://schemas.openxmlformats.org/drawingml/2006/main"/>
+          <a:lstStyle xmlns:a="http://schemas.openxmlformats.org/drawingml/2006/main"/>
+          <a:p xmlns:a="http://schemas.openxmlformats.org/drawingml/2006/main">
+            <a:endParaRPr/>
+          </a:p>
+        </p:txBody>
       </p:sp>
       <p:sp>
         <p:nvSpPr>
@@ -10161,7 +12270,7 @@
                 <a:ea typeface="Calibri"/>
                 <a:cs typeface="Calibri"/>
               </a:rPr>
-              <a:t>DINA allocates household totals across groups; it does not reveal an unobserved sector-to-sector counterparty cell.</a:t>
+              <a:t>The released public FWTW CSV already contains completed estimates; DINA later splits the household-holder column across wealth groups.</a:t>
             </a:r>
           </a:p>
         </p:txBody>
@@ -10220,7 +12329,7 @@
                 <a:ea typeface="Calibri"/>
                 <a:cs typeface="Calibri"/>
               </a:rPr>
-              <a:t>Source: paper data appendix; project data-lineage audit.</a:t>
+              <a:t>Source: 2025 paper, Section 2.2; Batty et al. (2023); Federal Reserve FWTW templates.</a:t>
             </a:r>
           </a:p>
         </p:txBody>
@@ -10259,20 +12368,27 @@
             <a:prstDash val="solid"/>
           </a:ln>
         </p:spPr>
+        <p:txBody>
+          <a:bodyPr xmlns:a="http://schemas.openxmlformats.org/drawingml/2006/main"/>
+          <a:lstStyle xmlns:a="http://schemas.openxmlformats.org/drawingml/2006/main"/>
+          <a:p xmlns:a="http://schemas.openxmlformats.org/drawingml/2006/main">
+            <a:endParaRPr/>
+          </a:p>
+        </p:txBody>
       </p:sp>
       <p:pic>
         <p:nvPicPr>
-          <p:cNvPr id="51" name=""/>
+          <p:cNvPr id="54" name="Graphic 50"/>
           <p:cNvPicPr>
             <a:picLocks xmlns:a="http://schemas.openxmlformats.org/drawingml/2006/main" noChangeAspect="1"/>
           </p:cNvPicPr>
           <p:nvPr/>
         </p:nvPicPr>
         <p:blipFill>
-          <a:blip xmlns:r="http://schemas.openxmlformats.org/officeDocument/2006/relationships" xmlns:a="http://schemas.openxmlformats.org/drawingml/2006/main" r:embed="Rdc6c2d83baee444a">
+          <a:blip xmlns:r="http://schemas.openxmlformats.org/officeDocument/2006/relationships" xmlns:a="http://schemas.openxmlformats.org/drawingml/2006/main" r:embed="R8fcf8b03a5f945b1">
             <a:extLst>
               <a:ext uri="{96DAC541-7B7A-43D3-8B79-37D633B846F1}">
-                <asvg:svgBlip xmlns:asvg="http://schemas.microsoft.com/office/drawing/2016/SVG/main" r:embed="R377bf5c8262240af"/>
+                <asvg:svgBlip xmlns:asvg="http://schemas.microsoft.com/office/drawing/2016/SVG/main" r:embed="R7cd39a61c6714d49"/>
               </a:ext>
             </a:extLst>
           </a:blip>
@@ -10323,6 +12439,7 @@
           <a:lstStyle xmlns:a="http://schemas.openxmlformats.org/drawingml/2006/main"/>
           <a:p xmlns:a="http://schemas.openxmlformats.org/drawingml/2006/main">
             <a:pPr algn="ctr">
+              <a:buNone/>
               <a:defRPr sz="1575">
                 <a:solidFill>
                   <a:srgbClr val="1F2933"/>
@@ -10341,7 +12458,7 @@
                 <a:ea typeface="Calibri"/>
                 <a:cs typeface="Calibri"/>
               </a:rPr>
-              <a:t>A residual is exact only when margins are authoritative and exactly one component is unknown.</a:t>
+              <a:t>A residual is exact only when authoritative margins leave exactly one bilateral component unidentified.</a:t>
             </a:r>
           </a:p>
         </p:txBody>
@@ -10382,11 +12499,12 @@
         </p:spPr>
         <p:txBody>
           <a:bodyPr xmlns:a="http://schemas.openxmlformats.org/drawingml/2006/main" wrap="square" lIns="38100" tIns="9525" rIns="38100" bIns="9525" anchor="ctr">
-            <a:normAutofit fontScale="100000"/>
+            <a:normAutofit/>
           </a:bodyPr>
           <a:lstStyle xmlns:a="http://schemas.openxmlformats.org/drawingml/2006/main"/>
           <a:p xmlns:a="http://schemas.openxmlformats.org/drawingml/2006/main">
             <a:pPr algn="ctr">
+              <a:buNone/>
               <a:defRPr sz="975" b="1">
                 <a:solidFill>
                   <a:srgbClr val="FFFFFF"/>
@@ -10444,6 +12562,13 @@
             <a:prstDash val="solid"/>
           </a:ln>
         </p:spPr>
+        <p:txBody>
+          <a:bodyPr xmlns:a="http://schemas.openxmlformats.org/drawingml/2006/main"/>
+          <a:lstStyle xmlns:a="http://schemas.openxmlformats.org/drawingml/2006/main"/>
+          <a:p xmlns:a="http://schemas.openxmlformats.org/drawingml/2006/main">
+            <a:endParaRPr/>
+          </a:p>
+        </p:txBody>
       </p:sp>
       <p:sp>
         <p:nvSpPr>
@@ -10479,11 +12604,12 @@
         </p:spPr>
         <p:txBody>
           <a:bodyPr xmlns:a="http://schemas.openxmlformats.org/drawingml/2006/main" wrap="square" lIns="0" tIns="0" rIns="0" bIns="0" anchor="ctr">
-            <a:normAutofit fontScale="100000"/>
+            <a:normAutofit/>
           </a:bodyPr>
           <a:lstStyle xmlns:a="http://schemas.openxmlformats.org/drawingml/2006/main"/>
           <a:p xmlns:a="http://schemas.openxmlformats.org/drawingml/2006/main">
             <a:pPr algn="ctr">
+              <a:buNone/>
               <a:defRPr sz="1350" b="1">
                 <a:solidFill>
                   <a:srgbClr val="FFFFFF"/>
@@ -10542,6 +12668,7 @@
           <a:lstStyle xmlns:a="http://schemas.openxmlformats.org/drawingml/2006/main"/>
           <a:p xmlns:a="http://schemas.openxmlformats.org/drawingml/2006/main">
             <a:pPr>
+              <a:buNone/>
               <a:defRPr sz="1500" b="1">
                 <a:solidFill>
                   <a:srgbClr val="102A43"/>
@@ -10560,7 +12687,7 @@
                 <a:ea typeface="Calibri"/>
                 <a:cs typeface="Calibri"/>
               </a:rPr>
-              <a:t>Apply documented exclusions</a:t>
+              <a:t>Keep known cells and exclusions</a:t>
             </a:r>
           </a:p>
         </p:txBody>
@@ -10595,11 +12722,12 @@
         </p:spPr>
         <p:txBody>
           <a:bodyPr xmlns:a="http://schemas.openxmlformats.org/drawingml/2006/main" wrap="square" lIns="38100" tIns="19050" rIns="38100" bIns="19050" anchor="t">
-            <a:normAutofit fontScale="100000"/>
+            <a:normAutofit fontScale="97897"/>
           </a:bodyPr>
           <a:lstStyle xmlns:a="http://schemas.openxmlformats.org/drawingml/2006/main"/>
           <a:p xmlns:a="http://schemas.openxmlformats.org/drawingml/2006/main">
             <a:pPr>
+              <a:buNone/>
               <a:defRPr sz="1200">
                 <a:solidFill>
                   <a:srgbClr val="627D98"/>
@@ -10618,7 +12746,7 @@
                 <a:ea typeface="Calibri"/>
                 <a:cs typeface="Calibri"/>
               </a:rPr>
-              <a:t>Remove cells ruled out institutionally.</a:t>
+              <a:t>Use exact relationships and rule out impossible ones.</a:t>
             </a:r>
           </a:p>
         </p:txBody>
@@ -10657,6 +12785,13 @@
             <a:prstDash val="solid"/>
           </a:ln>
         </p:spPr>
+        <p:txBody>
+          <a:bodyPr xmlns:a="http://schemas.openxmlformats.org/drawingml/2006/main"/>
+          <a:lstStyle xmlns:a="http://schemas.openxmlformats.org/drawingml/2006/main"/>
+          <a:p xmlns:a="http://schemas.openxmlformats.org/drawingml/2006/main">
+            <a:endParaRPr/>
+          </a:p>
+        </p:txBody>
       </p:sp>
       <p:sp>
         <p:nvSpPr>
@@ -10692,11 +12827,12 @@
         </p:spPr>
         <p:txBody>
           <a:bodyPr xmlns:a="http://schemas.openxmlformats.org/drawingml/2006/main" wrap="square" lIns="0" tIns="0" rIns="0" bIns="0" anchor="ctr">
-            <a:normAutofit fontScale="100000"/>
+            <a:normAutofit/>
           </a:bodyPr>
           <a:lstStyle xmlns:a="http://schemas.openxmlformats.org/drawingml/2006/main"/>
           <a:p xmlns:a="http://schemas.openxmlformats.org/drawingml/2006/main">
             <a:pPr algn="ctr">
+              <a:buNone/>
               <a:defRPr sz="1350" b="1">
                 <a:solidFill>
                   <a:srgbClr val="FFFFFF"/>
@@ -10755,6 +12891,7 @@
           <a:lstStyle xmlns:a="http://schemas.openxmlformats.org/drawingml/2006/main"/>
           <a:p xmlns:a="http://schemas.openxmlformats.org/drawingml/2006/main">
             <a:pPr>
+              <a:buNone/>
               <a:defRPr sz="1500" b="1">
                 <a:solidFill>
                   <a:srgbClr val="102A43"/>
@@ -10773,7 +12910,7 @@
                 <a:ea typeface="Calibri"/>
                 <a:cs typeface="Calibri"/>
               </a:rPr>
-              <a:t>Use explicit proportionality</a:t>
+              <a:t>Allocate remaining residuals</a:t>
             </a:r>
           </a:p>
         </p:txBody>
@@ -10813,6 +12950,7 @@
           <a:lstStyle xmlns:a="http://schemas.openxmlformats.org/drawingml/2006/main"/>
           <a:p xmlns:a="http://schemas.openxmlformats.org/drawingml/2006/main">
             <a:pPr>
+              <a:buNone/>
               <a:defRPr sz="1200">
                 <a:solidFill>
                   <a:srgbClr val="627D98"/>
@@ -10831,7 +12969,7 @@
                 <a:ea typeface="Calibri"/>
                 <a:cs typeface="Calibri"/>
               </a:rPr>
-              <a:t>Only where the source construction justifies it.</a:t>
+              <a:t>Apply documented proportionality assumptions.</a:t>
             </a:r>
           </a:p>
         </p:txBody>
@@ -10870,6 +13008,13 @@
             <a:prstDash val="solid"/>
           </a:ln>
         </p:spPr>
+        <p:txBody>
+          <a:bodyPr xmlns:a="http://schemas.openxmlformats.org/drawingml/2006/main"/>
+          <a:lstStyle xmlns:a="http://schemas.openxmlformats.org/drawingml/2006/main"/>
+          <a:p xmlns:a="http://schemas.openxmlformats.org/drawingml/2006/main">
+            <a:endParaRPr/>
+          </a:p>
+        </p:txBody>
       </p:sp>
       <p:sp>
         <p:nvSpPr>
@@ -10905,11 +13050,12 @@
         </p:spPr>
         <p:txBody>
           <a:bodyPr xmlns:a="http://schemas.openxmlformats.org/drawingml/2006/main" wrap="square" lIns="0" tIns="0" rIns="0" bIns="0" anchor="ctr">
-            <a:normAutofit fontScale="100000"/>
+            <a:normAutofit/>
           </a:bodyPr>
           <a:lstStyle xmlns:a="http://schemas.openxmlformats.org/drawingml/2006/main"/>
           <a:p xmlns:a="http://schemas.openxmlformats.org/drawingml/2006/main">
             <a:pPr algn="ctr">
+              <a:buNone/>
               <a:defRPr sz="1350" b="1">
                 <a:solidFill>
                   <a:srgbClr val="FFFFFF"/>
@@ -10968,6 +13114,7 @@
           <a:lstStyle xmlns:a="http://schemas.openxmlformats.org/drawingml/2006/main"/>
           <a:p xmlns:a="http://schemas.openxmlformats.org/drawingml/2006/main">
             <a:pPr>
+              <a:buNone/>
               <a:defRPr sz="1500" b="1">
                 <a:solidFill>
                   <a:srgbClr val="102A43"/>
@@ -10986,7 +13133,7 @@
                 <a:ea typeface="Calibri"/>
                 <a:cs typeface="Calibri"/>
               </a:rPr>
-              <a:t>Balance to margins</a:t>
+              <a:t>Iterate to both margins</a:t>
             </a:r>
           </a:p>
         </p:txBody>
@@ -11026,6 +13173,7 @@
           <a:lstStyle xmlns:a="http://schemas.openxmlformats.org/drawingml/2006/main"/>
           <a:p xmlns:a="http://schemas.openxmlformats.org/drawingml/2006/main">
             <a:pPr>
+              <a:buNone/>
               <a:defRPr sz="1200">
                 <a:solidFill>
                   <a:srgbClr val="627D98"/>
@@ -11167,7 +13315,7 @@
         </p:spPr>
         <p:txBody>
           <a:bodyPr xmlns:a="http://schemas.openxmlformats.org/drawingml/2006/main" wrap="none" lIns="0" tIns="0" rIns="0" bIns="0" anchor="ctr">
-            <a:normAutofit fontScale="100000"/>
+            <a:normAutofit/>
           </a:bodyPr>
           <a:lstStyle xmlns:a="http://schemas.openxmlformats.org/drawingml/2006/main"/>
           <a:p xmlns:a="http://schemas.openxmlformats.org/drawingml/2006/main">
@@ -11228,6 +13376,13 @@
             <a:prstDash val="solid"/>
           </a:ln>
         </p:spPr>
+        <p:txBody>
+          <a:bodyPr xmlns:a="http://schemas.openxmlformats.org/drawingml/2006/main"/>
+          <a:lstStyle xmlns:a="http://schemas.openxmlformats.org/drawingml/2006/main"/>
+          <a:p xmlns:a="http://schemas.openxmlformats.org/drawingml/2006/main">
+            <a:endParaRPr/>
+          </a:p>
+        </p:txBody>
       </p:sp>
       <p:sp>
         <p:nvSpPr>
@@ -11259,7 +13414,7 @@
         </p:spPr>
         <p:txBody>
           <a:bodyPr xmlns:a="http://schemas.openxmlformats.org/drawingml/2006/main" wrap="square" lIns="38100" tIns="19050" rIns="38100" bIns="19050" anchor="t">
-            <a:normAutofit fontScale="100000"/>
+            <a:normAutofit/>
           </a:bodyPr>
           <a:lstStyle xmlns:a="http://schemas.openxmlformats.org/drawingml/2006/main"/>
           <a:p xmlns:a="http://schemas.openxmlformats.org/drawingml/2006/main">
@@ -11318,7 +13473,7 @@
         </p:spPr>
         <p:txBody>
           <a:bodyPr xmlns:a="http://schemas.openxmlformats.org/drawingml/2006/main" wrap="square" lIns="38100" tIns="19050" rIns="38100" bIns="19050" anchor="t">
-            <a:normAutofit fontScale="100000"/>
+            <a:normAutofit/>
           </a:bodyPr>
           <a:lstStyle xmlns:a="http://schemas.openxmlformats.org/drawingml/2006/main"/>
           <a:p xmlns:a="http://schemas.openxmlformats.org/drawingml/2006/main">
@@ -11377,7 +13532,7 @@
         </p:spPr>
         <p:txBody>
           <a:bodyPr xmlns:a="http://schemas.openxmlformats.org/drawingml/2006/main" wrap="square" lIns="38100" tIns="19050" rIns="38100" bIns="19050" anchor="t">
-            <a:normAutofit fontScale="100000"/>
+            <a:normAutofit/>
           </a:bodyPr>
           <a:lstStyle xmlns:a="http://schemas.openxmlformats.org/drawingml/2006/main"/>
           <a:p xmlns:a="http://schemas.openxmlformats.org/drawingml/2006/main">
@@ -11440,17 +13595,24 @@
             <a:prstDash val="solid"/>
           </a:ln>
         </p:spPr>
+        <p:txBody>
+          <a:bodyPr xmlns:a="http://schemas.openxmlformats.org/drawingml/2006/main"/>
+          <a:lstStyle xmlns:a="http://schemas.openxmlformats.org/drawingml/2006/main"/>
+          <a:p xmlns:a="http://schemas.openxmlformats.org/drawingml/2006/main">
+            <a:endParaRPr/>
+          </a:p>
+        </p:txBody>
       </p:sp>
       <p:pic>
         <p:nvPicPr>
-          <p:cNvPr id="32" name=""/>
+          <p:cNvPr id="36" name="Picture 31"/>
           <p:cNvPicPr>
             <a:picLocks xmlns:a="http://schemas.openxmlformats.org/drawingml/2006/main" noChangeAspect="1"/>
           </p:cNvPicPr>
           <p:nvPr/>
         </p:nvPicPr>
         <p:blipFill>
-          <a:blip xmlns:r="http://schemas.openxmlformats.org/officeDocument/2006/relationships" xmlns:a="http://schemas.openxmlformats.org/drawingml/2006/main" r:embed="Rc90e96a96fbf4468"/>
+          <a:blip xmlns:r="http://schemas.openxmlformats.org/officeDocument/2006/relationships" xmlns:a="http://schemas.openxmlformats.org/drawingml/2006/main" r:embed="R4e6a0df2ed774eb8"/>
           <a:stretch xmlns:a="http://schemas.openxmlformats.org/drawingml/2006/main"/>
         </p:blipFill>
         <p:spPr>
@@ -11497,17 +13659,24 @@
             <a:prstDash val="solid"/>
           </a:ln>
         </p:spPr>
+        <p:txBody>
+          <a:bodyPr xmlns:a="http://schemas.openxmlformats.org/drawingml/2006/main"/>
+          <a:lstStyle xmlns:a="http://schemas.openxmlformats.org/drawingml/2006/main"/>
+          <a:p xmlns:a="http://schemas.openxmlformats.org/drawingml/2006/main">
+            <a:endParaRPr/>
+          </a:p>
+        </p:txBody>
       </p:sp>
       <p:pic>
         <p:nvPicPr>
-          <p:cNvPr id="34" name=""/>
+          <p:cNvPr id="38" name="Picture 33"/>
           <p:cNvPicPr>
             <a:picLocks xmlns:a="http://schemas.openxmlformats.org/drawingml/2006/main" noChangeAspect="1"/>
           </p:cNvPicPr>
           <p:nvPr/>
         </p:nvPicPr>
         <p:blipFill>
-          <a:blip xmlns:r="http://schemas.openxmlformats.org/officeDocument/2006/relationships" xmlns:a="http://schemas.openxmlformats.org/drawingml/2006/main" r:embed="R37d15bdbf1c948bb"/>
+          <a:blip xmlns:r="http://schemas.openxmlformats.org/officeDocument/2006/relationships" xmlns:a="http://schemas.openxmlformats.org/drawingml/2006/main" r:embed="R4e6a0df2ed774eb8"/>
           <a:stretch xmlns:a="http://schemas.openxmlformats.org/drawingml/2006/main"/>
         </p:blipFill>
         <p:spPr>
@@ -11554,6 +13723,13 @@
             <a:prstDash val="solid"/>
           </a:ln>
         </p:spPr>
+        <p:txBody>
+          <a:bodyPr xmlns:a="http://schemas.openxmlformats.org/drawingml/2006/main"/>
+          <a:lstStyle xmlns:a="http://schemas.openxmlformats.org/drawingml/2006/main"/>
+          <a:p xmlns:a="http://schemas.openxmlformats.org/drawingml/2006/main">
+            <a:endParaRPr/>
+          </a:p>
+        </p:txBody>
       </p:sp>
       <p:sp>
         <p:nvSpPr>
@@ -11587,6 +13763,13 @@
             <a:prstDash val="solid"/>
           </a:ln>
         </p:spPr>
+        <p:txBody>
+          <a:bodyPr xmlns:a="http://schemas.openxmlformats.org/drawingml/2006/main"/>
+          <a:lstStyle xmlns:a="http://schemas.openxmlformats.org/drawingml/2006/main"/>
+          <a:p xmlns:a="http://schemas.openxmlformats.org/drawingml/2006/main">
+            <a:endParaRPr/>
+          </a:p>
+        </p:txBody>
       </p:sp>
       <p:sp>
         <p:nvSpPr>
@@ -11677,7 +13860,7 @@
         </p:spPr>
         <p:txBody>
           <a:bodyPr xmlns:a="http://schemas.openxmlformats.org/drawingml/2006/main" wrap="square" lIns="38100" tIns="38100" rIns="38100" bIns="38100" anchor="ctr">
-            <a:normAutofit fontScale="100000"/>
+            <a:normAutofit/>
           </a:bodyPr>
           <a:lstStyle xmlns:a="http://schemas.openxmlformats.org/drawingml/2006/main"/>
           <a:p xmlns:a="http://schemas.openxmlformats.org/drawingml/2006/main">
@@ -11736,7 +13919,7 @@
         </p:spPr>
         <p:txBody>
           <a:bodyPr xmlns:a="http://schemas.openxmlformats.org/drawingml/2006/main" wrap="none" lIns="0" tIns="0" rIns="0" bIns="0" anchor="ctr">
-            <a:normAutofit fontScale="100000"/>
+            <a:normAutofit/>
           </a:bodyPr>
           <a:lstStyle xmlns:a="http://schemas.openxmlformats.org/drawingml/2006/main"/>
           <a:p xmlns:a="http://schemas.openxmlformats.org/drawingml/2006/main">
@@ -11799,20 +13982,27 @@
             <a:prstDash val="solid"/>
           </a:ln>
         </p:spPr>
+        <p:txBody>
+          <a:bodyPr xmlns:a="http://schemas.openxmlformats.org/drawingml/2006/main"/>
+          <a:lstStyle xmlns:a="http://schemas.openxmlformats.org/drawingml/2006/main"/>
+          <a:p xmlns:a="http://schemas.openxmlformats.org/drawingml/2006/main">
+            <a:endParaRPr/>
+          </a:p>
+        </p:txBody>
       </p:sp>
       <p:pic>
         <p:nvPicPr>
-          <p:cNvPr id="41" name=""/>
+          <p:cNvPr id="45" name="Graphic 40"/>
           <p:cNvPicPr>
             <a:picLocks xmlns:a="http://schemas.openxmlformats.org/drawingml/2006/main" noChangeAspect="1"/>
           </p:cNvPicPr>
           <p:nvPr/>
         </p:nvPicPr>
         <p:blipFill>
-          <a:blip xmlns:r="http://schemas.openxmlformats.org/officeDocument/2006/relationships" xmlns:a="http://schemas.openxmlformats.org/drawingml/2006/main" r:embed="Ra9c018d04ac44bb6">
+          <a:blip xmlns:r="http://schemas.openxmlformats.org/officeDocument/2006/relationships" xmlns:a="http://schemas.openxmlformats.org/drawingml/2006/main" r:embed="R88aa9c5bdcf342e6">
             <a:extLst>
               <a:ext uri="{96DAC541-7B7A-43D3-8B79-37D633B846F1}">
-                <asvg:svgBlip xmlns:asvg="http://schemas.microsoft.com/office/drawing/2016/SVG/main" r:embed="R364b57727fba47fe"/>
+                <asvg:svgBlip xmlns:asvg="http://schemas.microsoft.com/office/drawing/2016/SVG/main" r:embed="R45b09ca8248d4e45"/>
               </a:ext>
             </a:extLst>
           </a:blip>
@@ -11858,11 +14048,12 @@
         </p:spPr>
         <p:txBody>
           <a:bodyPr xmlns:a="http://schemas.openxmlformats.org/drawingml/2006/main" wrap="square" lIns="38100" tIns="19050" rIns="38100" bIns="19050" anchor="t">
-            <a:normAutofit fontScale="100000"/>
+            <a:normAutofit/>
           </a:bodyPr>
           <a:lstStyle xmlns:a="http://schemas.openxmlformats.org/drawingml/2006/main"/>
           <a:p xmlns:a="http://schemas.openxmlformats.org/drawingml/2006/main">
             <a:pPr algn="ctr">
+              <a:buNone/>
               <a:defRPr sz="1725" b="1">
                 <a:solidFill>
                   <a:srgbClr val="102A43"/>
@@ -11920,20 +14111,27 @@
             <a:prstDash val="solid"/>
           </a:ln>
         </p:spPr>
+        <p:txBody>
+          <a:bodyPr xmlns:a="http://schemas.openxmlformats.org/drawingml/2006/main"/>
+          <a:lstStyle xmlns:a="http://schemas.openxmlformats.org/drawingml/2006/main"/>
+          <a:p xmlns:a="http://schemas.openxmlformats.org/drawingml/2006/main">
+            <a:endParaRPr/>
+          </a:p>
+        </p:txBody>
       </p:sp>
       <p:pic>
         <p:nvPicPr>
-          <p:cNvPr id="44" name=""/>
+          <p:cNvPr id="48" name="Graphic 43"/>
           <p:cNvPicPr>
             <a:picLocks xmlns:a="http://schemas.openxmlformats.org/drawingml/2006/main" noChangeAspect="1"/>
           </p:cNvPicPr>
           <p:nvPr/>
         </p:nvPicPr>
         <p:blipFill>
-          <a:blip xmlns:r="http://schemas.openxmlformats.org/officeDocument/2006/relationships" xmlns:a="http://schemas.openxmlformats.org/drawingml/2006/main" r:embed="R65f67ee8555743aa">
+          <a:blip xmlns:r="http://schemas.openxmlformats.org/officeDocument/2006/relationships" xmlns:a="http://schemas.openxmlformats.org/drawingml/2006/main" r:embed="Rf09801c4056f403a">
             <a:extLst>
               <a:ext uri="{96DAC541-7B7A-43D3-8B79-37D633B846F1}">
-                <asvg:svgBlip xmlns:asvg="http://schemas.microsoft.com/office/drawing/2016/SVG/main" r:embed="Rcf4b901324af4757"/>
+                <asvg:svgBlip xmlns:asvg="http://schemas.microsoft.com/office/drawing/2016/SVG/main" r:embed="R6088bc9538004fcd"/>
               </a:ext>
             </a:extLst>
           </a:blip>
@@ -11979,7 +14177,7 @@
         </p:spPr>
         <p:txBody>
           <a:bodyPr xmlns:a="http://schemas.openxmlformats.org/drawingml/2006/main" wrap="square" lIns="38100" tIns="38100" rIns="76200" bIns="38100" anchor="t">
-            <a:normAutofit fontScale="100000"/>
+            <a:normAutofit/>
           </a:bodyPr>
           <a:lstStyle xmlns:a="http://schemas.openxmlformats.org/drawingml/2006/main"/>
           <a:p xmlns:a="http://schemas.openxmlformats.org/drawingml/2006/main">
@@ -12254,7 +14452,7 @@
         </p:spPr>
         <p:txBody>
           <a:bodyPr xmlns:a="http://schemas.openxmlformats.org/drawingml/2006/main" wrap="none" lIns="0" tIns="0" rIns="0" bIns="0" anchor="ctr">
-            <a:normAutofit fontScale="100000"/>
+            <a:normAutofit/>
           </a:bodyPr>
           <a:lstStyle xmlns:a="http://schemas.openxmlformats.org/drawingml/2006/main"/>
           <a:p xmlns:a="http://schemas.openxmlformats.org/drawingml/2006/main">
@@ -12315,6 +14513,13 @@
             <a:prstDash val="solid"/>
           </a:ln>
         </p:spPr>
+        <p:txBody>
+          <a:bodyPr xmlns:a="http://schemas.openxmlformats.org/drawingml/2006/main"/>
+          <a:lstStyle xmlns:a="http://schemas.openxmlformats.org/drawingml/2006/main"/>
+          <a:p xmlns:a="http://schemas.openxmlformats.org/drawingml/2006/main">
+            <a:endParaRPr/>
+          </a:p>
+        </p:txBody>
       </p:sp>
       <p:sp>
         <p:nvSpPr>
@@ -12346,7 +14551,7 @@
         </p:spPr>
         <p:txBody>
           <a:bodyPr xmlns:a="http://schemas.openxmlformats.org/drawingml/2006/main" wrap="square" lIns="38100" tIns="19050" rIns="38100" bIns="19050" anchor="t">
-            <a:normAutofit fontScale="100000"/>
+            <a:normAutofit/>
           </a:bodyPr>
           <a:lstStyle xmlns:a="http://schemas.openxmlformats.org/drawingml/2006/main"/>
           <a:p xmlns:a="http://schemas.openxmlformats.org/drawingml/2006/main">
@@ -12405,7 +14610,7 @@
         </p:spPr>
         <p:txBody>
           <a:bodyPr xmlns:a="http://schemas.openxmlformats.org/drawingml/2006/main" wrap="square" lIns="38100" tIns="19050" rIns="38100" bIns="19050" anchor="t">
-            <a:normAutofit fontScale="100000"/>
+            <a:normAutofit/>
           </a:bodyPr>
           <a:lstStyle xmlns:a="http://schemas.openxmlformats.org/drawingml/2006/main"/>
           <a:p xmlns:a="http://schemas.openxmlformats.org/drawingml/2006/main">
@@ -12464,7 +14669,7 @@
         </p:spPr>
         <p:txBody>
           <a:bodyPr xmlns:a="http://schemas.openxmlformats.org/drawingml/2006/main" wrap="square" lIns="38100" tIns="19050" rIns="38100" bIns="19050" anchor="t">
-            <a:normAutofit fontScale="100000"/>
+            <a:normAutofit/>
           </a:bodyPr>
           <a:lstStyle xmlns:a="http://schemas.openxmlformats.org/drawingml/2006/main"/>
           <a:p xmlns:a="http://schemas.openxmlformats.org/drawingml/2006/main">
@@ -12527,17 +14732,24 @@
             <a:prstDash val="solid"/>
           </a:ln>
         </p:spPr>
+        <p:txBody>
+          <a:bodyPr xmlns:a="http://schemas.openxmlformats.org/drawingml/2006/main"/>
+          <a:lstStyle xmlns:a="http://schemas.openxmlformats.org/drawingml/2006/main"/>
+          <a:p xmlns:a="http://schemas.openxmlformats.org/drawingml/2006/main">
+            <a:endParaRPr/>
+          </a:p>
+        </p:txBody>
       </p:sp>
       <p:pic>
         <p:nvPicPr>
-          <p:cNvPr id="34" name=""/>
+          <p:cNvPr id="38" name="Picture 33"/>
           <p:cNvPicPr>
             <a:picLocks xmlns:a="http://schemas.openxmlformats.org/drawingml/2006/main" noChangeAspect="1"/>
           </p:cNvPicPr>
           <p:nvPr/>
         </p:nvPicPr>
         <p:blipFill>
-          <a:blip xmlns:r="http://schemas.openxmlformats.org/officeDocument/2006/relationships" xmlns:a="http://schemas.openxmlformats.org/drawingml/2006/main" r:embed="R55244a07e4d945cd"/>
+          <a:blip xmlns:r="http://schemas.openxmlformats.org/officeDocument/2006/relationships" xmlns:a="http://schemas.openxmlformats.org/drawingml/2006/main" r:embed="R65ae165fe8834e78"/>
           <a:stretch xmlns:a="http://schemas.openxmlformats.org/drawingml/2006/main"/>
         </p:blipFill>
         <p:spPr>
@@ -12584,17 +14796,24 @@
             <a:prstDash val="solid"/>
           </a:ln>
         </p:spPr>
+        <p:txBody>
+          <a:bodyPr xmlns:a="http://schemas.openxmlformats.org/drawingml/2006/main"/>
+          <a:lstStyle xmlns:a="http://schemas.openxmlformats.org/drawingml/2006/main"/>
+          <a:p xmlns:a="http://schemas.openxmlformats.org/drawingml/2006/main">
+            <a:endParaRPr/>
+          </a:p>
+        </p:txBody>
       </p:sp>
       <p:pic>
         <p:nvPicPr>
-          <p:cNvPr id="36" name=""/>
+          <p:cNvPr id="40" name="Picture 35"/>
           <p:cNvPicPr>
             <a:picLocks xmlns:a="http://schemas.openxmlformats.org/drawingml/2006/main" noChangeAspect="1"/>
           </p:cNvPicPr>
           <p:nvPr/>
         </p:nvPicPr>
         <p:blipFill>
-          <a:blip xmlns:r="http://schemas.openxmlformats.org/officeDocument/2006/relationships" xmlns:a="http://schemas.openxmlformats.org/drawingml/2006/main" r:embed="R50f49daff7c541cd"/>
+          <a:blip xmlns:r="http://schemas.openxmlformats.org/officeDocument/2006/relationships" xmlns:a="http://schemas.openxmlformats.org/drawingml/2006/main" r:embed="R65ae165fe8834e78"/>
           <a:stretch xmlns:a="http://schemas.openxmlformats.org/drawingml/2006/main"/>
         </p:blipFill>
         <p:spPr>
@@ -12641,6 +14860,13 @@
             <a:prstDash val="solid"/>
           </a:ln>
         </p:spPr>
+        <p:txBody>
+          <a:bodyPr xmlns:a="http://schemas.openxmlformats.org/drawingml/2006/main"/>
+          <a:lstStyle xmlns:a="http://schemas.openxmlformats.org/drawingml/2006/main"/>
+          <a:p xmlns:a="http://schemas.openxmlformats.org/drawingml/2006/main">
+            <a:endParaRPr/>
+          </a:p>
+        </p:txBody>
       </p:sp>
       <p:sp>
         <p:nvSpPr>
@@ -12674,6 +14900,13 @@
             <a:prstDash val="solid"/>
           </a:ln>
         </p:spPr>
+        <p:txBody>
+          <a:bodyPr xmlns:a="http://schemas.openxmlformats.org/drawingml/2006/main"/>
+          <a:lstStyle xmlns:a="http://schemas.openxmlformats.org/drawingml/2006/main"/>
+          <a:p xmlns:a="http://schemas.openxmlformats.org/drawingml/2006/main">
+            <a:endParaRPr/>
+          </a:p>
+        </p:txBody>
       </p:sp>
       <p:sp>
         <p:nvSpPr>
@@ -12764,7 +14997,7 @@
         </p:spPr>
         <p:txBody>
           <a:bodyPr xmlns:a="http://schemas.openxmlformats.org/drawingml/2006/main" wrap="square" lIns="38100" tIns="38100" rIns="38100" bIns="38100" anchor="ctr">
-            <a:normAutofit fontScale="100000"/>
+            <a:normAutofit/>
           </a:bodyPr>
           <a:lstStyle xmlns:a="http://schemas.openxmlformats.org/drawingml/2006/main"/>
           <a:p xmlns:a="http://schemas.openxmlformats.org/drawingml/2006/main">
@@ -12823,7 +15056,7 @@
         </p:spPr>
         <p:txBody>
           <a:bodyPr xmlns:a="http://schemas.openxmlformats.org/drawingml/2006/main" wrap="none" lIns="0" tIns="0" rIns="0" bIns="0" anchor="ctr">
-            <a:normAutofit fontScale="100000"/>
+            <a:normAutofit/>
           </a:bodyPr>
           <a:lstStyle xmlns:a="http://schemas.openxmlformats.org/drawingml/2006/main"/>
           <a:p xmlns:a="http://schemas.openxmlformats.org/drawingml/2006/main">
@@ -12886,20 +15119,27 @@
             <a:prstDash val="solid"/>
           </a:ln>
         </p:spPr>
+        <p:txBody>
+          <a:bodyPr xmlns:a="http://schemas.openxmlformats.org/drawingml/2006/main"/>
+          <a:lstStyle xmlns:a="http://schemas.openxmlformats.org/drawingml/2006/main"/>
+          <a:p xmlns:a="http://schemas.openxmlformats.org/drawingml/2006/main">
+            <a:endParaRPr/>
+          </a:p>
+        </p:txBody>
       </p:sp>
       <p:pic>
         <p:nvPicPr>
-          <p:cNvPr id="43" name=""/>
+          <p:cNvPr id="47" name="Graphic 42"/>
           <p:cNvPicPr>
             <a:picLocks xmlns:a="http://schemas.openxmlformats.org/drawingml/2006/main" noChangeAspect="1"/>
           </p:cNvPicPr>
           <p:nvPr/>
         </p:nvPicPr>
         <p:blipFill>
-          <a:blip xmlns:r="http://schemas.openxmlformats.org/officeDocument/2006/relationships" xmlns:a="http://schemas.openxmlformats.org/drawingml/2006/main" r:embed="R5ca77a8213c04339">
+          <a:blip xmlns:r="http://schemas.openxmlformats.org/officeDocument/2006/relationships" xmlns:a="http://schemas.openxmlformats.org/drawingml/2006/main" r:embed="Reb02b77c42aa4127">
             <a:extLst>
               <a:ext uri="{96DAC541-7B7A-43D3-8B79-37D633B846F1}">
-                <asvg:svgBlip xmlns:asvg="http://schemas.microsoft.com/office/drawing/2016/SVG/main" r:embed="R85afded9c2994c72"/>
+                <asvg:svgBlip xmlns:asvg="http://schemas.microsoft.com/office/drawing/2016/SVG/main" r:embed="R376d1a0ed4274c62"/>
               </a:ext>
             </a:extLst>
           </a:blip>
@@ -12949,20 +15189,27 @@
             <a:prstDash val="solid"/>
           </a:ln>
         </p:spPr>
+        <p:txBody>
+          <a:bodyPr xmlns:a="http://schemas.openxmlformats.org/drawingml/2006/main"/>
+          <a:lstStyle xmlns:a="http://schemas.openxmlformats.org/drawingml/2006/main"/>
+          <a:p xmlns:a="http://schemas.openxmlformats.org/drawingml/2006/main">
+            <a:endParaRPr/>
+          </a:p>
+        </p:txBody>
       </p:sp>
       <p:pic>
         <p:nvPicPr>
-          <p:cNvPr id="45" name=""/>
+          <p:cNvPr id="49" name="Graphic 44"/>
           <p:cNvPicPr>
             <a:picLocks xmlns:a="http://schemas.openxmlformats.org/drawingml/2006/main" noChangeAspect="1"/>
           </p:cNvPicPr>
           <p:nvPr/>
         </p:nvPicPr>
         <p:blipFill>
-          <a:blip xmlns:r="http://schemas.openxmlformats.org/officeDocument/2006/relationships" xmlns:a="http://schemas.openxmlformats.org/drawingml/2006/main" r:embed="R324cbd51d015447a">
+          <a:blip xmlns:r="http://schemas.openxmlformats.org/officeDocument/2006/relationships" xmlns:a="http://schemas.openxmlformats.org/drawingml/2006/main" r:embed="Rf7fb9306787948ba">
             <a:extLst>
               <a:ext uri="{96DAC541-7B7A-43D3-8B79-37D633B846F1}">
-                <asvg:svgBlip xmlns:asvg="http://schemas.microsoft.com/office/drawing/2016/SVG/main" r:embed="R8a61a1c2bf354a85"/>
+                <asvg:svgBlip xmlns:asvg="http://schemas.microsoft.com/office/drawing/2016/SVG/main" r:embed="R7a8414e9069849c4"/>
               </a:ext>
             </a:extLst>
           </a:blip>
@@ -13008,11 +15255,12 @@
         </p:spPr>
         <p:txBody>
           <a:bodyPr xmlns:a="http://schemas.openxmlformats.org/drawingml/2006/main" wrap="square" lIns="38100" tIns="19050" rIns="38100" bIns="19050" anchor="t">
-            <a:normAutofit fontScale="100000"/>
+            <a:normAutofit/>
           </a:bodyPr>
           <a:lstStyle xmlns:a="http://schemas.openxmlformats.org/drawingml/2006/main"/>
           <a:p xmlns:a="http://schemas.openxmlformats.org/drawingml/2006/main">
             <a:pPr algn="ctr">
+              <a:buNone/>
               <a:defRPr sz="1350">
                 <a:solidFill>
                   <a:srgbClr val="627D98"/>
@@ -13072,11 +15320,12 @@
         </p:spPr>
         <p:txBody>
           <a:bodyPr xmlns:a="http://schemas.openxmlformats.org/drawingml/2006/main" wrap="square" lIns="38100" tIns="9525" rIns="38100" bIns="9525" anchor="ctr">
-            <a:normAutofit fontScale="100000"/>
+            <a:normAutofit/>
           </a:bodyPr>
           <a:lstStyle xmlns:a="http://schemas.openxmlformats.org/drawingml/2006/main"/>
           <a:p xmlns:a="http://schemas.openxmlformats.org/drawingml/2006/main">
             <a:pPr algn="ctr">
+              <a:buNone/>
               <a:defRPr sz="975" b="1">
                 <a:solidFill>
                   <a:srgbClr val="FFFFFF"/>
@@ -13130,7 +15379,7 @@
         </p:spPr>
         <p:txBody>
           <a:bodyPr xmlns:a="http://schemas.openxmlformats.org/drawingml/2006/main" wrap="square" lIns="38100" tIns="38100" rIns="76200" bIns="38100" anchor="t">
-            <a:normAutofit fontScale="100000"/>
+            <a:normAutofit/>
           </a:bodyPr>
           <a:lstStyle xmlns:a="http://schemas.openxmlformats.org/drawingml/2006/main"/>
           <a:p xmlns:a="http://schemas.openxmlformats.org/drawingml/2006/main">
@@ -13246,11 +15495,12 @@
         </p:spPr>
         <p:txBody>
           <a:bodyPr xmlns:a="http://schemas.openxmlformats.org/drawingml/2006/main" wrap="square" lIns="38100" tIns="19050" rIns="38100" bIns="19050" anchor="t">
-            <a:normAutofit fontScale="100000"/>
+            <a:normAutofit/>
           </a:bodyPr>
           <a:lstStyle xmlns:a="http://schemas.openxmlformats.org/drawingml/2006/main"/>
           <a:p xmlns:a="http://schemas.openxmlformats.org/drawingml/2006/main">
             <a:pPr algn="ctr">
+              <a:buNone/>
               <a:defRPr sz="1575" b="1">
                 <a:solidFill>
                   <a:srgbClr val="C65D16"/>
@@ -13392,7 +15642,7 @@
         </p:spPr>
         <p:txBody>
           <a:bodyPr xmlns:a="http://schemas.openxmlformats.org/drawingml/2006/main" wrap="none" lIns="0" tIns="0" rIns="0" bIns="0" anchor="ctr">
-            <a:normAutofit fontScale="100000"/>
+            <a:normAutofit/>
           </a:bodyPr>
           <a:lstStyle xmlns:a="http://schemas.openxmlformats.org/drawingml/2006/main"/>
           <a:p xmlns:a="http://schemas.openxmlformats.org/drawingml/2006/main">
@@ -13453,6 +15703,13 @@
             <a:prstDash val="solid"/>
           </a:ln>
         </p:spPr>
+        <p:txBody>
+          <a:bodyPr xmlns:a="http://schemas.openxmlformats.org/drawingml/2006/main"/>
+          <a:lstStyle xmlns:a="http://schemas.openxmlformats.org/drawingml/2006/main"/>
+          <a:p xmlns:a="http://schemas.openxmlformats.org/drawingml/2006/main">
+            <a:endParaRPr/>
+          </a:p>
+        </p:txBody>
       </p:sp>
       <p:sp>
         <p:nvSpPr>
@@ -13484,7 +15741,7 @@
         </p:spPr>
         <p:txBody>
           <a:bodyPr xmlns:a="http://schemas.openxmlformats.org/drawingml/2006/main" wrap="square" lIns="38100" tIns="19050" rIns="38100" bIns="19050" anchor="t">
-            <a:normAutofit fontScale="100000"/>
+            <a:normAutofit/>
           </a:bodyPr>
           <a:lstStyle xmlns:a="http://schemas.openxmlformats.org/drawingml/2006/main"/>
           <a:p xmlns:a="http://schemas.openxmlformats.org/drawingml/2006/main">
@@ -13543,7 +15800,7 @@
         </p:spPr>
         <p:txBody>
           <a:bodyPr xmlns:a="http://schemas.openxmlformats.org/drawingml/2006/main" wrap="square" lIns="38100" tIns="19050" rIns="38100" bIns="19050" anchor="t">
-            <a:normAutofit fontScale="100000"/>
+            <a:normAutofit/>
           </a:bodyPr>
           <a:lstStyle xmlns:a="http://schemas.openxmlformats.org/drawingml/2006/main"/>
           <a:p xmlns:a="http://schemas.openxmlformats.org/drawingml/2006/main">
@@ -13602,7 +15859,7 @@
         </p:spPr>
         <p:txBody>
           <a:bodyPr xmlns:a="http://schemas.openxmlformats.org/drawingml/2006/main" wrap="square" lIns="38100" tIns="19050" rIns="38100" bIns="19050" anchor="t">
-            <a:normAutofit fontScale="100000"/>
+            <a:normAutofit/>
           </a:bodyPr>
           <a:lstStyle xmlns:a="http://schemas.openxmlformats.org/drawingml/2006/main"/>
           <a:p xmlns:a="http://schemas.openxmlformats.org/drawingml/2006/main">
@@ -13665,17 +15922,24 @@
             <a:prstDash val="solid"/>
           </a:ln>
         </p:spPr>
+        <p:txBody>
+          <a:bodyPr xmlns:a="http://schemas.openxmlformats.org/drawingml/2006/main"/>
+          <a:lstStyle xmlns:a="http://schemas.openxmlformats.org/drawingml/2006/main"/>
+          <a:p xmlns:a="http://schemas.openxmlformats.org/drawingml/2006/main">
+            <a:endParaRPr/>
+          </a:p>
+        </p:txBody>
       </p:sp>
       <p:pic>
         <p:nvPicPr>
-          <p:cNvPr id="34" name=""/>
+          <p:cNvPr id="38" name="Picture 33"/>
           <p:cNvPicPr>
             <a:picLocks xmlns:a="http://schemas.openxmlformats.org/drawingml/2006/main" noChangeAspect="1"/>
           </p:cNvPicPr>
           <p:nvPr/>
         </p:nvPicPr>
         <p:blipFill>
-          <a:blip xmlns:r="http://schemas.openxmlformats.org/officeDocument/2006/relationships" xmlns:a="http://schemas.openxmlformats.org/drawingml/2006/main" r:embed="Re77d04afa95a4ec5"/>
+          <a:blip xmlns:r="http://schemas.openxmlformats.org/officeDocument/2006/relationships" xmlns:a="http://schemas.openxmlformats.org/drawingml/2006/main" r:embed="R4dadada2d68642af"/>
           <a:stretch xmlns:a="http://schemas.openxmlformats.org/drawingml/2006/main"/>
         </p:blipFill>
         <p:spPr>
@@ -13722,17 +15986,24 @@
             <a:prstDash val="solid"/>
           </a:ln>
         </p:spPr>
+        <p:txBody>
+          <a:bodyPr xmlns:a="http://schemas.openxmlformats.org/drawingml/2006/main"/>
+          <a:lstStyle xmlns:a="http://schemas.openxmlformats.org/drawingml/2006/main"/>
+          <a:p xmlns:a="http://schemas.openxmlformats.org/drawingml/2006/main">
+            <a:endParaRPr/>
+          </a:p>
+        </p:txBody>
       </p:sp>
       <p:pic>
         <p:nvPicPr>
-          <p:cNvPr id="36" name=""/>
+          <p:cNvPr id="40" name="Picture 35"/>
           <p:cNvPicPr>
             <a:picLocks xmlns:a="http://schemas.openxmlformats.org/drawingml/2006/main" noChangeAspect="1"/>
           </p:cNvPicPr>
           <p:nvPr/>
         </p:nvPicPr>
         <p:blipFill>
-          <a:blip xmlns:r="http://schemas.openxmlformats.org/officeDocument/2006/relationships" xmlns:a="http://schemas.openxmlformats.org/drawingml/2006/main" r:embed="R499e0d765c0c4e96"/>
+          <a:blip xmlns:r="http://schemas.openxmlformats.org/officeDocument/2006/relationships" xmlns:a="http://schemas.openxmlformats.org/drawingml/2006/main" r:embed="R4dadada2d68642af"/>
           <a:stretch xmlns:a="http://schemas.openxmlformats.org/drawingml/2006/main"/>
         </p:blipFill>
         <p:spPr>
@@ -13779,6 +16050,13 @@
             <a:prstDash val="solid"/>
           </a:ln>
         </p:spPr>
+        <p:txBody>
+          <a:bodyPr xmlns:a="http://schemas.openxmlformats.org/drawingml/2006/main"/>
+          <a:lstStyle xmlns:a="http://schemas.openxmlformats.org/drawingml/2006/main"/>
+          <a:p xmlns:a="http://schemas.openxmlformats.org/drawingml/2006/main">
+            <a:endParaRPr/>
+          </a:p>
+        </p:txBody>
       </p:sp>
       <p:sp>
         <p:nvSpPr>
@@ -13812,6 +16090,13 @@
             <a:prstDash val="solid"/>
           </a:ln>
         </p:spPr>
+        <p:txBody>
+          <a:bodyPr xmlns:a="http://schemas.openxmlformats.org/drawingml/2006/main"/>
+          <a:lstStyle xmlns:a="http://schemas.openxmlformats.org/drawingml/2006/main"/>
+          <a:p xmlns:a="http://schemas.openxmlformats.org/drawingml/2006/main">
+            <a:endParaRPr/>
+          </a:p>
+        </p:txBody>
       </p:sp>
       <p:sp>
         <p:nvSpPr>
@@ -13902,7 +16187,7 @@
         </p:spPr>
         <p:txBody>
           <a:bodyPr xmlns:a="http://schemas.openxmlformats.org/drawingml/2006/main" wrap="square" lIns="38100" tIns="38100" rIns="38100" bIns="38100" anchor="ctr">
-            <a:normAutofit fontScale="100000"/>
+            <a:normAutofit/>
           </a:bodyPr>
           <a:lstStyle xmlns:a="http://schemas.openxmlformats.org/drawingml/2006/main"/>
           <a:p xmlns:a="http://schemas.openxmlformats.org/drawingml/2006/main">
@@ -13961,7 +16246,7 @@
         </p:spPr>
         <p:txBody>
           <a:bodyPr xmlns:a="http://schemas.openxmlformats.org/drawingml/2006/main" wrap="none" lIns="0" tIns="0" rIns="0" bIns="0" anchor="ctr">
-            <a:normAutofit fontScale="100000"/>
+            <a:normAutofit/>
           </a:bodyPr>
           <a:lstStyle xmlns:a="http://schemas.openxmlformats.org/drawingml/2006/main"/>
           <a:p xmlns:a="http://schemas.openxmlformats.org/drawingml/2006/main">
@@ -14024,20 +16309,27 @@
             <a:prstDash val="solid"/>
           </a:ln>
         </p:spPr>
+        <p:txBody>
+          <a:bodyPr xmlns:a="http://schemas.openxmlformats.org/drawingml/2006/main"/>
+          <a:lstStyle xmlns:a="http://schemas.openxmlformats.org/drawingml/2006/main"/>
+          <a:p xmlns:a="http://schemas.openxmlformats.org/drawingml/2006/main">
+            <a:endParaRPr/>
+          </a:p>
+        </p:txBody>
       </p:sp>
       <p:pic>
         <p:nvPicPr>
-          <p:cNvPr id="43" name=""/>
+          <p:cNvPr id="47" name="Graphic 42"/>
           <p:cNvPicPr>
             <a:picLocks xmlns:a="http://schemas.openxmlformats.org/drawingml/2006/main" noChangeAspect="1"/>
           </p:cNvPicPr>
           <p:nvPr/>
         </p:nvPicPr>
         <p:blipFill>
-          <a:blip xmlns:r="http://schemas.openxmlformats.org/officeDocument/2006/relationships" xmlns:a="http://schemas.openxmlformats.org/drawingml/2006/main" r:embed="R17a715eb47724f7f">
+          <a:blip xmlns:r="http://schemas.openxmlformats.org/officeDocument/2006/relationships" xmlns:a="http://schemas.openxmlformats.org/drawingml/2006/main" r:embed="Re58f47d05b5142a7">
             <a:extLst>
               <a:ext uri="{96DAC541-7B7A-43D3-8B79-37D633B846F1}">
-                <asvg:svgBlip xmlns:asvg="http://schemas.microsoft.com/office/drawing/2016/SVG/main" r:embed="Rbb976538058b4ffc"/>
+                <asvg:svgBlip xmlns:asvg="http://schemas.microsoft.com/office/drawing/2016/SVG/main" r:embed="Rdc057caeaabb49e7"/>
               </a:ext>
             </a:extLst>
           </a:blip>
@@ -14083,11 +16375,12 @@
         </p:spPr>
         <p:txBody>
           <a:bodyPr xmlns:a="http://schemas.openxmlformats.org/drawingml/2006/main" wrap="square" lIns="38100" tIns="19050" rIns="38100" bIns="19050" anchor="t">
-            <a:normAutofit fontScale="100000"/>
+            <a:normAutofit/>
           </a:bodyPr>
           <a:lstStyle xmlns:a="http://schemas.openxmlformats.org/drawingml/2006/main"/>
           <a:p xmlns:a="http://schemas.openxmlformats.org/drawingml/2006/main">
             <a:pPr algn="ctr">
+              <a:buNone/>
               <a:defRPr sz="1575">
                 <a:solidFill>
                   <a:srgbClr val="1F2933"/>
@@ -14141,11 +16434,12 @@
         </p:spPr>
         <p:txBody>
           <a:bodyPr xmlns:a="http://schemas.openxmlformats.org/drawingml/2006/main" wrap="square" lIns="38100" tIns="19050" rIns="38100" bIns="19050" anchor="t">
-            <a:normAutofit fontScale="100000"/>
+            <a:normAutofit/>
           </a:bodyPr>
           <a:lstStyle xmlns:a="http://schemas.openxmlformats.org/drawingml/2006/main"/>
           <a:p xmlns:a="http://schemas.openxmlformats.org/drawingml/2006/main">
             <a:pPr algn="ctr">
+              <a:buNone/>
               <a:defRPr sz="1650" b="1">
                 <a:solidFill>
                   <a:srgbClr val="102A43"/>
@@ -14203,20 +16497,27 @@
             <a:prstDash val="solid"/>
           </a:ln>
         </p:spPr>
+        <p:txBody>
+          <a:bodyPr xmlns:a="http://schemas.openxmlformats.org/drawingml/2006/main"/>
+          <a:lstStyle xmlns:a="http://schemas.openxmlformats.org/drawingml/2006/main"/>
+          <a:p xmlns:a="http://schemas.openxmlformats.org/drawingml/2006/main">
+            <a:endParaRPr/>
+          </a:p>
+        </p:txBody>
       </p:sp>
       <p:pic>
         <p:nvPicPr>
-          <p:cNvPr id="47" name=""/>
+          <p:cNvPr id="51" name="Graphic 46"/>
           <p:cNvPicPr>
             <a:picLocks xmlns:a="http://schemas.openxmlformats.org/drawingml/2006/main" noChangeAspect="1"/>
           </p:cNvPicPr>
           <p:nvPr/>
         </p:nvPicPr>
         <p:blipFill>
-          <a:blip xmlns:r="http://schemas.openxmlformats.org/officeDocument/2006/relationships" xmlns:a="http://schemas.openxmlformats.org/drawingml/2006/main" r:embed="Reafc5e7987624dc5">
+          <a:blip xmlns:r="http://schemas.openxmlformats.org/officeDocument/2006/relationships" xmlns:a="http://schemas.openxmlformats.org/drawingml/2006/main" r:embed="R953b183823d34f22">
             <a:extLst>
               <a:ext uri="{96DAC541-7B7A-43D3-8B79-37D633B846F1}">
-                <asvg:svgBlip xmlns:asvg="http://schemas.microsoft.com/office/drawing/2016/SVG/main" r:embed="Ra80abd065019422b"/>
+                <asvg:svgBlip xmlns:asvg="http://schemas.microsoft.com/office/drawing/2016/SVG/main" r:embed="Rbab90a962ebf4cf0"/>
               </a:ext>
             </a:extLst>
           </a:blip>
@@ -14267,6 +16568,7 @@
           <a:lstStyle xmlns:a="http://schemas.openxmlformats.org/drawingml/2006/main"/>
           <a:p xmlns:a="http://schemas.openxmlformats.org/drawingml/2006/main">
             <a:pPr algn="ctr">
+              <a:buNone/>
               <a:defRPr sz="1650" b="1">
                 <a:solidFill>
                   <a:srgbClr val="102A43"/>
@@ -14326,11 +16628,12 @@
         </p:spPr>
         <p:txBody>
           <a:bodyPr xmlns:a="http://schemas.openxmlformats.org/drawingml/2006/main" wrap="square" lIns="38100" tIns="9525" rIns="38100" bIns="9525" anchor="ctr">
-            <a:normAutofit fontScale="100000"/>
+            <a:normAutofit/>
           </a:bodyPr>
           <a:lstStyle xmlns:a="http://schemas.openxmlformats.org/drawingml/2006/main"/>
           <a:p xmlns:a="http://schemas.openxmlformats.org/drawingml/2006/main">
             <a:pPr algn="ctr">
+              <a:buNone/>
               <a:defRPr sz="975" b="1">
                 <a:solidFill>
                   <a:srgbClr val="FFFFFF"/>
@@ -14472,7 +16775,7 @@
         </p:spPr>
         <p:txBody>
           <a:bodyPr xmlns:a="http://schemas.openxmlformats.org/drawingml/2006/main" wrap="none" lIns="0" tIns="0" rIns="0" bIns="0" anchor="ctr">
-            <a:normAutofit fontScale="100000"/>
+            <a:normAutofit/>
           </a:bodyPr>
           <a:lstStyle xmlns:a="http://schemas.openxmlformats.org/drawingml/2006/main"/>
           <a:p xmlns:a="http://schemas.openxmlformats.org/drawingml/2006/main">
@@ -14533,6 +16836,13 @@
             <a:prstDash val="solid"/>
           </a:ln>
         </p:spPr>
+        <p:txBody>
+          <a:bodyPr xmlns:a="http://schemas.openxmlformats.org/drawingml/2006/main"/>
+          <a:lstStyle xmlns:a="http://schemas.openxmlformats.org/drawingml/2006/main"/>
+          <a:p xmlns:a="http://schemas.openxmlformats.org/drawingml/2006/main">
+            <a:endParaRPr/>
+          </a:p>
+        </p:txBody>
       </p:sp>
       <p:sp>
         <p:nvSpPr>
@@ -14564,7 +16874,7 @@
         </p:spPr>
         <p:txBody>
           <a:bodyPr xmlns:a="http://schemas.openxmlformats.org/drawingml/2006/main" wrap="square" lIns="38100" tIns="19050" rIns="38100" bIns="19050" anchor="t">
-            <a:normAutofit fontScale="100000"/>
+            <a:normAutofit/>
           </a:bodyPr>
           <a:lstStyle xmlns:a="http://schemas.openxmlformats.org/drawingml/2006/main"/>
           <a:p xmlns:a="http://schemas.openxmlformats.org/drawingml/2006/main">
@@ -14623,7 +16933,7 @@
         </p:spPr>
         <p:txBody>
           <a:bodyPr xmlns:a="http://schemas.openxmlformats.org/drawingml/2006/main" wrap="square" lIns="38100" tIns="19050" rIns="38100" bIns="19050" anchor="t">
-            <a:normAutofit fontScale="100000"/>
+            <a:normAutofit/>
           </a:bodyPr>
           <a:lstStyle xmlns:a="http://schemas.openxmlformats.org/drawingml/2006/main"/>
           <a:p xmlns:a="http://schemas.openxmlformats.org/drawingml/2006/main">
@@ -14682,7 +16992,7 @@
         </p:spPr>
         <p:txBody>
           <a:bodyPr xmlns:a="http://schemas.openxmlformats.org/drawingml/2006/main" wrap="square" lIns="38100" tIns="19050" rIns="38100" bIns="19050" anchor="t">
-            <a:normAutofit fontScale="100000"/>
+            <a:normAutofit/>
           </a:bodyPr>
           <a:lstStyle xmlns:a="http://schemas.openxmlformats.org/drawingml/2006/main"/>
           <a:p xmlns:a="http://schemas.openxmlformats.org/drawingml/2006/main">
@@ -14745,17 +17055,24 @@
             <a:prstDash val="solid"/>
           </a:ln>
         </p:spPr>
+        <p:txBody>
+          <a:bodyPr xmlns:a="http://schemas.openxmlformats.org/drawingml/2006/main"/>
+          <a:lstStyle xmlns:a="http://schemas.openxmlformats.org/drawingml/2006/main"/>
+          <a:p xmlns:a="http://schemas.openxmlformats.org/drawingml/2006/main">
+            <a:endParaRPr/>
+          </a:p>
+        </p:txBody>
       </p:sp>
       <p:pic>
         <p:nvPicPr>
-          <p:cNvPr id="31" name=""/>
+          <p:cNvPr id="34" name="Picture 30"/>
           <p:cNvPicPr>
             <a:picLocks xmlns:a="http://schemas.openxmlformats.org/drawingml/2006/main" noChangeAspect="1"/>
           </p:cNvPicPr>
           <p:nvPr/>
         </p:nvPicPr>
         <p:blipFill>
-          <a:blip xmlns:r="http://schemas.openxmlformats.org/officeDocument/2006/relationships" xmlns:a="http://schemas.openxmlformats.org/drawingml/2006/main" r:embed="Rd4ef5e0a7feb487e"/>
+          <a:blip xmlns:r="http://schemas.openxmlformats.org/officeDocument/2006/relationships" xmlns:a="http://schemas.openxmlformats.org/drawingml/2006/main" r:embed="R824f17a916154937"/>
           <a:stretch xmlns:a="http://schemas.openxmlformats.org/drawingml/2006/main"/>
         </p:blipFill>
         <p:spPr>
@@ -14802,17 +17119,24 @@
             <a:prstDash val="solid"/>
           </a:ln>
         </p:spPr>
+        <p:txBody>
+          <a:bodyPr xmlns:a="http://schemas.openxmlformats.org/drawingml/2006/main"/>
+          <a:lstStyle xmlns:a="http://schemas.openxmlformats.org/drawingml/2006/main"/>
+          <a:p xmlns:a="http://schemas.openxmlformats.org/drawingml/2006/main">
+            <a:endParaRPr/>
+          </a:p>
+        </p:txBody>
       </p:sp>
       <p:pic>
         <p:nvPicPr>
-          <p:cNvPr id="33" name=""/>
+          <p:cNvPr id="36" name="Picture 32"/>
           <p:cNvPicPr>
             <a:picLocks xmlns:a="http://schemas.openxmlformats.org/drawingml/2006/main" noChangeAspect="1"/>
           </p:cNvPicPr>
           <p:nvPr/>
         </p:nvPicPr>
         <p:blipFill>
-          <a:blip xmlns:r="http://schemas.openxmlformats.org/officeDocument/2006/relationships" xmlns:a="http://schemas.openxmlformats.org/drawingml/2006/main" r:embed="R666078c94bad436d"/>
+          <a:blip xmlns:r="http://schemas.openxmlformats.org/officeDocument/2006/relationships" xmlns:a="http://schemas.openxmlformats.org/drawingml/2006/main" r:embed="R824f17a916154937"/>
           <a:stretch xmlns:a="http://schemas.openxmlformats.org/drawingml/2006/main"/>
         </p:blipFill>
         <p:spPr>
@@ -14859,6 +17183,13 @@
             <a:prstDash val="solid"/>
           </a:ln>
         </p:spPr>
+        <p:txBody>
+          <a:bodyPr xmlns:a="http://schemas.openxmlformats.org/drawingml/2006/main"/>
+          <a:lstStyle xmlns:a="http://schemas.openxmlformats.org/drawingml/2006/main"/>
+          <a:p xmlns:a="http://schemas.openxmlformats.org/drawingml/2006/main">
+            <a:endParaRPr/>
+          </a:p>
+        </p:txBody>
       </p:sp>
       <p:sp>
         <p:nvSpPr>
@@ -14892,6 +17223,13 @@
             <a:prstDash val="solid"/>
           </a:ln>
         </p:spPr>
+        <p:txBody>
+          <a:bodyPr xmlns:a="http://schemas.openxmlformats.org/drawingml/2006/main"/>
+          <a:lstStyle xmlns:a="http://schemas.openxmlformats.org/drawingml/2006/main"/>
+          <a:p xmlns:a="http://schemas.openxmlformats.org/drawingml/2006/main">
+            <a:endParaRPr/>
+          </a:p>
+        </p:txBody>
       </p:sp>
       <p:sp>
         <p:nvSpPr>
@@ -14982,7 +17320,7 @@
         </p:spPr>
         <p:txBody>
           <a:bodyPr xmlns:a="http://schemas.openxmlformats.org/drawingml/2006/main" wrap="square" lIns="38100" tIns="38100" rIns="38100" bIns="38100" anchor="ctr">
-            <a:normAutofit fontScale="100000"/>
+            <a:normAutofit/>
           </a:bodyPr>
           <a:lstStyle xmlns:a="http://schemas.openxmlformats.org/drawingml/2006/main"/>
           <a:p xmlns:a="http://schemas.openxmlformats.org/drawingml/2006/main">
@@ -15041,7 +17379,7 @@
         </p:spPr>
         <p:txBody>
           <a:bodyPr xmlns:a="http://schemas.openxmlformats.org/drawingml/2006/main" wrap="none" lIns="0" tIns="0" rIns="0" bIns="0" anchor="ctr">
-            <a:normAutofit fontScale="100000"/>
+            <a:normAutofit/>
           </a:bodyPr>
           <a:lstStyle xmlns:a="http://schemas.openxmlformats.org/drawingml/2006/main"/>
           <a:p xmlns:a="http://schemas.openxmlformats.org/drawingml/2006/main">
@@ -15104,20 +17442,27 @@
             <a:prstDash val="solid"/>
           </a:ln>
         </p:spPr>
+        <p:txBody>
+          <a:bodyPr xmlns:a="http://schemas.openxmlformats.org/drawingml/2006/main"/>
+          <a:lstStyle xmlns:a="http://schemas.openxmlformats.org/drawingml/2006/main"/>
+          <a:p xmlns:a="http://schemas.openxmlformats.org/drawingml/2006/main">
+            <a:endParaRPr/>
+          </a:p>
+        </p:txBody>
       </p:sp>
       <p:pic>
         <p:nvPicPr>
-          <p:cNvPr id="40" name=""/>
+          <p:cNvPr id="43" name="Graphic 39"/>
           <p:cNvPicPr>
             <a:picLocks xmlns:a="http://schemas.openxmlformats.org/drawingml/2006/main" noChangeAspect="1"/>
           </p:cNvPicPr>
           <p:nvPr/>
         </p:nvPicPr>
         <p:blipFill>
-          <a:blip xmlns:r="http://schemas.openxmlformats.org/officeDocument/2006/relationships" xmlns:a="http://schemas.openxmlformats.org/drawingml/2006/main" r:embed="R38aa1c17252b42e0">
+          <a:blip xmlns:r="http://schemas.openxmlformats.org/officeDocument/2006/relationships" xmlns:a="http://schemas.openxmlformats.org/drawingml/2006/main" r:embed="R8c51f829fe6346ec">
             <a:extLst>
               <a:ext uri="{96DAC541-7B7A-43D3-8B79-37D633B846F1}">
-                <asvg:svgBlip xmlns:asvg="http://schemas.microsoft.com/office/drawing/2016/SVG/main" r:embed="Rc13bf06a113b4381"/>
+                <asvg:svgBlip xmlns:asvg="http://schemas.microsoft.com/office/drawing/2016/SVG/main" r:embed="R19cfa18e22c349d6"/>
               </a:ext>
             </a:extLst>
           </a:blip>
@@ -15163,7 +17508,7 @@
         </p:spPr>
         <p:txBody>
           <a:bodyPr xmlns:a="http://schemas.openxmlformats.org/drawingml/2006/main" wrap="square" lIns="38100" tIns="38100" rIns="76200" bIns="38100" anchor="t">
-            <a:normAutofit fontScale="100000"/>
+            <a:normAutofit/>
           </a:bodyPr>
           <a:lstStyle xmlns:a="http://schemas.openxmlformats.org/drawingml/2006/main"/>
           <a:p xmlns:a="http://schemas.openxmlformats.org/drawingml/2006/main">
@@ -15190,7 +17535,18 @@
                 <a:ea typeface="Calibri"/>
                 <a:cs typeface="Calibri"/>
               </a:rPr>
-              <a:t>Δ wealth:</a:t>
+              <a:t>Δ</a:t>
+            </a:r>
+            <a:r>
+              <a:rPr sz="1425" b="1">
+                <a:solidFill>
+                  <a:srgbClr val="1F2933"/>
+                </a:solidFill>
+                <a:latin typeface="Calibri"/>
+                <a:ea typeface="Calibri"/>
+                <a:cs typeface="Calibri"/>
+              </a:rPr>
+              <a:t> wealth:</a:t>
             </a:r>
             <a:r>
               <a:rPr sz="1425">
@@ -15266,7 +17622,18 @@
                 <a:ea typeface="Calibri"/>
                 <a:cs typeface="Calibri"/>
               </a:rPr>
-              <a:t>Θ_g,t:</a:t>
+              <a:t>Θ_g,t</a:t>
+            </a:r>
+            <a:r>
+              <a:rPr sz="1425" b="1">
+                <a:solidFill>
+                  <a:srgbClr val="1F2933"/>
+                </a:solidFill>
+                <a:latin typeface="Calibri"/>
+                <a:ea typeface="Calibri"/>
+                <a:cs typeface="Calibri"/>
+              </a:rPr>
+              <a:t>:</a:t>
             </a:r>
             <a:r>
               <a:rPr sz="1425">
@@ -15312,7 +17679,7 @@
         </p:spPr>
         <p:txBody>
           <a:bodyPr xmlns:a="http://schemas.openxmlformats.org/drawingml/2006/main" wrap="square" lIns="38100" tIns="38100" rIns="76200" bIns="38100" anchor="t">
-            <a:normAutofit fontScale="100000"/>
+            <a:normAutofit/>
           </a:bodyPr>
           <a:lstStyle xmlns:a="http://schemas.openxmlformats.org/drawingml/2006/main"/>
           <a:p xmlns:a="http://schemas.openxmlformats.org/drawingml/2006/main">
@@ -15499,11 +17866,12 @@
         </p:spPr>
         <p:txBody>
           <a:bodyPr xmlns:a="http://schemas.openxmlformats.org/drawingml/2006/main" wrap="square" lIns="38100" tIns="19050" rIns="38100" bIns="19050" anchor="t">
-            <a:normAutofit fontScale="100000"/>
+            <a:normAutofit/>
           </a:bodyPr>
           <a:lstStyle xmlns:a="http://schemas.openxmlformats.org/drawingml/2006/main"/>
           <a:p xmlns:a="http://schemas.openxmlformats.org/drawingml/2006/main">
             <a:pPr algn="ctr">
+              <a:buNone/>
               <a:defRPr sz="1425" b="1">
                 <a:solidFill>
                   <a:srgbClr val="C65D16"/>
@@ -15645,7 +18013,7 @@
         </p:spPr>
         <p:txBody>
           <a:bodyPr xmlns:a="http://schemas.openxmlformats.org/drawingml/2006/main" wrap="none" lIns="0" tIns="0" rIns="0" bIns="0" anchor="ctr">
-            <a:normAutofit fontScale="100000"/>
+            <a:normAutofit/>
           </a:bodyPr>
           <a:lstStyle xmlns:a="http://schemas.openxmlformats.org/drawingml/2006/main"/>
           <a:p xmlns:a="http://schemas.openxmlformats.org/drawingml/2006/main">
@@ -15706,6 +18074,13 @@
             <a:prstDash val="solid"/>
           </a:ln>
         </p:spPr>
+        <p:txBody>
+          <a:bodyPr xmlns:a="http://schemas.openxmlformats.org/drawingml/2006/main"/>
+          <a:lstStyle xmlns:a="http://schemas.openxmlformats.org/drawingml/2006/main"/>
+          <a:p xmlns:a="http://schemas.openxmlformats.org/drawingml/2006/main">
+            <a:endParaRPr/>
+          </a:p>
+        </p:txBody>
       </p:sp>
       <p:sp>
         <p:nvSpPr>
@@ -15737,7 +18112,7 @@
         </p:spPr>
         <p:txBody>
           <a:bodyPr xmlns:a="http://schemas.openxmlformats.org/drawingml/2006/main" wrap="square" lIns="38100" tIns="19050" rIns="38100" bIns="19050" anchor="t">
-            <a:normAutofit fontScale="100000"/>
+            <a:normAutofit/>
           </a:bodyPr>
           <a:lstStyle xmlns:a="http://schemas.openxmlformats.org/drawingml/2006/main"/>
           <a:p xmlns:a="http://schemas.openxmlformats.org/drawingml/2006/main">
@@ -15796,7 +18171,7 @@
         </p:spPr>
         <p:txBody>
           <a:bodyPr xmlns:a="http://schemas.openxmlformats.org/drawingml/2006/main" wrap="square" lIns="38100" tIns="19050" rIns="38100" bIns="19050" anchor="t">
-            <a:normAutofit fontScale="100000"/>
+            <a:normAutofit/>
           </a:bodyPr>
           <a:lstStyle xmlns:a="http://schemas.openxmlformats.org/drawingml/2006/main"/>
           <a:p xmlns:a="http://schemas.openxmlformats.org/drawingml/2006/main">
@@ -15855,7 +18230,7 @@
         </p:spPr>
         <p:txBody>
           <a:bodyPr xmlns:a="http://schemas.openxmlformats.org/drawingml/2006/main" wrap="square" lIns="38100" tIns="19050" rIns="38100" bIns="19050" anchor="t">
-            <a:normAutofit fontScale="100000"/>
+            <a:normAutofit/>
           </a:bodyPr>
           <a:lstStyle xmlns:a="http://schemas.openxmlformats.org/drawingml/2006/main"/>
           <a:p xmlns:a="http://schemas.openxmlformats.org/drawingml/2006/main">
@@ -15918,17 +18293,24 @@
             <a:prstDash val="solid"/>
           </a:ln>
         </p:spPr>
+        <p:txBody>
+          <a:bodyPr xmlns:a="http://schemas.openxmlformats.org/drawingml/2006/main"/>
+          <a:lstStyle xmlns:a="http://schemas.openxmlformats.org/drawingml/2006/main"/>
+          <a:p xmlns:a="http://schemas.openxmlformats.org/drawingml/2006/main">
+            <a:endParaRPr/>
+          </a:p>
+        </p:txBody>
       </p:sp>
       <p:pic>
         <p:nvPicPr>
-          <p:cNvPr id="39" name=""/>
+          <p:cNvPr id="41" name="Picture 38"/>
           <p:cNvPicPr>
             <a:picLocks xmlns:a="http://schemas.openxmlformats.org/drawingml/2006/main" noChangeAspect="1"/>
           </p:cNvPicPr>
           <p:nvPr/>
         </p:nvPicPr>
         <p:blipFill>
-          <a:blip xmlns:r="http://schemas.openxmlformats.org/officeDocument/2006/relationships" xmlns:a="http://schemas.openxmlformats.org/drawingml/2006/main" r:embed="R619aec5a96ef4d94"/>
+          <a:blip xmlns:r="http://schemas.openxmlformats.org/officeDocument/2006/relationships" xmlns:a="http://schemas.openxmlformats.org/drawingml/2006/main" r:embed="R0e251a83f2b744e4"/>
           <a:stretch xmlns:a="http://schemas.openxmlformats.org/drawingml/2006/main"/>
         </p:blipFill>
         <p:spPr>
@@ -15975,17 +18357,24 @@
             <a:prstDash val="solid"/>
           </a:ln>
         </p:spPr>
+        <p:txBody>
+          <a:bodyPr xmlns:a="http://schemas.openxmlformats.org/drawingml/2006/main"/>
+          <a:lstStyle xmlns:a="http://schemas.openxmlformats.org/drawingml/2006/main"/>
+          <a:p xmlns:a="http://schemas.openxmlformats.org/drawingml/2006/main">
+            <a:endParaRPr/>
+          </a:p>
+        </p:txBody>
       </p:sp>
       <p:pic>
         <p:nvPicPr>
-          <p:cNvPr id="41" name=""/>
+          <p:cNvPr id="43" name="Picture 40"/>
           <p:cNvPicPr>
             <a:picLocks xmlns:a="http://schemas.openxmlformats.org/drawingml/2006/main" noChangeAspect="1"/>
           </p:cNvPicPr>
           <p:nvPr/>
         </p:nvPicPr>
         <p:blipFill>
-          <a:blip xmlns:r="http://schemas.openxmlformats.org/officeDocument/2006/relationships" xmlns:a="http://schemas.openxmlformats.org/drawingml/2006/main" r:embed="R98073dbfed734f49"/>
+          <a:blip xmlns:r="http://schemas.openxmlformats.org/officeDocument/2006/relationships" xmlns:a="http://schemas.openxmlformats.org/drawingml/2006/main" r:embed="R0e251a83f2b744e4"/>
           <a:stretch xmlns:a="http://schemas.openxmlformats.org/drawingml/2006/main"/>
         </p:blipFill>
         <p:spPr>
@@ -16032,6 +18421,13 @@
             <a:prstDash val="solid"/>
           </a:ln>
         </p:spPr>
+        <p:txBody>
+          <a:bodyPr xmlns:a="http://schemas.openxmlformats.org/drawingml/2006/main"/>
+          <a:lstStyle xmlns:a="http://schemas.openxmlformats.org/drawingml/2006/main"/>
+          <a:p xmlns:a="http://schemas.openxmlformats.org/drawingml/2006/main">
+            <a:endParaRPr/>
+          </a:p>
+        </p:txBody>
       </p:sp>
       <p:sp>
         <p:nvSpPr>
@@ -16065,6 +18461,13 @@
             <a:prstDash val="solid"/>
           </a:ln>
         </p:spPr>
+        <p:txBody>
+          <a:bodyPr xmlns:a="http://schemas.openxmlformats.org/drawingml/2006/main"/>
+          <a:lstStyle xmlns:a="http://schemas.openxmlformats.org/drawingml/2006/main"/>
+          <a:p xmlns:a="http://schemas.openxmlformats.org/drawingml/2006/main">
+            <a:endParaRPr/>
+          </a:p>
+        </p:txBody>
       </p:sp>
       <p:sp>
         <p:nvSpPr>
@@ -16155,7 +18558,7 @@
         </p:spPr>
         <p:txBody>
           <a:bodyPr xmlns:a="http://schemas.openxmlformats.org/drawingml/2006/main" wrap="square" lIns="38100" tIns="38100" rIns="38100" bIns="38100" anchor="ctr">
-            <a:normAutofit fontScale="100000"/>
+            <a:normAutofit/>
           </a:bodyPr>
           <a:lstStyle xmlns:a="http://schemas.openxmlformats.org/drawingml/2006/main"/>
           <a:p xmlns:a="http://schemas.openxmlformats.org/drawingml/2006/main">
@@ -16214,7 +18617,7 @@
         </p:spPr>
         <p:txBody>
           <a:bodyPr xmlns:a="http://schemas.openxmlformats.org/drawingml/2006/main" wrap="none" lIns="0" tIns="0" rIns="0" bIns="0" anchor="ctr">
-            <a:normAutofit fontScale="100000"/>
+            <a:normAutofit/>
           </a:bodyPr>
           <a:lstStyle xmlns:a="http://schemas.openxmlformats.org/drawingml/2006/main"/>
           <a:p xmlns:a="http://schemas.openxmlformats.org/drawingml/2006/main">
@@ -16277,6 +18680,13 @@
             <a:prstDash val="solid"/>
           </a:ln>
         </p:spPr>
+        <p:txBody>
+          <a:bodyPr xmlns:a="http://schemas.openxmlformats.org/drawingml/2006/main"/>
+          <a:lstStyle xmlns:a="http://schemas.openxmlformats.org/drawingml/2006/main"/>
+          <a:p xmlns:a="http://schemas.openxmlformats.org/drawingml/2006/main">
+            <a:endParaRPr/>
+          </a:p>
+        </p:txBody>
       </p:sp>
       <p:sp>
         <p:nvSpPr>
@@ -16312,11 +18722,12 @@
         </p:spPr>
         <p:txBody>
           <a:bodyPr xmlns:a="http://schemas.openxmlformats.org/drawingml/2006/main" wrap="square" lIns="0" tIns="0" rIns="0" bIns="0" anchor="ctr">
-            <a:normAutofit fontScale="100000"/>
+            <a:normAutofit/>
           </a:bodyPr>
           <a:lstStyle xmlns:a="http://schemas.openxmlformats.org/drawingml/2006/main"/>
           <a:p xmlns:a="http://schemas.openxmlformats.org/drawingml/2006/main">
             <a:pPr algn="ctr">
+              <a:buNone/>
               <a:defRPr sz="1350" b="1">
                 <a:solidFill>
                   <a:srgbClr val="FFFFFF"/>
@@ -16370,11 +18781,12 @@
         </p:spPr>
         <p:txBody>
           <a:bodyPr xmlns:a="http://schemas.openxmlformats.org/drawingml/2006/main" wrap="square" lIns="38100" tIns="19050" rIns="38100" bIns="19050" anchor="t">
-            <a:normAutofit fontScale="100000"/>
+            <a:normAutofit/>
           </a:bodyPr>
           <a:lstStyle xmlns:a="http://schemas.openxmlformats.org/drawingml/2006/main"/>
           <a:p xmlns:a="http://schemas.openxmlformats.org/drawingml/2006/main">
             <a:pPr>
+              <a:buNone/>
               <a:defRPr sz="1500" b="1">
                 <a:solidFill>
                   <a:srgbClr val="102A43"/>
@@ -16428,11 +18840,12 @@
         </p:spPr>
         <p:txBody>
           <a:bodyPr xmlns:a="http://schemas.openxmlformats.org/drawingml/2006/main" wrap="square" lIns="38100" tIns="19050" rIns="38100" bIns="19050" anchor="t">
-            <a:normAutofit fontScale="100000"/>
+            <a:normAutofit/>
           </a:bodyPr>
           <a:lstStyle xmlns:a="http://schemas.openxmlformats.org/drawingml/2006/main"/>
           <a:p xmlns:a="http://schemas.openxmlformats.org/drawingml/2006/main">
             <a:pPr>
+              <a:buNone/>
               <a:defRPr sz="1200">
                 <a:solidFill>
                   <a:srgbClr val="627D98"/>
@@ -16490,6 +18903,13 @@
             <a:prstDash val="solid"/>
           </a:ln>
         </p:spPr>
+        <p:txBody>
+          <a:bodyPr xmlns:a="http://schemas.openxmlformats.org/drawingml/2006/main"/>
+          <a:lstStyle xmlns:a="http://schemas.openxmlformats.org/drawingml/2006/main"/>
+          <a:p xmlns:a="http://schemas.openxmlformats.org/drawingml/2006/main">
+            <a:endParaRPr/>
+          </a:p>
+        </p:txBody>
       </p:sp>
       <p:sp>
         <p:nvSpPr>
@@ -16525,11 +18945,12 @@
         </p:spPr>
         <p:txBody>
           <a:bodyPr xmlns:a="http://schemas.openxmlformats.org/drawingml/2006/main" wrap="square" lIns="0" tIns="0" rIns="0" bIns="0" anchor="ctr">
-            <a:normAutofit fontScale="100000"/>
+            <a:normAutofit/>
           </a:bodyPr>
           <a:lstStyle xmlns:a="http://schemas.openxmlformats.org/drawingml/2006/main"/>
           <a:p xmlns:a="http://schemas.openxmlformats.org/drawingml/2006/main">
             <a:pPr algn="ctr">
+              <a:buNone/>
               <a:defRPr sz="1350" b="1">
                 <a:solidFill>
                   <a:srgbClr val="FFFFFF"/>
@@ -16583,11 +19004,12 @@
         </p:spPr>
         <p:txBody>
           <a:bodyPr xmlns:a="http://schemas.openxmlformats.org/drawingml/2006/main" wrap="square" lIns="38100" tIns="19050" rIns="38100" bIns="19050" anchor="t">
-            <a:normAutofit fontScale="100000"/>
+            <a:normAutofit/>
           </a:bodyPr>
           <a:lstStyle xmlns:a="http://schemas.openxmlformats.org/drawingml/2006/main"/>
           <a:p xmlns:a="http://schemas.openxmlformats.org/drawingml/2006/main">
             <a:pPr>
+              <a:buNone/>
               <a:defRPr sz="1500" b="1">
                 <a:solidFill>
                   <a:srgbClr val="102A43"/>
@@ -16641,11 +19063,12 @@
         </p:spPr>
         <p:txBody>
           <a:bodyPr xmlns:a="http://schemas.openxmlformats.org/drawingml/2006/main" wrap="square" lIns="38100" tIns="19050" rIns="38100" bIns="19050" anchor="t">
-            <a:normAutofit fontScale="100000"/>
+            <a:normAutofit/>
           </a:bodyPr>
           <a:lstStyle xmlns:a="http://schemas.openxmlformats.org/drawingml/2006/main"/>
           <a:p xmlns:a="http://schemas.openxmlformats.org/drawingml/2006/main">
             <a:pPr>
+              <a:buNone/>
               <a:defRPr sz="1200">
                 <a:solidFill>
                   <a:srgbClr val="627D98"/>
@@ -16703,6 +19126,13 @@
             <a:prstDash val="solid"/>
           </a:ln>
         </p:spPr>
+        <p:txBody>
+          <a:bodyPr xmlns:a="http://schemas.openxmlformats.org/drawingml/2006/main"/>
+          <a:lstStyle xmlns:a="http://schemas.openxmlformats.org/drawingml/2006/main"/>
+          <a:p xmlns:a="http://schemas.openxmlformats.org/drawingml/2006/main">
+            <a:endParaRPr/>
+          </a:p>
+        </p:txBody>
       </p:sp>
       <p:sp>
         <p:nvSpPr>
@@ -16738,11 +19168,12 @@
         </p:spPr>
         <p:txBody>
           <a:bodyPr xmlns:a="http://schemas.openxmlformats.org/drawingml/2006/main" wrap="square" lIns="0" tIns="0" rIns="0" bIns="0" anchor="ctr">
-            <a:normAutofit fontScale="100000"/>
+            <a:normAutofit/>
           </a:bodyPr>
           <a:lstStyle xmlns:a="http://schemas.openxmlformats.org/drawingml/2006/main"/>
           <a:p xmlns:a="http://schemas.openxmlformats.org/drawingml/2006/main">
             <a:pPr algn="ctr">
+              <a:buNone/>
               <a:defRPr sz="1350" b="1">
                 <a:solidFill>
                   <a:srgbClr val="FFFFFF"/>
@@ -16796,11 +19227,12 @@
         </p:spPr>
         <p:txBody>
           <a:bodyPr xmlns:a="http://schemas.openxmlformats.org/drawingml/2006/main" wrap="square" lIns="38100" tIns="19050" rIns="38100" bIns="19050" anchor="t">
-            <a:normAutofit fontScale="100000"/>
+            <a:normAutofit/>
           </a:bodyPr>
           <a:lstStyle xmlns:a="http://schemas.openxmlformats.org/drawingml/2006/main"/>
           <a:p xmlns:a="http://schemas.openxmlformats.org/drawingml/2006/main">
             <a:pPr>
+              <a:buNone/>
               <a:defRPr sz="1500" b="1">
                 <a:solidFill>
                   <a:srgbClr val="102A43"/>
@@ -16854,11 +19286,12 @@
         </p:spPr>
         <p:txBody>
           <a:bodyPr xmlns:a="http://schemas.openxmlformats.org/drawingml/2006/main" wrap="square" lIns="38100" tIns="19050" rIns="38100" bIns="19050" anchor="t">
-            <a:normAutofit fontScale="100000"/>
+            <a:normAutofit/>
           </a:bodyPr>
           <a:lstStyle xmlns:a="http://schemas.openxmlformats.org/drawingml/2006/main"/>
           <a:p xmlns:a="http://schemas.openxmlformats.org/drawingml/2006/main">
             <a:pPr>
+              <a:buNone/>
               <a:defRPr sz="1200">
                 <a:solidFill>
                   <a:srgbClr val="627D98"/>
@@ -16912,11 +19345,12 @@
         </p:spPr>
         <p:txBody>
           <a:bodyPr xmlns:a="http://schemas.openxmlformats.org/drawingml/2006/main" wrap="square" lIns="38100" tIns="19050" rIns="38100" bIns="19050" anchor="t">
-            <a:normAutofit fontScale="100000"/>
+            <a:normAutofit/>
           </a:bodyPr>
           <a:lstStyle xmlns:a="http://schemas.openxmlformats.org/drawingml/2006/main"/>
           <a:p xmlns:a="http://schemas.openxmlformats.org/drawingml/2006/main">
             <a:pPr algn="ctr">
+              <a:buNone/>
               <a:defRPr sz="1500">
                 <a:solidFill>
                   <a:srgbClr val="1F2933"/>
